--- a/content/W01/D4/C2_W01_D04_deck_half2_STUDENT.pptx
+++ b/content/W01/D4/C2_W01_D04_deck_half2_STUDENT.pptx
@@ -33,6 +33,7 @@
     <p:sldId id="281" r:id="rId32"/>
     <p:sldId id="282" r:id="rId33"/>
     <p:sldId id="283" r:id="rId34"/>
+    <p:sldId id="284" r:id="rId35"/>
   </p:sldIdLst>
   <p:sldSz cx="12191695" cy="6858000" type="screen4x3"/>
   <p:notesSz cx="6858000" cy="9144000"/>
@@ -3244,7 +3245,7 @@
                 </a:solidFill>
                 <a:latin typeface="Calibri"/>
               </a:rPr>
-              <a:t>[one column] &gt; [what is typical] &gt; [what one record does] &gt; [what the shape says] &gt; [per segment, with denominators]</a:t>
+              <a:t>[one column] &gt; [what is typical] &gt; [what one order does] &gt; [what the shape says] &gt; [per segment, with denominators]</a:t>
             </a:r>
           </a:p>
         </p:txBody>
@@ -3316,7 +3317,7 @@
             <a:avLst/>
           </a:prstGeom>
           <a:solidFill>
-            <a:srgbClr val="2B4A7D"/>
+            <a:srgbClr val="F7F7F5"/>
           </a:solidFill>
           <a:ln>
             <a:noFill/>
@@ -3370,11 +3371,11 @@
             <a:r>
               <a:rPr sz="3600" b="1">
                 <a:solidFill>
-                  <a:srgbClr val="FFFFFF"/>
-                </a:solidFill>
-                <a:latin typeface="Calibri"/>
-              </a:rPr>
-              <a:t>SECTION 2: THE ACCUMULATOR</a:t>
+                  <a:srgbClr val="1C1C1A"/>
+                </a:solidFill>
+                <a:latin typeface="Calibri"/>
+              </a:rPr>
+              <a:t>The rule</a:t>
             </a:r>
           </a:p>
         </p:txBody>
@@ -3402,13 +3403,24 @@
           <a:lstStyle/>
           <a:p>
             <a:r>
+              <a:rPr sz="2100" b="1">
+                <a:solidFill>
+                  <a:srgbClr val="1C1C1A"/>
+                </a:solidFill>
+                <a:latin typeface="Calibri"/>
+              </a:rPr>
+              <a:t>&gt; A rate travels with its denominator or it does not travel.</a:t>
+            </a:r>
+          </a:p>
+          <a:p>
+            <a:r>
               <a:rPr sz="2100">
                 <a:solidFill>
-                  <a:srgbClr val="FFFFFF"/>
-                </a:solidFill>
-                <a:latin typeface="Calibri"/>
-              </a:rPr>
-              <a:t>[one column] &gt; [what is typical] &gt; [what one record does] &gt; [what the shape says] &gt; [per segment, with denominators]</a:t>
+                  <a:srgbClr val="1C1C1A"/>
+                </a:solidFill>
+                <a:latin typeface="Calibri"/>
+              </a:rPr>
+              <a:t>Write it as 11.1 percent of 9 and nobody can misread it. Write it as 11.1 percent and everybody will.</a:t>
             </a:r>
           </a:p>
         </p:txBody>
@@ -3480,7 +3492,7 @@
             <a:avLst/>
           </a:prstGeom>
           <a:solidFill>
-            <a:srgbClr val="F7F7F5"/>
+            <a:srgbClr val="2B4A7D"/>
           </a:solidFill>
           <a:ln>
             <a:noFill/>
@@ -3534,11 +3546,11 @@
             <a:r>
               <a:rPr sz="3600" b="1">
                 <a:solidFill>
-                  <a:srgbClr val="1C1C1A"/>
-                </a:solidFill>
-                <a:latin typeface="Calibri"/>
-              </a:rPr>
-              <a:t>Counting into buckets</a:t>
+                  <a:srgbClr val="FFFFFF"/>
+                </a:solidFill>
+                <a:latin typeface="Calibri"/>
+              </a:rPr>
+              <a:t>SECTION 2: THE ACCUMULATOR</a:t>
             </a:r>
           </a:p>
         </p:txBody>
@@ -3568,66 +3580,11 @@
             <a:r>
               <a:rPr sz="2100">
                 <a:solidFill>
-                  <a:srgbClr val="1C1C1A"/>
-                </a:solidFill>
-                <a:latin typeface="Calibri"/>
-              </a:rPr>
-              <a:t>Monday you counted records that passed a test. Today you count them into named piles, one pile per segment.</a:t>
-            </a:r>
-          </a:p>
-          <a:p>
-            <a:r>
-              <a:rPr sz="1700">
-                <a:solidFill>
-                  <a:srgbClr val="2B4A7D"/>
-                </a:solidFill>
-                <a:latin typeface="Consolas"/>
-              </a:rPr>
-              <a:t>counts = {"segment_a": 0, "segment_b": 0, "segment_c": 0}</a:t>
-            </a:r>
-          </a:p>
-          <a:p>
-            <a:r>
-              <a:rPr sz="1700">
-                <a:solidFill>
-                  <a:srgbClr val="2B4A7D"/>
-                </a:solidFill>
-                <a:latin typeface="Consolas"/>
-              </a:rPr>
-              <a:t/>
-            </a:r>
-          </a:p>
-          <a:p>
-            <a:r>
-              <a:rPr sz="1700">
-                <a:solidFill>
-                  <a:srgbClr val="2B4A7D"/>
-                </a:solidFill>
-                <a:latin typeface="Consolas"/>
-              </a:rPr>
-              <a:t>for r in records:</a:t>
-            </a:r>
-          </a:p>
-          <a:p>
-            <a:r>
-              <a:rPr sz="1700">
-                <a:solidFill>
-                  <a:srgbClr val="2B4A7D"/>
-                </a:solidFill>
-                <a:latin typeface="Consolas"/>
-              </a:rPr>
-              <a:t>    counts[r["segment"]] = counts[r["segment"]] + 1</a:t>
-            </a:r>
-          </a:p>
-          <a:p>
-            <a:r>
-              <a:rPr sz="2100">
-                <a:solidFill>
-                  <a:srgbClr val="1C1C1A"/>
-                </a:solidFill>
-                <a:latin typeface="Calibri"/>
-              </a:rPr>
-              <a:t>Reasonable code. The trainer listed the segments they remembered.</a:t>
+                  <a:srgbClr val="FFFFFF"/>
+                </a:solidFill>
+                <a:latin typeface="Calibri"/>
+              </a:rPr>
+              <a:t>[one column] &gt; [what is typical] &gt; [what one order does] &gt; [what the shape says] &gt; [per segment, with denominators]</a:t>
             </a:r>
           </a:p>
         </p:txBody>
@@ -3757,7 +3714,7 @@
                 </a:solidFill>
                 <a:latin typeface="Calibri"/>
               </a:rPr>
-              <a:t>Run it</a:t>
+              <a:t>Counting into buckets</a:t>
             </a:r>
           </a:p>
         </p:txBody>
@@ -3785,13 +3742,68 @@
           <a:lstStyle/>
           <a:p>
             <a:r>
+              <a:rPr sz="2100">
+                <a:solidFill>
+                  <a:srgbClr val="1C1C1A"/>
+                </a:solidFill>
+                <a:latin typeface="Calibri"/>
+              </a:rPr>
+              <a:t>Monday you counted orders that passed a test. Today you count them into named piles, one pile per segment.</a:t>
+            </a:r>
+          </a:p>
+          <a:p>
+            <a:r>
               <a:rPr sz="1700">
                 <a:solidFill>
                   <a:srgbClr val="2B4A7D"/>
                 </a:solidFill>
                 <a:latin typeface="Consolas"/>
               </a:rPr>
-              <a:t>KeyError: 'segment_d'</a:t>
+              <a:t>counts = {"Retail-Core": 0, "Retail-Plus": 0, "Business": 0}</a:t>
+            </a:r>
+          </a:p>
+          <a:p>
+            <a:r>
+              <a:rPr sz="1700">
+                <a:solidFill>
+                  <a:srgbClr val="2B4A7D"/>
+                </a:solidFill>
+                <a:latin typeface="Consolas"/>
+              </a:rPr>
+              <a:t/>
+            </a:r>
+          </a:p>
+          <a:p>
+            <a:r>
+              <a:rPr sz="1700">
+                <a:solidFill>
+                  <a:srgbClr val="2B4A7D"/>
+                </a:solidFill>
+                <a:latin typeface="Consolas"/>
+              </a:rPr>
+              <a:t>for r in orders:</a:t>
+            </a:r>
+          </a:p>
+          <a:p>
+            <a:r>
+              <a:rPr sz="1700">
+                <a:solidFill>
+                  <a:srgbClr val="2B4A7D"/>
+                </a:solidFill>
+                <a:latin typeface="Consolas"/>
+              </a:rPr>
+              <a:t>    counts[r["segment"]] = counts[r["segment"]] + 1</a:t>
+            </a:r>
+          </a:p>
+          <a:p>
+            <a:r>
+              <a:rPr sz="2100">
+                <a:solidFill>
+                  <a:srgbClr val="1C1C1A"/>
+                </a:solidFill>
+                <a:latin typeface="Calibri"/>
+              </a:rPr>
+              <a:t>Reasonable code. The analyst listed the segments they remembered.</a:t>
             </a:r>
           </a:p>
         </p:txBody>
@@ -3921,7 +3933,7 @@
                 </a:solidFill>
                 <a:latin typeface="Calibri"/>
               </a:rPr>
-              <a:t>Reading it</a:t>
+              <a:t>Run it</a:t>
             </a:r>
           </a:p>
         </p:txBody>
@@ -3949,35 +3961,24 @@
           <a:lstStyle/>
           <a:p>
             <a:r>
+              <a:rPr sz="1700">
+                <a:solidFill>
+                  <a:srgbClr val="2B4A7D"/>
+                </a:solidFill>
+                <a:latin typeface="Consolas"/>
+              </a:rPr>
+              <a:t>KeyError: 'Student'</a:t>
+            </a:r>
+          </a:p>
+          <a:p>
+            <a:r>
               <a:rPr sz="2100">
                 <a:solidFill>
                   <a:srgbClr val="1C1C1A"/>
                 </a:solidFill>
                 <a:latin typeface="Calibri"/>
               </a:rPr>
-              <a:t>KeyError means a dictionary was asked for a key it does not hold. The key it did not hold is printed for you: segment_d.</a:t>
-            </a:r>
-          </a:p>
-          <a:p>
-            <a:r>
-              <a:rPr sz="2100">
-                <a:solidFill>
-                  <a:srgbClr val="1C1C1A"/>
-                </a:solidFill>
-                <a:latin typeface="Calibri"/>
-              </a:rPr>
-              <a:t>The dictionary held three segments because a person typed three segments. The file holds four.</a:t>
-            </a:r>
-          </a:p>
-          <a:p>
-            <a:r>
-              <a:rPr sz="2100">
-                <a:solidFill>
-                  <a:srgbClr val="1C1C1A"/>
-                </a:solidFill>
-                <a:latin typeface="Calibri"/>
-              </a:rPr>
-              <a:t>Every hard-coded list of categories is a promise about data you have not read yet.</a:t>
+              <a:t>It failed on the very first order in the file.</a:t>
             </a:r>
           </a:p>
         </p:txBody>
@@ -4107,7 +4108,7 @@
                 </a:solidFill>
                 <a:latin typeface="Calibri"/>
               </a:rPr>
-              <a:t>Build the key when you first see it</a:t>
+              <a:t>Reading it</a:t>
             </a:r>
           </a:p>
         </p:txBody>
@@ -4135,90 +4136,13 @@
           <a:lstStyle/>
           <a:p>
             <a:r>
-              <a:rPr sz="1700">
-                <a:solidFill>
-                  <a:srgbClr val="2B4A7D"/>
-                </a:solidFill>
-                <a:latin typeface="Consolas"/>
-              </a:rPr>
-              <a:t>counts = {}</a:t>
-            </a:r>
-          </a:p>
-          <a:p>
-            <a:r>
-              <a:rPr sz="1700">
-                <a:solidFill>
-                  <a:srgbClr val="2B4A7D"/>
-                </a:solidFill>
-                <a:latin typeface="Consolas"/>
-              </a:rPr>
-              <a:t/>
-            </a:r>
-          </a:p>
-          <a:p>
-            <a:r>
-              <a:rPr sz="1700">
-                <a:solidFill>
-                  <a:srgbClr val="2B4A7D"/>
-                </a:solidFill>
-                <a:latin typeface="Consolas"/>
-              </a:rPr>
-              <a:t>for r in records:</a:t>
-            </a:r>
-          </a:p>
-          <a:p>
-            <a:r>
-              <a:rPr sz="1700">
-                <a:solidFill>
-                  <a:srgbClr val="2B4A7D"/>
-                </a:solidFill>
-                <a:latin typeface="Consolas"/>
-              </a:rPr>
-              <a:t>    key = r["segment"]</a:t>
-            </a:r>
-          </a:p>
-          <a:p>
-            <a:r>
-              <a:rPr sz="1700">
-                <a:solidFill>
-                  <a:srgbClr val="2B4A7D"/>
-                </a:solidFill>
-                <a:latin typeface="Consolas"/>
-              </a:rPr>
-              <a:t>    if key not in counts:</a:t>
-            </a:r>
-          </a:p>
-          <a:p>
-            <a:r>
-              <a:rPr sz="1700">
-                <a:solidFill>
-                  <a:srgbClr val="2B4A7D"/>
-                </a:solidFill>
-                <a:latin typeface="Consolas"/>
-              </a:rPr>
-              <a:t>        counts[key] = 0</a:t>
-            </a:r>
-          </a:p>
-          <a:p>
-            <a:r>
-              <a:rPr sz="1700">
-                <a:solidFill>
-                  <a:srgbClr val="2B4A7D"/>
-                </a:solidFill>
-                <a:latin typeface="Consolas"/>
-              </a:rPr>
-              <a:t>    counts[key] = counts[key] + 1</a:t>
-            </a:r>
-          </a:p>
-          <a:p>
-            <a:r>
               <a:rPr sz="2100">
                 <a:solidFill>
                   <a:srgbClr val="1C1C1A"/>
                 </a:solidFill>
                 <a:latin typeface="Calibri"/>
               </a:rPr>
-              <a:t>Three lines instead of one declaration, and the code now works on a file with segments nobody told you about.</a:t>
+              <a:t>KeyError means a dictionary was asked for a key it does not hold. The key it did not hold is printed for you: Student.</a:t>
             </a:r>
           </a:p>
           <a:p>
@@ -4229,18 +4153,7 @@
                 </a:solidFill>
                 <a:latin typeface="Calibri"/>
               </a:rPr>
-              <a:t>The same shape written shorter, which you will meet again in Week 2:</a:t>
-            </a:r>
-          </a:p>
-          <a:p>
-            <a:r>
-              <a:rPr sz="1700">
-                <a:solidFill>
-                  <a:srgbClr val="2B4A7D"/>
-                </a:solidFill>
-                <a:latin typeface="Consolas"/>
-              </a:rPr>
-              <a:t>counts[key] = counts.get(key, 0) + 1</a:t>
+              <a:t>The dictionary held three segments because a person typed three segments. Kalpa Retail has four.</a:t>
             </a:r>
           </a:p>
           <a:p>
@@ -4251,7 +4164,18 @@
                 </a:solidFill>
                 <a:latin typeface="Calibri"/>
               </a:rPr>
-              <a:t>That is Monday's .get() with a default, doing exactly what it did on Monday.</a:t>
+              <a:t>Every hard-coded list of categories is a promise about data you have not read yet.</a:t>
+            </a:r>
+          </a:p>
+          <a:p>
+            <a:r>
+              <a:rPr sz="2100">
+                <a:solidFill>
+                  <a:srgbClr val="1C1C1A"/>
+                </a:solidFill>
+                <a:latin typeface="Calibri"/>
+              </a:rPr>
+              <a:t>This one is loud, because the first order in the file is a Student order. The dangerous version runs for six months and breaks the week a new segment launches.</a:t>
             </a:r>
           </a:p>
         </p:txBody>
@@ -4381,7 +4305,7 @@
                 </a:solidFill>
                 <a:latin typeface="Calibri"/>
               </a:rPr>
-              <a:t>The fixed count</a:t>
+              <a:t>Build the key when you first see it</a:t>
             </a:r>
           </a:p>
         </p:txBody>
@@ -4415,7 +4339,7 @@
                 </a:solidFill>
                 <a:latin typeface="Consolas"/>
               </a:rPr>
-              <a:t>segment_a: 20</a:t>
+              <a:t>counts = {}</a:t>
             </a:r>
           </a:p>
           <a:p>
@@ -4426,7 +4350,7 @@
                 </a:solidFill>
                 <a:latin typeface="Consolas"/>
               </a:rPr>
-              <a:t>segment_b: 9</a:t>
+              <a:t/>
             </a:r>
           </a:p>
           <a:p>
@@ -4437,7 +4361,7 @@
                 </a:solidFill>
                 <a:latin typeface="Consolas"/>
               </a:rPr>
-              <a:t>segment_c: 6</a:t>
+              <a:t>for r in orders:</a:t>
             </a:r>
           </a:p>
           <a:p>
@@ -4448,7 +4372,7 @@
                 </a:solidFill>
                 <a:latin typeface="Consolas"/>
               </a:rPr>
-              <a:t>segment_d: 12</a:t>
+              <a:t>    key = r["segment"]</a:t>
             </a:r>
           </a:p>
           <a:p>
@@ -4459,7 +4383,29 @@
                 </a:solidFill>
                 <a:latin typeface="Consolas"/>
               </a:rPr>
-              <a:t>        total: 47</a:t>
+              <a:t>    if key not in counts:</a:t>
+            </a:r>
+          </a:p>
+          <a:p>
+            <a:r>
+              <a:rPr sz="1700">
+                <a:solidFill>
+                  <a:srgbClr val="2B4A7D"/>
+                </a:solidFill>
+                <a:latin typeface="Consolas"/>
+              </a:rPr>
+              <a:t>        counts[key] = 0</a:t>
+            </a:r>
+          </a:p>
+          <a:p>
+            <a:r>
+              <a:rPr sz="1700">
+                <a:solidFill>
+                  <a:srgbClr val="2B4A7D"/>
+                </a:solidFill>
+                <a:latin typeface="Consolas"/>
+              </a:rPr>
+              <a:t>    counts[key] = counts[key] + 1</a:t>
             </a:r>
           </a:p>
           <a:p>
@@ -4470,7 +4416,40 @@
                 </a:solidFill>
                 <a:latin typeface="Calibri"/>
               </a:rPr>
-              <a:t>The total matches your cleaned record count. If it did not, you would have a bug and the last line is how you would know.</a:t>
+              <a:t>Three lines instead of one declaration, and the code now works on a file with segments nobody told you about.</a:t>
+            </a:r>
+          </a:p>
+          <a:p>
+            <a:r>
+              <a:rPr sz="2100">
+                <a:solidFill>
+                  <a:srgbClr val="1C1C1A"/>
+                </a:solidFill>
+                <a:latin typeface="Calibri"/>
+              </a:rPr>
+              <a:t>The same shape written shorter, which you will meet again in Week 2:</a:t>
+            </a:r>
+          </a:p>
+          <a:p>
+            <a:r>
+              <a:rPr sz="1700">
+                <a:solidFill>
+                  <a:srgbClr val="2B4A7D"/>
+                </a:solidFill>
+                <a:latin typeface="Consolas"/>
+              </a:rPr>
+              <a:t>counts[key] = counts.get(key, 0) + 1</a:t>
+            </a:r>
+          </a:p>
+          <a:p>
+            <a:r>
+              <a:rPr sz="2100">
+                <a:solidFill>
+                  <a:srgbClr val="1C1C1A"/>
+                </a:solidFill>
+                <a:latin typeface="Calibri"/>
+              </a:rPr>
+              <a:t>That is Monday's .get() with a default, doing exactly what it did on Monday.</a:t>
             </a:r>
           </a:p>
         </p:txBody>
@@ -4542,7 +4521,7 @@
             <a:avLst/>
           </a:prstGeom>
           <a:solidFill>
-            <a:srgbClr val="2B4A7D"/>
+            <a:srgbClr val="F7F7F5"/>
           </a:solidFill>
           <a:ln>
             <a:noFill/>
@@ -4596,11 +4575,11 @@
             <a:r>
               <a:rPr sz="3600" b="1">
                 <a:solidFill>
-                  <a:srgbClr val="FFFFFF"/>
-                </a:solidFill>
-                <a:latin typeface="Calibri"/>
-              </a:rPr>
-              <a:t>SECTION 3: THE SEGMENT SUMMARY</a:t>
+                  <a:srgbClr val="1C1C1A"/>
+                </a:solidFill>
+                <a:latin typeface="Calibri"/>
+              </a:rPr>
+              <a:t>The fixed count</a:t>
             </a:r>
           </a:p>
         </p:txBody>
@@ -4628,13 +4607,79 @@
           <a:lstStyle/>
           <a:p>
             <a:r>
+              <a:rPr sz="1700">
+                <a:solidFill>
+                  <a:srgbClr val="2B4A7D"/>
+                </a:solidFill>
+                <a:latin typeface="Consolas"/>
+              </a:rPr>
+              <a:t>Business       9</a:t>
+            </a:r>
+          </a:p>
+          <a:p>
+            <a:r>
+              <a:rPr sz="1700">
+                <a:solidFill>
+                  <a:srgbClr val="2B4A7D"/>
+                </a:solidFill>
+                <a:latin typeface="Consolas"/>
+              </a:rPr>
+              <a:t>Retail-Core   14</a:t>
+            </a:r>
+          </a:p>
+          <a:p>
+            <a:r>
+              <a:rPr sz="1700">
+                <a:solidFill>
+                  <a:srgbClr val="2B4A7D"/>
+                </a:solidFill>
+                <a:latin typeface="Consolas"/>
+              </a:rPr>
+              <a:t>Retail-Plus   11</a:t>
+            </a:r>
+          </a:p>
+          <a:p>
+            <a:r>
+              <a:rPr sz="1700">
+                <a:solidFill>
+                  <a:srgbClr val="2B4A7D"/>
+                </a:solidFill>
+                <a:latin typeface="Consolas"/>
+              </a:rPr>
+              <a:t>Student       10</a:t>
+            </a:r>
+          </a:p>
+          <a:p>
+            <a:r>
+              <a:rPr sz="1700">
+                <a:solidFill>
+                  <a:srgbClr val="2B4A7D"/>
+                </a:solidFill>
+                <a:latin typeface="Consolas"/>
+              </a:rPr>
+              <a:t>      total   44</a:t>
+            </a:r>
+          </a:p>
+          <a:p>
+            <a:r>
               <a:rPr sz="2100">
                 <a:solidFill>
-                  <a:srgbClr val="FFFFFF"/>
-                </a:solidFill>
-                <a:latin typeface="Calibri"/>
-              </a:rPr>
-              <a:t>[one column] &gt; [what is typical] &gt; [what one record does] &gt; [what the shape says] &gt; [per segment, with denominators]</a:t>
+                  <a:srgbClr val="1C1C1A"/>
+                </a:solidFill>
+                <a:latin typeface="Calibri"/>
+              </a:rPr>
+              <a:t>The total matches your profiled order count. If it did not, you would have a bug and the last line is how you would know.</a:t>
+            </a:r>
+          </a:p>
+          <a:p>
+            <a:r>
+              <a:rPr sz="2100">
+                <a:solidFill>
+                  <a:srgbClr val="1C1C1A"/>
+                </a:solidFill>
+                <a:latin typeface="Calibri"/>
+              </a:rPr>
+              <a:t>One number here deserves a second look. Student holds ten. The raw file held twelve, and two Student orders were rejected yesterday for failing conversion. Your cleaning changed the denominator of your smallest segment by seventeen percent, and nothing in today's code would tell you. Yesterday's rejects log is the only place it is written down.</a:t>
             </a:r>
           </a:p>
         </p:txBody>
@@ -4706,7 +4751,7 @@
             <a:avLst/>
           </a:prstGeom>
           <a:solidFill>
-            <a:srgbClr val="F7F7F5"/>
+            <a:srgbClr val="2B4A7D"/>
           </a:solidFill>
           <a:ln>
             <a:noFill/>
@@ -4760,11 +4805,11 @@
             <a:r>
               <a:rPr sz="3600" b="1">
                 <a:solidFill>
-                  <a:srgbClr val="1C1C1A"/>
-                </a:solidFill>
-                <a:latin typeface="Calibri"/>
-              </a:rPr>
-              <a:t>Three accumulators, one pass</a:t>
+                  <a:srgbClr val="FFFFFF"/>
+                </a:solidFill>
+                <a:latin typeface="Calibri"/>
+              </a:rPr>
+              <a:t>SECTION 3: THE SEGMENT SUMMARY</a:t>
             </a:r>
           </a:p>
         </p:txBody>
@@ -4794,77 +4839,11 @@
             <a:r>
               <a:rPr sz="2100">
                 <a:solidFill>
-                  <a:srgbClr val="1C1C1A"/>
-                </a:solidFill>
-                <a:latin typeface="Calibri"/>
-              </a:rPr>
-              <a:t>Per segment you need three things: how many records, what a typical amount looks like, and what share were accepted.</a:t>
-            </a:r>
-          </a:p>
-          <a:p>
-            <a:r>
-              <a:rPr sz="1700">
-                <a:solidFill>
-                  <a:srgbClr val="2B4A7D"/>
-                </a:solidFill>
-                <a:latin typeface="Consolas"/>
-              </a:rPr>
-              <a:t>per_segment[key] = {</a:t>
-            </a:r>
-          </a:p>
-          <a:p>
-            <a:r>
-              <a:rPr sz="1700">
-                <a:solidFill>
-                  <a:srgbClr val="2B4A7D"/>
-                </a:solidFill>
-                <a:latin typeface="Consolas"/>
-              </a:rPr>
-              <a:t>    "count":    how many records landed here,</a:t>
-            </a:r>
-          </a:p>
-          <a:p>
-            <a:r>
-              <a:rPr sz="1700">
-                <a:solidFill>
-                  <a:srgbClr val="2B4A7D"/>
-                </a:solidFill>
-                <a:latin typeface="Consolas"/>
-              </a:rPr>
-              <a:t>    "amounts":  every amount, collected so the median can be taken at the end,</a:t>
-            </a:r>
-          </a:p>
-          <a:p>
-            <a:r>
-              <a:rPr sz="1700">
-                <a:solidFill>
-                  <a:srgbClr val="2B4A7D"/>
-                </a:solidFill>
-                <a:latin typeface="Consolas"/>
-              </a:rPr>
-              <a:t>    "accepted": how many had outcome "accepted",</a:t>
-            </a:r>
-          </a:p>
-          <a:p>
-            <a:r>
-              <a:rPr sz="1700">
-                <a:solidFill>
-                  <a:srgbClr val="2B4A7D"/>
-                </a:solidFill>
-                <a:latin typeface="Consolas"/>
-              </a:rPr>
-              <a:t>}</a:t>
-            </a:r>
-          </a:p>
-          <a:p>
-            <a:r>
-              <a:rPr sz="2100">
-                <a:solidFill>
-                  <a:srgbClr val="1C1C1A"/>
-                </a:solidFill>
-                <a:latin typeface="Calibri"/>
-              </a:rPr>
-              <a:t>The median cannot be accumulated one record at a time. It needs the whole list sorted, so the list is collected during the pass and the median is taken after it.</a:t>
+                  <a:srgbClr val="FFFFFF"/>
+                </a:solidFill>
+                <a:latin typeface="Calibri"/>
+              </a:rPr>
+              <a:t>[one column] &gt; [what is typical] &gt; [what one order does] &gt; [what the shape says] &gt; [per segment, with denominators]</a:t>
             </a:r>
           </a:p>
         </p:txBody>
@@ -4994,7 +4973,7 @@
                 </a:solidFill>
                 <a:latin typeface="Calibri"/>
               </a:rPr>
-              <a:t>The table</a:t>
+              <a:t>Three accumulators, one pass</a:t>
             </a:r>
           </a:p>
         </p:txBody>
@@ -5022,13 +5001,24 @@
           <a:lstStyle/>
           <a:p>
             <a:r>
+              <a:rPr sz="2100">
+                <a:solidFill>
+                  <a:srgbClr val="1C1C1A"/>
+                </a:solidFill>
+                <a:latin typeface="Calibri"/>
+              </a:rPr>
+              <a:t>Per segment you need three things: how many orders, what a typical amount looks like, and what share came back.</a:t>
+            </a:r>
+          </a:p>
+          <a:p>
+            <a:r>
               <a:rPr sz="1700">
                 <a:solidFill>
                   <a:srgbClr val="2B4A7D"/>
                 </a:solidFill>
                 <a:latin typeface="Consolas"/>
               </a:rPr>
-              <a:t>segment      count   median amount   accepted   rate</a:t>
+              <a:t>per_segment[key] = {</a:t>
             </a:r>
           </a:p>
           <a:p>
@@ -5039,7 +5029,7 @@
                 </a:solidFill>
                 <a:latin typeface="Consolas"/>
               </a:rPr>
-              <a:t>segment_a       20        Rs 7,950          9   45.0%</a:t>
+              <a:t>    "count":    how many orders landed here,</a:t>
             </a:r>
           </a:p>
           <a:p>
@@ -5050,7 +5040,7 @@
                 </a:solidFill>
                 <a:latin typeface="Consolas"/>
               </a:rPr>
-              <a:t>segment_b        9        Rs 8,000          4   44.4%</a:t>
+              <a:t>    "amounts":  every amount, collected so the median can be taken at the end,</a:t>
             </a:r>
           </a:p>
           <a:p>
@@ -5061,7 +5051,7 @@
                 </a:solidFill>
                 <a:latin typeface="Consolas"/>
               </a:rPr>
-              <a:t>segment_c        6        Rs 6,800          3   50.0%</a:t>
+              <a:t>    "returned": how many had status "returned",</a:t>
             </a:r>
           </a:p>
           <a:p>
@@ -5072,7 +5062,7 @@
                 </a:solidFill>
                 <a:latin typeface="Consolas"/>
               </a:rPr>
-              <a:t>segment_d       12        Rs 6,750          7   58.3%</a:t>
+              <a:t>}</a:t>
             </a:r>
           </a:p>
           <a:p>
@@ -5083,7 +5073,7 @@
                 </a:solidFill>
                 <a:latin typeface="Calibri"/>
               </a:rPr>
-              <a:t>Note what is absent from every row: the mean. Half one settled that.</a:t>
+              <a:t>The median cannot be accumulated one order at a time. It needs the whole list sorted, so the list is collected during the pass and the median is taken after it.</a:t>
             </a:r>
           </a:p>
         </p:txBody>
@@ -5213,7 +5203,7 @@
                 </a:solidFill>
                 <a:latin typeface="Calibri"/>
               </a:rPr>
-              <a:t>Sort by rate, the way anyone would</a:t>
+              <a:t>The table</a:t>
             </a:r>
           </a:p>
         </p:txBody>
@@ -5247,7 +5237,7 @@
                 </a:solidFill>
                 <a:latin typeface="Consolas"/>
               </a:rPr>
-              <a:t>segment_d   58.3%</a:t>
+              <a:t>segment        orders   median amount   returned   rate</a:t>
             </a:r>
           </a:p>
           <a:p>
@@ -5258,7 +5248,7 @@
                 </a:solidFill>
                 <a:latin typeface="Consolas"/>
               </a:rPr>
-              <a:t>segment_c   50.0%</a:t>
+              <a:t>Business            9        Rs 2,050          1   11.1%</a:t>
             </a:r>
           </a:p>
           <a:p>
@@ -5269,7 +5259,7 @@
                 </a:solidFill>
                 <a:latin typeface="Consolas"/>
               </a:rPr>
-              <a:t>segment_a   45.0%</a:t>
+              <a:t>Retail-Core        14        Rs 1,910          5   35.7%</a:t>
             </a:r>
           </a:p>
           <a:p>
@@ -5280,7 +5270,18 @@
                 </a:solidFill>
                 <a:latin typeface="Consolas"/>
               </a:rPr>
-              <a:t>segment_b   44.4%</a:t>
+              <a:t>Retail-Plus        11        Rs 1,435          4   36.4%</a:t>
+            </a:r>
+          </a:p>
+          <a:p>
+            <a:r>
+              <a:rPr sz="1700">
+                <a:solidFill>
+                  <a:srgbClr val="2B4A7D"/>
+                </a:solidFill>
+                <a:latin typeface="Consolas"/>
+              </a:rPr>
+              <a:t>Student            10        Rs 1,430          2   20.0%</a:t>
             </a:r>
           </a:p>
           <a:p>
@@ -5291,18 +5292,7 @@
                 </a:solidFill>
                 <a:latin typeface="Calibri"/>
               </a:rPr>
-              <a:t>A clean ranking. segment_d is the winner by more than eight points.</a:t>
-            </a:r>
-          </a:p>
-          <a:p>
-            <a:r>
-              <a:rPr sz="2100">
-                <a:solidFill>
-                  <a:srgbClr val="1C1C1A"/>
-                </a:solidFill>
-                <a:latin typeface="Calibri"/>
-              </a:rPr>
-              <a:t>Somebody in a meeting is about to move budget.</a:t>
+              <a:t>Note what is absent from every row: the mean. Half one settled that.</a:t>
             </a:r>
           </a:p>
         </p:txBody>
@@ -5466,7 +5456,7 @@
                 </a:solidFill>
                 <a:latin typeface="Calibri"/>
               </a:rPr>
-              <a:t>Half one gave you one number for the whole file. Nobody runs a business on one number.</a:t>
+              <a:t>Half one gave you one number for the whole file. Nobody runs a business unit on one number.</a:t>
             </a:r>
           </a:p>
           <a:p>
@@ -5477,7 +5467,7 @@
                 </a:solidFill>
                 <a:latin typeface="Calibri"/>
               </a:rPr>
-              <a:t>The question is always the same one level down: which part of this is working, and how sure can you be.</a:t>
+              <a:t>The question is always the same one level down: which part of Kalpa Retail is working, and how sure can you be.</a:t>
             </a:r>
           </a:p>
         </p:txBody>
@@ -5607,7 +5597,7 @@
                 </a:solidFill>
                 <a:latin typeface="Calibri"/>
               </a:rPr>
-              <a:t>Put the count back</a:t>
+              <a:t>Sort by rate, the way anyone would</a:t>
             </a:r>
           </a:p>
         </p:txBody>
@@ -5641,7 +5631,7 @@
                 </a:solidFill>
                 <a:latin typeface="Consolas"/>
               </a:rPr>
-              <a:t>segment_d   58.3%   on 12 records</a:t>
+              <a:t>Business      11.1%</a:t>
             </a:r>
           </a:p>
           <a:p>
@@ -5652,7 +5642,7 @@
                 </a:solidFill>
                 <a:latin typeface="Consolas"/>
               </a:rPr>
-              <a:t>segment_c   50.0%   on  6 records</a:t>
+              <a:t>Student       20.0%</a:t>
             </a:r>
           </a:p>
           <a:p>
@@ -5663,7 +5653,7 @@
                 </a:solidFill>
                 <a:latin typeface="Consolas"/>
               </a:rPr>
-              <a:t>segment_a   45.0%   on 20 records</a:t>
+              <a:t>Retail-Core   35.7%</a:t>
             </a:r>
           </a:p>
           <a:p>
@@ -5674,7 +5664,7 @@
                 </a:solidFill>
                 <a:latin typeface="Consolas"/>
               </a:rPr>
-              <a:t>segment_b   44.4%   on  9 records</a:t>
+              <a:t>Retail-Plus   36.4%</a:t>
             </a:r>
           </a:p>
           <a:p>
@@ -5685,7 +5675,7 @@
                 </a:solidFill>
                 <a:latin typeface="Calibri"/>
               </a:rPr>
-              <a:t>The top two performers are the two smallest segments in the file.</a:t>
+              <a:t>A clean ranking. Business returns at less than a third of the worst segment.</a:t>
             </a:r>
           </a:p>
           <a:p>
@@ -5696,7 +5686,7 @@
                 </a:solidFill>
                 <a:latin typeface="Calibri"/>
               </a:rPr>
-              <a:t>segment_d's lead over segment_a is 13.3 points and rests on 12 records. Move two of those records and the lead is gone.</a:t>
+              <a:t>Somebody in a meeting is about to move budget towards Business.</a:t>
             </a:r>
           </a:p>
         </p:txBody>
@@ -5826,7 +5816,7 @@
                 </a:solidFill>
                 <a:latin typeface="Calibri"/>
               </a:rPr>
-              <a:t>What the ranking was measuring</a:t>
+              <a:t>Put the count back</a:t>
             </a:r>
           </a:p>
         </p:txBody>
@@ -5854,13 +5844,57 @@
           <a:lstStyle/>
           <a:p>
             <a:r>
+              <a:rPr sz="1700">
+                <a:solidFill>
+                  <a:srgbClr val="2B4A7D"/>
+                </a:solidFill>
+                <a:latin typeface="Consolas"/>
+              </a:rPr>
+              <a:t>Business      11.1%   on  9 orders</a:t>
+            </a:r>
+          </a:p>
+          <a:p>
+            <a:r>
+              <a:rPr sz="1700">
+                <a:solidFill>
+                  <a:srgbClr val="2B4A7D"/>
+                </a:solidFill>
+                <a:latin typeface="Consolas"/>
+              </a:rPr>
+              <a:t>Student       20.0%   on 10 orders</a:t>
+            </a:r>
+          </a:p>
+          <a:p>
+            <a:r>
+              <a:rPr sz="1700">
+                <a:solidFill>
+                  <a:srgbClr val="2B4A7D"/>
+                </a:solidFill>
+                <a:latin typeface="Consolas"/>
+              </a:rPr>
+              <a:t>Retail-Core   35.7%   on 14 orders</a:t>
+            </a:r>
+          </a:p>
+          <a:p>
+            <a:r>
+              <a:rPr sz="1700">
+                <a:solidFill>
+                  <a:srgbClr val="2B4A7D"/>
+                </a:solidFill>
+                <a:latin typeface="Consolas"/>
+              </a:rPr>
+              <a:t>Retail-Plus   36.4%   on 11 orders</a:t>
+            </a:r>
+          </a:p>
+          <a:p>
+            <a:r>
               <a:rPr sz="2100">
                 <a:solidFill>
                   <a:srgbClr val="1C1C1A"/>
                 </a:solidFill>
                 <a:latin typeface="Calibri"/>
               </a:rPr>
-              <a:t>Small groups produce extreme rates in both directions, every time, in any dataset, with no cause behind it at all.</a:t>
+              <a:t>The top two performers are the two smallest segments in the file.</a:t>
             </a:r>
           </a:p>
           <a:p>
@@ -5871,18 +5905,7 @@
                 </a:solidFill>
                 <a:latin typeface="Calibri"/>
               </a:rPr>
-              <a:t>Rank any set of groups by a rate and the smallest groups drift to both ends of the list. The ranking is reading group size as much as it is reading performance.</a:t>
-            </a:r>
-          </a:p>
-          <a:p>
-            <a:r>
-              <a:rPr sz="2100">
-                <a:solidFill>
-                  <a:srgbClr val="1C1C1A"/>
-                </a:solidFill>
-                <a:latin typeface="Calibri"/>
-              </a:rPr>
-              <a:t>The fix is not a cleverer statistic. It is the column you already have.</a:t>
+              <a:t>Business wins on nine orders.</a:t>
             </a:r>
           </a:p>
         </p:txBody>
@@ -5954,7 +5977,7 @@
             <a:avLst/>
           </a:prstGeom>
           <a:solidFill>
-            <a:srgbClr val="2B4A7D"/>
+            <a:srgbClr val="F7F7F5"/>
           </a:solidFill>
           <a:ln>
             <a:noFill/>
@@ -6008,11 +6031,11 @@
             <a:r>
               <a:rPr sz="3600" b="1">
                 <a:solidFill>
-                  <a:srgbClr val="FFFFFF"/>
-                </a:solidFill>
-                <a:latin typeface="Calibri"/>
-              </a:rPr>
-              <a:t>SECTION 4: THE HONEST SENTENCE</a:t>
+                  <a:srgbClr val="1C1C1A"/>
+                </a:solidFill>
+                <a:latin typeface="Calibri"/>
+              </a:rPr>
+              <a:t>One order</a:t>
             </a:r>
           </a:p>
         </p:txBody>
@@ -6040,13 +6063,57 @@
           <a:lstStyle/>
           <a:p>
             <a:r>
+              <a:rPr sz="1700">
+                <a:solidFill>
+                  <a:srgbClr val="2B4A7D"/>
+                </a:solidFill>
+                <a:latin typeface="Consolas"/>
+              </a:rPr>
+              <a:t>if 0 more Business orders had been returned:  11.1%   still best</a:t>
+            </a:r>
+          </a:p>
+          <a:p>
+            <a:r>
+              <a:rPr sz="1700">
+                <a:solidFill>
+                  <a:srgbClr val="2B4A7D"/>
+                </a:solidFill>
+                <a:latin typeface="Consolas"/>
+              </a:rPr>
+              <a:t>if 1 more Business order  had been returned:  22.2%   no longer best</a:t>
+            </a:r>
+          </a:p>
+          <a:p>
+            <a:r>
               <a:rPr sz="2100">
                 <a:solidFill>
-                  <a:srgbClr val="FFFFFF"/>
-                </a:solidFill>
-                <a:latin typeface="Calibri"/>
-              </a:rPr>
-              <a:t>[one column] &gt; [what is typical] &gt; [what one record does] &gt; [what the shape says] &gt; [per segment, with denominators]</a:t>
+                  <a:srgbClr val="1C1C1A"/>
+                </a:solidFill>
+                <a:latin typeface="Calibri"/>
+              </a:rPr>
+              <a:t>One order out of forty-four, in a segment of nine, and the best segment in the file is no longer the best segment in the file.</a:t>
+            </a:r>
+          </a:p>
+          <a:p>
+            <a:r>
+              <a:rPr sz="2100">
+                <a:solidFill>
+                  <a:srgbClr val="1C1C1A"/>
+                </a:solidFill>
+                <a:latin typeface="Calibri"/>
+              </a:rPr>
+              <a:t>Small groups produce extreme rates in both directions, in any dataset, with nothing causing it. Rank groups by a rate and the smallest drift to both ends of the list, so the ranking reads group size as much as performance.</a:t>
+            </a:r>
+          </a:p>
+          <a:p>
+            <a:r>
+              <a:rPr sz="2100">
+                <a:solidFill>
+                  <a:srgbClr val="1C1C1A"/>
+                </a:solidFill>
+                <a:latin typeface="Calibri"/>
+              </a:rPr>
+              <a:t>The fix is not a cleverer statistic. It is the column you already have.</a:t>
             </a:r>
           </a:p>
         </p:txBody>
@@ -6118,7 +6185,7 @@
             <a:avLst/>
           </a:prstGeom>
           <a:solidFill>
-            <a:srgbClr val="F7F7F5"/>
+            <a:srgbClr val="2B4A7D"/>
           </a:solidFill>
           <a:ln>
             <a:noFill/>
@@ -6172,11 +6239,11 @@
             <a:r>
               <a:rPr sz="3600" b="1">
                 <a:solidFill>
-                  <a:srgbClr val="1C1C1A"/>
-                </a:solidFill>
-                <a:latin typeface="Calibri"/>
-              </a:rPr>
-              <a:t>The shape of the sentence</a:t>
+                  <a:srgbClr val="FFFFFF"/>
+                </a:solidFill>
+                <a:latin typeface="Calibri"/>
+              </a:rPr>
+              <a:t>SECTION 4: THE HONEST SENTENCE</a:t>
             </a:r>
           </a:p>
         </p:txBody>
@@ -6206,33 +6273,11 @@
             <a:r>
               <a:rPr sz="2100">
                 <a:solidFill>
-                  <a:srgbClr val="1C1C1A"/>
-                </a:solidFill>
-                <a:latin typeface="Calibri"/>
-              </a:rPr>
-              <a:t>Three parts, in this order, every time:</a:t>
-            </a:r>
-          </a:p>
-          <a:p>
-            <a:r>
-              <a:rPr sz="1700">
-                <a:solidFill>
-                  <a:srgbClr val="2B4A7D"/>
-                </a:solidFill>
-                <a:latin typeface="Consolas"/>
-              </a:rPr>
-              <a:t>[the number]   [the denominator]   [what it does not yet support]</a:t>
-            </a:r>
-          </a:p>
-          <a:p>
-            <a:r>
-              <a:rPr sz="2100">
-                <a:solidFill>
-                  <a:srgbClr val="1C1C1A"/>
-                </a:solidFill>
-                <a:latin typeface="Calibri"/>
-              </a:rPr>
-              <a:t>Leaving out the third part is how a caveat gets lost between your notebook and a slide somebody else builds.</a:t>
+                  <a:srgbClr val="FFFFFF"/>
+                </a:solidFill>
+                <a:latin typeface="Calibri"/>
+              </a:rPr>
+              <a:t>[one column] &gt; [what is typical] &gt; [what one order does] &gt; [what the shape says] &gt; [per segment, with denominators]</a:t>
             </a:r>
           </a:p>
         </p:txBody>
@@ -6362,7 +6407,7 @@
                 </a:solidFill>
                 <a:latin typeface="Calibri"/>
               </a:rPr>
-              <a:t>Four sentences, one per segment</a:t>
+              <a:t>The shape of the sentence</a:t>
             </a:r>
           </a:p>
         </p:txBody>
@@ -6390,134 +6435,24 @@
           <a:lstStyle/>
           <a:p>
             <a:r>
+              <a:rPr sz="2100">
+                <a:solidFill>
+                  <a:srgbClr val="1C1C1A"/>
+                </a:solidFill>
+                <a:latin typeface="Calibri"/>
+              </a:rPr>
+              <a:t>Three parts, in this order, every time:</a:t>
+            </a:r>
+          </a:p>
+          <a:p>
+            <a:r>
               <a:rPr sz="1700">
                 <a:solidFill>
                   <a:srgbClr val="2B4A7D"/>
                 </a:solidFill>
                 <a:latin typeface="Consolas"/>
               </a:rPr>
-              <a:t>segment_a: accepted on 9 of 20 records, 45.0 percent. The largest segment</a:t>
-            </a:r>
-          </a:p>
-          <a:p>
-            <a:r>
-              <a:rPr sz="1700">
-                <a:solidFill>
-                  <a:srgbClr val="2B4A7D"/>
-                </a:solidFill>
-                <a:latin typeface="Consolas"/>
-              </a:rPr>
-              <a:t>           in the file and the steadiest number here.</a:t>
-            </a:r>
-          </a:p>
-          <a:p>
-            <a:r>
-              <a:rPr sz="1700">
-                <a:solidFill>
-                  <a:srgbClr val="2B4A7D"/>
-                </a:solidFill>
-                <a:latin typeface="Consolas"/>
-              </a:rPr>
-              <a:t/>
-            </a:r>
-          </a:p>
-          <a:p>
-            <a:r>
-              <a:rPr sz="1700">
-                <a:solidFill>
-                  <a:srgbClr val="2B4A7D"/>
-                </a:solidFill>
-                <a:latin typeface="Consolas"/>
-              </a:rPr>
-              <a:t>segment_b: accepted on 4 of 9 records, 44.4 percent. Median order Rs 8,000;</a:t>
-            </a:r>
-          </a:p>
-          <a:p>
-            <a:r>
-              <a:rPr sz="1700">
-                <a:solidFill>
-                  <a:srgbClr val="2B4A7D"/>
-                </a:solidFill>
-                <a:latin typeface="Consolas"/>
-              </a:rPr>
-              <a:t>           the mean of Rs 60,255.56 is one order and should not be quoted.</a:t>
-            </a:r>
-          </a:p>
-          <a:p>
-            <a:r>
-              <a:rPr sz="1700">
-                <a:solidFill>
-                  <a:srgbClr val="2B4A7D"/>
-                </a:solidFill>
-                <a:latin typeface="Consolas"/>
-              </a:rPr>
-              <a:t/>
-            </a:r>
-          </a:p>
-          <a:p>
-            <a:r>
-              <a:rPr sz="1700">
-                <a:solidFill>
-                  <a:srgbClr val="2B4A7D"/>
-                </a:solidFill>
-                <a:latin typeface="Consolas"/>
-              </a:rPr>
-              <a:t>segment_c: accepted on 3 of 6 records, 50.0 percent. Six records support</a:t>
-            </a:r>
-          </a:p>
-          <a:p>
-            <a:r>
-              <a:rPr sz="1700">
-                <a:solidFill>
-                  <a:srgbClr val="2B4A7D"/>
-                </a:solidFill>
-                <a:latin typeface="Consolas"/>
-              </a:rPr>
-              <a:t>           nothing; treat as unmeasured.</a:t>
-            </a:r>
-          </a:p>
-          <a:p>
-            <a:r>
-              <a:rPr sz="1700">
-                <a:solidFill>
-                  <a:srgbClr val="2B4A7D"/>
-                </a:solidFill>
-                <a:latin typeface="Consolas"/>
-              </a:rPr>
-              <a:t/>
-            </a:r>
-          </a:p>
-          <a:p>
-            <a:r>
-              <a:rPr sz="1700">
-                <a:solidFill>
-                  <a:srgbClr val="2B4A7D"/>
-                </a:solidFill>
-                <a:latin typeface="Consolas"/>
-              </a:rPr>
-              <a:t>segment_d: accepted on 7 of 12 records, 58.3 percent. Highest in the file</a:t>
-            </a:r>
-          </a:p>
-          <a:p>
-            <a:r>
-              <a:rPr sz="1700">
-                <a:solidFill>
-                  <a:srgbClr val="2B4A7D"/>
-                </a:solidFill>
-                <a:latin typeface="Consolas"/>
-              </a:rPr>
-              <a:t>           and resting on twelve records; two different outcomes erase</a:t>
-            </a:r>
-          </a:p>
-          <a:p>
-            <a:r>
-              <a:rPr sz="1700">
-                <a:solidFill>
-                  <a:srgbClr val="2B4A7D"/>
-                </a:solidFill>
-                <a:latin typeface="Consolas"/>
-              </a:rPr>
-              <a:t>           the lead.</a:t>
+              <a:t>[the number]   [the denominator]   [what it does not yet support]</a:t>
             </a:r>
           </a:p>
           <a:p>
@@ -6528,7 +6463,7 @@
                 </a:solidFill>
                 <a:latin typeface="Calibri"/>
               </a:rPr>
-              <a:t>Every sentence carries its denominator. Two of them refuse to make a claim, which is the sentence doing its job.</a:t>
+              <a:t>Leaving out the third part is how a caveat gets lost between your notebook and a slide somebody else builds.</a:t>
             </a:r>
           </a:p>
         </p:txBody>
@@ -6658,7 +6593,7 @@
                 </a:solidFill>
                 <a:latin typeface="Calibri"/>
               </a:rPr>
-              <a:t>The convention this follows</a:t>
+              <a:t>Four sentences, one per segment</a:t>
             </a:r>
           </a:p>
         </p:txBody>
@@ -6686,24 +6621,156 @@
           <a:lstStyle/>
           <a:p>
             <a:r>
+              <a:rPr sz="1700">
+                <a:solidFill>
+                  <a:srgbClr val="2B4A7D"/>
+                </a:solidFill>
+                <a:latin typeface="Consolas"/>
+              </a:rPr>
+              <a:t>Business:    returned on 1 of 9 orders, 11.1 percent. Lowest in the file and the</a:t>
+            </a:r>
+          </a:p>
+          <a:p>
+            <a:r>
+              <a:rPr sz="1700">
+                <a:solidFill>
+                  <a:srgbClr val="2B4A7D"/>
+                </a:solidFill>
+                <a:latin typeface="Consolas"/>
+              </a:rPr>
+              <a:t>             smallest segment in it. One more return takes it to 22.2 percent and</a:t>
+            </a:r>
+          </a:p>
+          <a:p>
+            <a:r>
+              <a:rPr sz="1700">
+                <a:solidFill>
+                  <a:srgbClr val="2B4A7D"/>
+                </a:solidFill>
+                <a:latin typeface="Consolas"/>
+              </a:rPr>
+              <a:t>             behind Student, so this is not yet a finding.</a:t>
+            </a:r>
+          </a:p>
+          <a:p>
+            <a:r>
+              <a:rPr sz="1700">
+                <a:solidFill>
+                  <a:srgbClr val="2B4A7D"/>
+                </a:solidFill>
+                <a:latin typeface="Consolas"/>
+              </a:rPr>
+              <a:t/>
+            </a:r>
+          </a:p>
+          <a:p>
+            <a:r>
+              <a:rPr sz="1700">
+                <a:solidFill>
+                  <a:srgbClr val="2B4A7D"/>
+                </a:solidFill>
+                <a:latin typeface="Consolas"/>
+              </a:rPr>
+              <a:t>Student:     returned on 2 of 10 orders, 20.0 percent. Ten orders, and the raw file</a:t>
+            </a:r>
+          </a:p>
+          <a:p>
+            <a:r>
+              <a:rPr sz="1700">
+                <a:solidFill>
+                  <a:srgbClr val="2B4A7D"/>
+                </a:solidFill>
+                <a:latin typeface="Consolas"/>
+              </a:rPr>
+              <a:t>             held twelve before two failed conversion. Treat as unmeasured.</a:t>
+            </a:r>
+          </a:p>
+          <a:p>
+            <a:r>
+              <a:rPr sz="1700">
+                <a:solidFill>
+                  <a:srgbClr val="2B4A7D"/>
+                </a:solidFill>
+                <a:latin typeface="Consolas"/>
+              </a:rPr>
+              <a:t/>
+            </a:r>
+          </a:p>
+          <a:p>
+            <a:r>
+              <a:rPr sz="1700">
+                <a:solidFill>
+                  <a:srgbClr val="2B4A7D"/>
+                </a:solidFill>
+                <a:latin typeface="Consolas"/>
+              </a:rPr>
+              <a:t>Retail-Core: returned on 5 of 14 orders, 35.7 percent. Largest segment and the</a:t>
+            </a:r>
+          </a:p>
+          <a:p>
+            <a:r>
+              <a:rPr sz="1700">
+                <a:solidFill>
+                  <a:srgbClr val="2B4A7D"/>
+                </a:solidFill>
+                <a:latin typeface="Consolas"/>
+              </a:rPr>
+              <a:t>             steadiest number here. Median order Rs 1,910; the mean of Rs 36,027.14</a:t>
+            </a:r>
+          </a:p>
+          <a:p>
+            <a:r>
+              <a:rPr sz="1700">
+                <a:solidFill>
+                  <a:srgbClr val="2B4A7D"/>
+                </a:solidFill>
+                <a:latin typeface="Consolas"/>
+              </a:rPr>
+              <a:t>             is the Rs 480,000 order and should not be quoted.</a:t>
+            </a:r>
+          </a:p>
+          <a:p>
+            <a:r>
+              <a:rPr sz="1700">
+                <a:solidFill>
+                  <a:srgbClr val="2B4A7D"/>
+                </a:solidFill>
+                <a:latin typeface="Consolas"/>
+              </a:rPr>
+              <a:t/>
+            </a:r>
+          </a:p>
+          <a:p>
+            <a:r>
+              <a:rPr sz="1700">
+                <a:solidFill>
+                  <a:srgbClr val="2B4A7D"/>
+                </a:solidFill>
+                <a:latin typeface="Consolas"/>
+              </a:rPr>
+              <a:t>Retail-Plus: returned on 4 of 11 orders, 36.4 percent. Highest in the file, within</a:t>
+            </a:r>
+          </a:p>
+          <a:p>
+            <a:r>
+              <a:rPr sz="1700">
+                <a:solidFill>
+                  <a:srgbClr val="2B4A7D"/>
+                </a:solidFill>
+                <a:latin typeface="Consolas"/>
+              </a:rPr>
+              <a:t>             one order of Retail-Core. The two are not separated by this data.</a:t>
+            </a:r>
+          </a:p>
+          <a:p>
+            <a:r>
               <a:rPr sz="2100">
                 <a:solidFill>
                   <a:srgbClr val="1C1C1A"/>
                 </a:solidFill>
                 <a:latin typeface="Calibri"/>
               </a:rPr>
-              <a:t>segment_b's mean order value is Rs 60,255.56. Its median is Rs 8,000. One record separates those.</a:t>
-            </a:r>
-          </a:p>
-          <a:p>
-            <a:r>
-              <a:rPr sz="2100">
-                <a:solidFill>
-                  <a:srgbClr val="1C1C1A"/>
-                </a:solidFill>
-                <a:latin typeface="Calibri"/>
-              </a:rPr>
-              <a:t>Reporting the median for money is the standing convention wherever a few very large values sit in a long tail, which is why national statistics report median household income. You applied it in half one to a column. Here it applies to a cell in a table somebody will screenshot.</a:t>
+              <a:t>Two decline to make a claim and a third says two segments cannot be told apart. That is the sentence doing its job.</a:t>
             </a:r>
           </a:p>
         </p:txBody>
@@ -6833,7 +6900,7 @@
                 </a:solidFill>
                 <a:latin typeface="Calibri"/>
               </a:rPr>
-              <a:t>The question you are not answering today</a:t>
+              <a:t>The convention this follows</a:t>
             </a:r>
           </a:p>
         </p:txBody>
@@ -6867,7 +6934,7 @@
                 </a:solidFill>
                 <a:latin typeface="Calibri"/>
               </a:rPr>
-              <a:t>Is segment_d genuinely better than segment_a, or is 58.3 against 45.0 what four groups of this size do on their own?</a:t>
+              <a:t>Retail-Core's mean order value is Rs 36,027.14. Its median is Rs 1,910. One order separates those.</a:t>
             </a:r>
           </a:p>
           <a:p>
@@ -6878,18 +6945,7 @@
                 </a:solidFill>
                 <a:latin typeface="Calibri"/>
               </a:rPr>
-              <a:t>That question has a real answer and a method behind it, and it is Monday's session.</a:t>
-            </a:r>
-          </a:p>
-          <a:p>
-            <a:r>
-              <a:rPr sz="2100">
-                <a:solidFill>
-                  <a:srgbClr val="1C1C1A"/>
-                </a:solidFill>
-                <a:latin typeface="Calibri"/>
-              </a:rPr>
-              <a:t>Today you name the question, write it in the notebook, and stop. Saying "we do not know yet, and here is what would tell us" is a complete professional answer.</a:t>
+              <a:t>Reporting the median for money is the standing convention wherever a few very large values sit in a long tail, which is why national statistics report median household income. You applied it in half one to a column. Here it applies to a cell in a table somebody will screenshot.</a:t>
             </a:r>
           </a:p>
         </p:txBody>
@@ -7019,7 +7075,7 @@
                 </a:solidFill>
                 <a:latin typeface="Calibri"/>
               </a:rPr>
-              <a:t>The decision card</a:t>
+              <a:t>The question you are not answering today</a:t>
             </a:r>
           </a:p>
         </p:txBody>
@@ -7047,79 +7103,35 @@
           <a:lstStyle/>
           <a:p>
             <a:r>
-              <a:rPr sz="1700">
-                <a:solidFill>
-                  <a:srgbClr val="2B4A7D"/>
-                </a:solidFill>
-                <a:latin typeface="Consolas"/>
-              </a:rPr>
-              <a:t>| Before you send a rate | Check |</a:t>
-            </a:r>
-          </a:p>
-          <a:p>
-            <a:r>
-              <a:rPr sz="1700">
-                <a:solidFill>
-                  <a:srgbClr val="2B4A7D"/>
-                </a:solidFill>
-                <a:latin typeface="Consolas"/>
-              </a:rPr>
-              <a:t>|---|---|</a:t>
-            </a:r>
-          </a:p>
-          <a:p>
-            <a:r>
-              <a:rPr sz="1700">
-                <a:solidFill>
-                  <a:srgbClr val="2B4A7D"/>
-                </a:solidFill>
-                <a:latin typeface="Consolas"/>
-              </a:rPr>
-              <a:t>| Is the denominator on the same line as the number | If not, it is not ready |</a:t>
-            </a:r>
-          </a:p>
-          <a:p>
-            <a:r>
-              <a:rPr sz="1700">
-                <a:solidFill>
-                  <a:srgbClr val="2B4A7D"/>
-                </a:solidFill>
-                <a:latin typeface="Consolas"/>
-              </a:rPr>
-              <a:t>| Is any group under about 30 records | Say so in the sentence, in words |</a:t>
-            </a:r>
-          </a:p>
-          <a:p>
-            <a:r>
-              <a:rPr sz="1700">
-                <a:solidFill>
-                  <a:srgbClr val="2B4A7D"/>
-                </a:solidFill>
-                <a:latin typeface="Consolas"/>
-              </a:rPr>
-              <a:t>| Did you rank groups of very different sizes | Say what the ranking is partly measuring |</a:t>
-            </a:r>
-          </a:p>
-          <a:p>
-            <a:r>
-              <a:rPr sz="1700">
-                <a:solidFill>
-                  <a:srgbClr val="2B4A7D"/>
-                </a:solidFill>
-                <a:latin typeface="Consolas"/>
-              </a:rPr>
-              <a:t>| Is a mean quoted on a money column | Replace it with the median |</a:t>
-            </a:r>
-          </a:p>
-          <a:p>
-            <a:r>
-              <a:rPr sz="1700">
-                <a:solidFill>
-                  <a:srgbClr val="2B4A7D"/>
-                </a:solidFill>
-                <a:latin typeface="Consolas"/>
-              </a:rPr>
-              <a:t>| Is a difference being called real | Park it and name what would settle it |</a:t>
+              <a:rPr sz="2100">
+                <a:solidFill>
+                  <a:srgbClr val="1C1C1A"/>
+                </a:solidFill>
+                <a:latin typeface="Calibri"/>
+              </a:rPr>
+              <a:t>Is Business genuinely better than Retail-Plus, or is 11.1 against 36.4 what four groups of these sizes do on their own?</a:t>
+            </a:r>
+          </a:p>
+          <a:p>
+            <a:r>
+              <a:rPr sz="2100">
+                <a:solidFill>
+                  <a:srgbClr val="1C1C1A"/>
+                </a:solidFill>
+                <a:latin typeface="Calibri"/>
+              </a:rPr>
+              <a:t>That question has a real answer and a method behind it, and it is Monday's session.</a:t>
+            </a:r>
+          </a:p>
+          <a:p>
+            <a:r>
+              <a:rPr sz="2100">
+                <a:solidFill>
+                  <a:srgbClr val="1C1C1A"/>
+                </a:solidFill>
+                <a:latin typeface="Calibri"/>
+              </a:rPr>
+              <a:t>Today you name the question, write it in the notebook, and stop. Saying "we do not know yet, and here is what would tell us" is a complete professional answer.</a:t>
             </a:r>
           </a:p>
         </p:txBody>
@@ -7249,7 +7261,7 @@
                 </a:solidFill>
                 <a:latin typeface="Calibri"/>
               </a:rPr>
-              <a:t>Crux</a:t>
+              <a:t>The decision card</a:t>
             </a:r>
           </a:p>
         </p:txBody>
@@ -7277,6 +7289,236 @@
           <a:lstStyle/>
           <a:p>
             <a:r>
+              <a:rPr sz="1700">
+                <a:solidFill>
+                  <a:srgbClr val="2B4A7D"/>
+                </a:solidFill>
+                <a:latin typeface="Consolas"/>
+              </a:rPr>
+              <a:t>| Before you send a rate | Check |</a:t>
+            </a:r>
+          </a:p>
+          <a:p>
+            <a:r>
+              <a:rPr sz="1700">
+                <a:solidFill>
+                  <a:srgbClr val="2B4A7D"/>
+                </a:solidFill>
+                <a:latin typeface="Consolas"/>
+              </a:rPr>
+              <a:t>|---|---|</a:t>
+            </a:r>
+          </a:p>
+          <a:p>
+            <a:r>
+              <a:rPr sz="1700">
+                <a:solidFill>
+                  <a:srgbClr val="2B4A7D"/>
+                </a:solidFill>
+                <a:latin typeface="Consolas"/>
+              </a:rPr>
+              <a:t>| Is the denominator on the same line as the number | If not, it is not ready |</a:t>
+            </a:r>
+          </a:p>
+          <a:p>
+            <a:r>
+              <a:rPr sz="1700">
+                <a:solidFill>
+                  <a:srgbClr val="2B4A7D"/>
+                </a:solidFill>
+                <a:latin typeface="Consolas"/>
+              </a:rPr>
+              <a:t>| Is any group under about 30 orders | Say so in the sentence, in words |</a:t>
+            </a:r>
+          </a:p>
+          <a:p>
+            <a:r>
+              <a:rPr sz="1700">
+                <a:solidFill>
+                  <a:srgbClr val="2B4A7D"/>
+                </a:solidFill>
+                <a:latin typeface="Consolas"/>
+              </a:rPr>
+              <a:t>| Did you rank groups of very different sizes | Say what the ranking is partly measuring |</a:t>
+            </a:r>
+          </a:p>
+          <a:p>
+            <a:r>
+              <a:rPr sz="1700">
+                <a:solidFill>
+                  <a:srgbClr val="2B4A7D"/>
+                </a:solidFill>
+                <a:latin typeface="Consolas"/>
+              </a:rPr>
+              <a:t>| Is a mean quoted on a money column | Replace it with the median |</a:t>
+            </a:r>
+          </a:p>
+          <a:p>
+            <a:r>
+              <a:rPr sz="1700">
+                <a:solidFill>
+                  <a:srgbClr val="2B4A7D"/>
+                </a:solidFill>
+                <a:latin typeface="Consolas"/>
+              </a:rPr>
+              <a:t>| Is a difference being called real | Park it and name what would settle it |</a:t>
+            </a:r>
+          </a:p>
+        </p:txBody>
+      </p:sp>
+      <p:sp>
+        <p:nvSpPr>
+          <p:cNvPr id="5" name="TextBox 4"/>
+          <p:cNvSpPr txBox="1"/>
+          <p:nvPr/>
+        </p:nvSpPr>
+        <p:spPr>
+          <a:xfrm>
+            <a:off x="777240" y="6263640"/>
+            <a:ext cx="10607040" cy="365760"/>
+          </a:xfrm>
+          <a:prstGeom prst="rect">
+            <a:avLst/>
+          </a:prstGeom>
+          <a:noFill/>
+        </p:spPr>
+        <p:txBody>
+          <a:bodyPr wrap="none">
+            <a:spAutoFit/>
+          </a:bodyPr>
+          <a:lstStyle/>
+          <a:p>
+            <a:r>
+              <a:rPr sz="1000">
+                <a:solidFill>
+                  <a:srgbClr val="5F6360"/>
+                </a:solidFill>
+                <a:latin typeface="Calibri"/>
+              </a:rPr>
+              <a:t>Week 1 Day 4, half two: the segment summary and its denominators</a:t>
+            </a:r>
+          </a:p>
+        </p:txBody>
+      </p:sp>
+    </p:spTree>
+  </p:cSld>
+  <p:clrMapOvr>
+    <a:masterClrMapping/>
+  </p:clrMapOvr>
+</p:sld>
+</file>
+
+<file path=ppt/slides/slide29.xml><?xml version="1.0" encoding="utf-8"?>
+<p:sld xmlns:a="http://schemas.openxmlformats.org/drawingml/2006/main" xmlns:p="http://schemas.openxmlformats.org/presentationml/2006/main" xmlns:r="http://schemas.openxmlformats.org/officeDocument/2006/relationships">
+  <p:cSld>
+    <p:spTree>
+      <p:nvGrpSpPr>
+        <p:cNvPr id="1" name=""/>
+        <p:cNvGrpSpPr/>
+        <p:nvPr/>
+      </p:nvGrpSpPr>
+      <p:grpSpPr/>
+      <p:sp>
+        <p:nvSpPr>
+          <p:cNvPr id="2" name="Rectangle 1"/>
+          <p:cNvSpPr/>
+          <p:nvPr/>
+        </p:nvSpPr>
+        <p:spPr>
+          <a:xfrm>
+            <a:off x="0" y="0"/>
+            <a:ext cx="12191695" cy="6858000"/>
+          </a:xfrm>
+          <a:prstGeom prst="rect">
+            <a:avLst/>
+          </a:prstGeom>
+          <a:solidFill>
+            <a:srgbClr val="F7F7F5"/>
+          </a:solidFill>
+          <a:ln>
+            <a:noFill/>
+          </a:ln>
+          <a:effectLst/>
+        </p:spPr>
+        <p:style>
+          <a:lnRef idx="1">
+            <a:schemeClr val="accent1"/>
+          </a:lnRef>
+          <a:fillRef idx="3">
+            <a:schemeClr val="accent1"/>
+          </a:fillRef>
+          <a:effectRef idx="2">
+            <a:schemeClr val="accent1"/>
+          </a:effectRef>
+          <a:fontRef idx="minor">
+            <a:schemeClr val="lt1"/>
+          </a:fontRef>
+        </p:style>
+        <p:txBody>
+          <a:bodyPr rtlCol="0" anchor="ctr"/>
+          <a:lstStyle/>
+          <a:p>
+            <a:pPr algn="ctr"/>
+          </a:p>
+        </p:txBody>
+      </p:sp>
+      <p:sp>
+        <p:nvSpPr>
+          <p:cNvPr id="3" name="TextBox 2"/>
+          <p:cNvSpPr txBox="1"/>
+          <p:nvPr/>
+        </p:nvSpPr>
+        <p:spPr>
+          <a:xfrm>
+            <a:off x="777240" y="640080"/>
+            <a:ext cx="10607040" cy="1188720"/>
+          </a:xfrm>
+          <a:prstGeom prst="rect">
+            <a:avLst/>
+          </a:prstGeom>
+          <a:noFill/>
+        </p:spPr>
+        <p:txBody>
+          <a:bodyPr wrap="square">
+            <a:spAutoFit/>
+          </a:bodyPr>
+          <a:lstStyle/>
+          <a:p>
+            <a:r>
+              <a:rPr sz="3600" b="1">
+                <a:solidFill>
+                  <a:srgbClr val="1C1C1A"/>
+                </a:solidFill>
+                <a:latin typeface="Calibri"/>
+              </a:rPr>
+              <a:t>Crux</a:t>
+            </a:r>
+          </a:p>
+        </p:txBody>
+      </p:sp>
+      <p:sp>
+        <p:nvSpPr>
+          <p:cNvPr id="4" name="TextBox 3"/>
+          <p:cNvSpPr txBox="1"/>
+          <p:nvPr/>
+        </p:nvSpPr>
+        <p:spPr>
+          <a:xfrm>
+            <a:off x="777240" y="1965960"/>
+            <a:ext cx="10607040" cy="4206240"/>
+          </a:xfrm>
+          <a:prstGeom prst="rect">
+            <a:avLst/>
+          </a:prstGeom>
+          <a:noFill/>
+        </p:spPr>
+        <p:txBody>
+          <a:bodyPr wrap="square">
+            <a:spAutoFit/>
+          </a:bodyPr>
+          <a:lstStyle/>
+          <a:p>
+            <a:r>
               <a:rPr sz="2100" b="1">
                 <a:solidFill>
                   <a:srgbClr val="1C1C1A"/>
@@ -7294,7 +7536,7 @@
                 </a:solidFill>
                 <a:latin typeface="Calibri"/>
               </a:rPr>
-              <a:t>&gt; The two best-performing segments in this file are also the two smallest, and that is not a coincidence.</a:t>
+              <a:t>&gt; The best-performing segment in this file is also the smallest, and one order takes the lead away.</a:t>
             </a:r>
           </a:p>
           <a:p>
@@ -7305,7 +7547,7 @@
                 </a:solidFill>
                 <a:latin typeface="Calibri"/>
               </a:rPr>
-              <a:t>Tomorrow is Gandhi Jayanti and the institute is closed. The week's records, cleaned by you, come back as SQL tables and pandas frames in Week 2, and the summary you built by hand today becomes one line of code you will already know the answer to.</a:t>
+              <a:t>Tomorrow is Gandhi Jayanti and the institute is closed. These same orders, cleaned by you, come back as SQL tables and pandas frames in Week 2, and the summary you built by hand today becomes one line of code you will already know the answer to.</a:t>
             </a:r>
           </a:p>
         </p:txBody>
@@ -7469,7 +7711,7 @@
                 </a:solidFill>
                 <a:latin typeface="Calibri"/>
               </a:rPr>
-              <a:t>[one column] &gt; [what is typical] &gt; [what one record does] &gt; [what the shape says] &gt; [per segment, with denominators]</a:t>
+              <a:t>[one column] &gt; [what is typical] &gt; [what one order does] &gt; [what the shape says] &gt; [per segment, with denominators]</a:t>
             </a:r>
           </a:p>
           <a:p>
@@ -7480,7 +7722,7 @@
                 </a:solidFill>
                 <a:latin typeface="Calibri"/>
               </a:rPr>
-              <a:t>You can now pick an honest statistic for a column. Half two splits the file into groups, computes that statistic per group, and attaches the one thing that decides whether the answer means anything.</a:t>
+              <a:t>You can now pick an honest statistic for a column. Half two splits the file by segment, computes that statistic per group, and attaches the one thing that decides whether the answer means anything.</a:t>
             </a:r>
           </a:p>
         </p:txBody>
@@ -7610,7 +7852,7 @@
                 </a:solidFill>
                 <a:latin typeface="Calibri"/>
               </a:rPr>
-              <a:t>Where this is going</a:t>
+              <a:t>The metric, named before it is computed</a:t>
             </a:r>
           </a:p>
         </p:txBody>
@@ -7638,57 +7880,24 @@
           <a:lstStyle/>
           <a:p>
             <a:r>
+              <a:rPr sz="2100">
+                <a:solidFill>
+                  <a:srgbClr val="1C1C1A"/>
+                </a:solidFill>
+                <a:latin typeface="Calibri"/>
+              </a:rPr>
+              <a:t>Kalpa Retail cares about returns. A returned order costs the delivery, the reverse logistics and usually the margin.</a:t>
+            </a:r>
+          </a:p>
+          <a:p>
+            <a:r>
               <a:rPr sz="1700">
                 <a:solidFill>
                   <a:srgbClr val="2B4A7D"/>
                 </a:solidFill>
                 <a:latin typeface="Consolas"/>
               </a:rPr>
-              <a:t>segment      count   median amount   accepted rate</a:t>
-            </a:r>
-          </a:p>
-          <a:p>
-            <a:r>
-              <a:rPr sz="1700">
-                <a:solidFill>
-                  <a:srgbClr val="2B4A7D"/>
-                </a:solidFill>
-                <a:latin typeface="Consolas"/>
-              </a:rPr>
-              <a:t>segment_d       12        Rs 6,750           58.3%</a:t>
-            </a:r>
-          </a:p>
-          <a:p>
-            <a:r>
-              <a:rPr sz="1700">
-                <a:solidFill>
-                  <a:srgbClr val="2B4A7D"/>
-                </a:solidFill>
-                <a:latin typeface="Consolas"/>
-              </a:rPr>
-              <a:t>segment_c        6        Rs 6,800           50.0%</a:t>
-            </a:r>
-          </a:p>
-          <a:p>
-            <a:r>
-              <a:rPr sz="1700">
-                <a:solidFill>
-                  <a:srgbClr val="2B4A7D"/>
-                </a:solidFill>
-                <a:latin typeface="Consolas"/>
-              </a:rPr>
-              <a:t>segment_a       20        Rs 7,950           45.0%</a:t>
-            </a:r>
-          </a:p>
-          <a:p>
-            <a:r>
-              <a:rPr sz="1700">
-                <a:solidFill>
-                  <a:srgbClr val="2B4A7D"/>
-                </a:solidFill>
-                <a:latin typeface="Consolas"/>
-              </a:rPr>
-              <a:t>segment_b        9        Rs 8,000           44.4%</a:t>
+              <a:t>return rate  =  orders with status "returned"  /  all orders in the group</a:t>
             </a:r>
           </a:p>
           <a:p>
@@ -7699,7 +7908,7 @@
                 </a:solidFill>
                 <a:latin typeface="Calibri"/>
               </a:rPr>
-              <a:t>You will have built this inside the hour. Then you will spend the rest of the session refusing to send it as it stands.</a:t>
+              <a:t>This is the first metric in the programme where lower is better. A ranking of return rates puts the best performer at the top with the smallest number beside it. Keep that straight or the next four slides will read backwards.</a:t>
             </a:r>
           </a:p>
         </p:txBody>
@@ -7771,7 +7980,7 @@
             <a:avLst/>
           </a:prstGeom>
           <a:solidFill>
-            <a:srgbClr val="2B4A7D"/>
+            <a:srgbClr val="F7F7F5"/>
           </a:solidFill>
           <a:ln>
             <a:noFill/>
@@ -7825,11 +8034,11 @@
             <a:r>
               <a:rPr sz="3600" b="1">
                 <a:solidFill>
-                  <a:srgbClr val="FFFFFF"/>
-                </a:solidFill>
-                <a:latin typeface="Calibri"/>
-              </a:rPr>
-              <a:t>SECTION 1: THE DENOMINATOR</a:t>
+                  <a:srgbClr val="1C1C1A"/>
+                </a:solidFill>
+                <a:latin typeface="Calibri"/>
+              </a:rPr>
+              <a:t>Where this is going</a:t>
             </a:r>
           </a:p>
         </p:txBody>
@@ -7857,13 +8066,68 @@
           <a:lstStyle/>
           <a:p>
             <a:r>
+              <a:rPr sz="1700">
+                <a:solidFill>
+                  <a:srgbClr val="2B4A7D"/>
+                </a:solidFill>
+                <a:latin typeface="Consolas"/>
+              </a:rPr>
+              <a:t>segment        orders   median amount   return rate</a:t>
+            </a:r>
+          </a:p>
+          <a:p>
+            <a:r>
+              <a:rPr sz="1700">
+                <a:solidFill>
+                  <a:srgbClr val="2B4A7D"/>
+                </a:solidFill>
+                <a:latin typeface="Consolas"/>
+              </a:rPr>
+              <a:t>Business            9        Rs 2,050          11.1%</a:t>
+            </a:r>
+          </a:p>
+          <a:p>
+            <a:r>
+              <a:rPr sz="1700">
+                <a:solidFill>
+                  <a:srgbClr val="2B4A7D"/>
+                </a:solidFill>
+                <a:latin typeface="Consolas"/>
+              </a:rPr>
+              <a:t>Student            10        Rs 1,430          20.0%</a:t>
+            </a:r>
+          </a:p>
+          <a:p>
+            <a:r>
+              <a:rPr sz="1700">
+                <a:solidFill>
+                  <a:srgbClr val="2B4A7D"/>
+                </a:solidFill>
+                <a:latin typeface="Consolas"/>
+              </a:rPr>
+              <a:t>Retail-Core        14        Rs 1,910          35.7%</a:t>
+            </a:r>
+          </a:p>
+          <a:p>
+            <a:r>
+              <a:rPr sz="1700">
+                <a:solidFill>
+                  <a:srgbClr val="2B4A7D"/>
+                </a:solidFill>
+                <a:latin typeface="Consolas"/>
+              </a:rPr>
+              <a:t>Retail-Plus        11        Rs 1,435          36.4%</a:t>
+            </a:r>
+          </a:p>
+          <a:p>
+            <a:r>
               <a:rPr sz="2100">
                 <a:solidFill>
-                  <a:srgbClr val="FFFFFF"/>
-                </a:solidFill>
-                <a:latin typeface="Calibri"/>
-              </a:rPr>
-              <a:t>[one column] &gt; [what is typical] &gt; [what one record does] &gt; [what the shape says] &gt; [per segment, with denominators]</a:t>
+                  <a:srgbClr val="1C1C1A"/>
+                </a:solidFill>
+                <a:latin typeface="Calibri"/>
+              </a:rPr>
+              <a:t>You will have built this inside the hour. Then you will spend the rest of the session refusing to send it as it stands.</a:t>
             </a:r>
           </a:p>
         </p:txBody>
@@ -7935,7 +8199,7 @@
             <a:avLst/>
           </a:prstGeom>
           <a:solidFill>
-            <a:srgbClr val="F7F7F5"/>
+            <a:srgbClr val="2B4A7D"/>
           </a:solidFill>
           <a:ln>
             <a:noFill/>
@@ -7989,11 +8253,11 @@
             <a:r>
               <a:rPr sz="3600" b="1">
                 <a:solidFill>
-                  <a:srgbClr val="1C1C1A"/>
-                </a:solidFill>
-                <a:latin typeface="Calibri"/>
-              </a:rPr>
-              <a:t>One rate, two files</a:t>
+                  <a:srgbClr val="FFFFFF"/>
+                </a:solidFill>
+                <a:latin typeface="Calibri"/>
+              </a:rPr>
+              <a:t>SECTION 1: THE DENOMINATOR</a:t>
             </a:r>
           </a:p>
         </p:txBody>
@@ -8023,44 +8287,11 @@
             <a:r>
               <a:rPr sz="2100">
                 <a:solidFill>
-                  <a:srgbClr val="1C1C1A"/>
-                </a:solidFill>
-                <a:latin typeface="Calibri"/>
-              </a:rPr>
-              <a:t>Two segments in two different companies, same reported number:</a:t>
-            </a:r>
-          </a:p>
-          <a:p>
-            <a:r>
-              <a:rPr sz="1700">
-                <a:solidFill>
-                  <a:srgbClr val="2B4A7D"/>
-                </a:solidFill>
-                <a:latin typeface="Consolas"/>
-              </a:rPr>
-              <a:t>segment X:   accepted 5 of 12          41.7%</a:t>
-            </a:r>
-          </a:p>
-          <a:p>
-            <a:r>
-              <a:rPr sz="1700">
-                <a:solidFill>
-                  <a:srgbClr val="2B4A7D"/>
-                </a:solidFill>
-                <a:latin typeface="Consolas"/>
-              </a:rPr>
-              <a:t>segment Y:   accepted 500 of 1200      41.7%</a:t>
-            </a:r>
-          </a:p>
-          <a:p>
-            <a:r>
-              <a:rPr sz="2100">
-                <a:solidFill>
-                  <a:srgbClr val="1C1C1A"/>
-                </a:solidFill>
-                <a:latin typeface="Calibri"/>
-              </a:rPr>
-              <a:t>Identical rates. Which one would you build a quarter's plan on?</a:t>
+                  <a:srgbClr val="FFFFFF"/>
+                </a:solidFill>
+                <a:latin typeface="Calibri"/>
+              </a:rPr>
+              <a:t>[one column] &gt; [what is typical] &gt; [what one order does] &gt; [what the shape says] &gt; [per segment, with denominators]</a:t>
             </a:r>
           </a:p>
         </p:txBody>
@@ -8190,7 +8421,7 @@
                 </a:solidFill>
                 <a:latin typeface="Calibri"/>
               </a:rPr>
-              <a:t>Why the small one moves</a:t>
+              <a:t>One rate, two files</a:t>
             </a:r>
           </a:p>
         </p:txBody>
@@ -8224,7 +8455,29 @@
                 </a:solidFill>
                 <a:latin typeface="Calibri"/>
               </a:rPr>
-              <a:t>In the 12-record segment, one record changing its outcome moves the rate by 8.3 points.</a:t>
+              <a:t>Two segments in two different companies, same reported number:</a:t>
+            </a:r>
+          </a:p>
+          <a:p>
+            <a:r>
+              <a:rPr sz="1700">
+                <a:solidFill>
+                  <a:srgbClr val="2B4A7D"/>
+                </a:solidFill>
+                <a:latin typeface="Consolas"/>
+              </a:rPr>
+              <a:t>segment X:   returned 5 of 12          41.7%</a:t>
+            </a:r>
+          </a:p>
+          <a:p>
+            <a:r>
+              <a:rPr sz="1700">
+                <a:solidFill>
+                  <a:srgbClr val="2B4A7D"/>
+                </a:solidFill>
+                <a:latin typeface="Consolas"/>
+              </a:rPr>
+              <a:t>segment Y:   returned 500 of 1200      41.7%</a:t>
             </a:r>
           </a:p>
           <a:p>
@@ -8235,18 +8488,7 @@
                 </a:solidFill>
                 <a:latin typeface="Calibri"/>
               </a:rPr>
-              <a:t>In the 1,200-record segment, one record moves it by 0.08 points.</a:t>
-            </a:r>
-          </a:p>
-          <a:p>
-            <a:r>
-              <a:rPr sz="2100">
-                <a:solidFill>
-                  <a:srgbClr val="1C1C1A"/>
-                </a:solidFill>
-                <a:latin typeface="Calibri"/>
-              </a:rPr>
-              <a:t>The small segment is not wrong. It is loud. Its number swings on evidence too thin to swing on, and next month it will report something different for no reason you can name.</a:t>
+              <a:t>Identical rates. Which one would you build a quarter's plan on?</a:t>
             </a:r>
           </a:p>
         </p:txBody>
@@ -8376,7 +8618,7 @@
                 </a:solidFill>
                 <a:latin typeface="Calibri"/>
               </a:rPr>
-              <a:t>What a rate actually is</a:t>
+              <a:t>Why the small one moves</a:t>
             </a:r>
           </a:p>
         </p:txBody>
@@ -8404,24 +8646,13 @@
           <a:lstStyle/>
           <a:p>
             <a:r>
-              <a:rPr sz="1700">
-                <a:solidFill>
-                  <a:srgbClr val="2B4A7D"/>
-                </a:solidFill>
-                <a:latin typeface="Consolas"/>
-              </a:rPr>
-              <a:t>rate = how many did the thing  /  how many could have</a:t>
-            </a:r>
-          </a:p>
-          <a:p>
-            <a:r>
               <a:rPr sz="2100">
                 <a:solidFill>
                   <a:srgbClr val="1C1C1A"/>
                 </a:solidFill>
                 <a:latin typeface="Calibri"/>
               </a:rPr>
-              <a:t>Two numbers, and the reporting convention throws one of them away.</a:t>
+              <a:t>In the 12-order segment, one order changing its status moves the rate by 8.3 points.</a:t>
             </a:r>
           </a:p>
           <a:p>
@@ -8432,7 +8663,18 @@
                 </a:solidFill>
                 <a:latin typeface="Calibri"/>
               </a:rPr>
-              <a:t>Every argument in this section comes from the thrown-away number.</a:t>
+              <a:t>In the 1,200-order segment, one order moves it by 0.08 points.</a:t>
+            </a:r>
+          </a:p>
+          <a:p>
+            <a:r>
+              <a:rPr sz="2100">
+                <a:solidFill>
+                  <a:srgbClr val="1C1C1A"/>
+                </a:solidFill>
+                <a:latin typeface="Calibri"/>
+              </a:rPr>
+              <a:t>The small segment is not wrong. It is loud. Its number swings on evidence too thin to swing on, and next month it will report something different for no reason you can name.</a:t>
             </a:r>
           </a:p>
         </p:txBody>
@@ -8562,7 +8804,7 @@
                 </a:solidFill>
                 <a:latin typeface="Calibri"/>
               </a:rPr>
-              <a:t>The rule</a:t>
+              <a:t>What a rate actually is</a:t>
             </a:r>
           </a:p>
         </p:txBody>
@@ -8590,13 +8832,24 @@
           <a:lstStyle/>
           <a:p>
             <a:r>
-              <a:rPr sz="2100" b="1">
+              <a:rPr sz="1700">
+                <a:solidFill>
+                  <a:srgbClr val="2B4A7D"/>
+                </a:solidFill>
+                <a:latin typeface="Consolas"/>
+              </a:rPr>
+              <a:t>rate = how many did the thing  /  how many could have</a:t>
+            </a:r>
+          </a:p>
+          <a:p>
+            <a:r>
+              <a:rPr sz="2100">
                 <a:solidFill>
                   <a:srgbClr val="1C1C1A"/>
                 </a:solidFill>
                 <a:latin typeface="Calibri"/>
               </a:rPr>
-              <a:t>&gt; A rate travels with its denominator or it does not travel.</a:t>
+              <a:t>Two numbers, and the reporting convention throws one of them away.</a:t>
             </a:r>
           </a:p>
           <a:p>
@@ -8607,7 +8860,7 @@
                 </a:solidFill>
                 <a:latin typeface="Calibri"/>
               </a:rPr>
-              <a:t>Write it as 58.3 percent of 12 and nobody can misread it. Write it as 58.3 percent and everybody will.</a:t>
+              <a:t>Every argument in this section comes from the thrown-away number.</a:t>
             </a:r>
           </a:p>
         </p:txBody>

--- a/content/W01/D4/C2_W01_D04_deck_half2_STUDENT.pptx
+++ b/content/W01/D4/C2_W01_D04_deck_half2_STUDENT.pptx
@@ -34,6 +34,18 @@
     <p:sldId id="282" r:id="rId33"/>
     <p:sldId id="283" r:id="rId34"/>
     <p:sldId id="284" r:id="rId35"/>
+    <p:sldId id="285" r:id="rId36"/>
+    <p:sldId id="286" r:id="rId37"/>
+    <p:sldId id="287" r:id="rId38"/>
+    <p:sldId id="288" r:id="rId39"/>
+    <p:sldId id="289" r:id="rId40"/>
+    <p:sldId id="290" r:id="rId41"/>
+    <p:sldId id="291" r:id="rId42"/>
+    <p:sldId id="292" r:id="rId43"/>
+    <p:sldId id="293" r:id="rId44"/>
+    <p:sldId id="294" r:id="rId45"/>
+    <p:sldId id="295" r:id="rId46"/>
+    <p:sldId id="296" r:id="rId47"/>
   </p:sldIdLst>
   <p:sldSz cx="12191695" cy="6858000" type="screen4x3"/>
   <p:notesSz cx="6858000" cy="9144000"/>
@@ -3183,13 +3195,13 @@
           <a:lstStyle/>
           <a:p>
             <a:r>
-              <a:rPr sz="3600" b="1">
+              <a:rPr sz="3200" b="1">
                 <a:solidFill>
                   <a:srgbClr val="1C1C1A"/>
                 </a:solidFill>
                 <a:latin typeface="Calibri"/>
               </a:rPr>
-              <a:t>Half two: the segment summary, and the count it rests on</a:t>
+              <a:t>Per segment, with denominators</a:t>
             </a:r>
           </a:p>
         </p:txBody>
@@ -3203,7 +3215,7 @@
         <p:spPr>
           <a:xfrm>
             <a:off x="777240" y="1965960"/>
-            <a:ext cx="10607040" cy="4206240"/>
+            <a:ext cx="10607040" cy="1162050"/>
           </a:xfrm>
           <a:prstGeom prst="rect">
             <a:avLst/>
@@ -3216,36 +3228,35 @@
           </a:bodyPr>
           <a:lstStyle/>
           <a:p>
-            <a:r>
-              <a:rPr sz="2100">
+            <a:pPr>
+              <a:spcAft>
+                <a:spcPts val="1000"/>
+              </a:spcAft>
+            </a:pPr>
+            <a:r>
+              <a:rPr sz="2100" b="0">
                 <a:solidFill>
                   <a:srgbClr val="1C1C1A"/>
                 </a:solidFill>
                 <a:latin typeface="Calibri"/>
               </a:rPr>
-              <a:t>Week 1, Day 4. Slide source. One idea per slide.</a:t>
-            </a:r>
-          </a:p>
-          <a:p>
-            <a:r>
-              <a:rPr sz="2100">
+              <a:t>Half one gave you one number for the whole file. Nobody runs a business unit on one number.</a:t>
+            </a:r>
+          </a:p>
+          <a:p>
+            <a:pPr>
+              <a:spcAft>
+                <a:spcPts val="1000"/>
+              </a:spcAft>
+            </a:pPr>
+            <a:r>
+              <a:rPr sz="2100" b="0">
                 <a:solidFill>
                   <a:srgbClr val="1C1C1A"/>
                 </a:solidFill>
                 <a:latin typeface="Calibri"/>
               </a:rPr>
-              <a:t>Position bar, repeated at every section boundary:</a:t>
-            </a:r>
-          </a:p>
-          <a:p>
-            <a:r>
-              <a:rPr sz="2100">
-                <a:solidFill>
-                  <a:srgbClr val="1C1C1A"/>
-                </a:solidFill>
-                <a:latin typeface="Calibri"/>
-              </a:rPr>
-              <a:t>[one column] &gt; [what is typical] &gt; [what one order does] &gt; [what the shape says] &gt; [per segment, with denominators]</a:t>
+              <a:t>The question is always the same one level down: which part of Kalpa Retail is working, and how sure can you be.</a:t>
             </a:r>
           </a:p>
         </p:txBody>
@@ -3258,7 +3269,7 @@
         </p:nvSpPr>
         <p:spPr>
           <a:xfrm>
-            <a:off x="777240" y="6263640"/>
+            <a:off x="777240" y="6309360"/>
             <a:ext cx="10607040" cy="365760"/>
           </a:xfrm>
           <a:prstGeom prst="rect">
@@ -3279,7 +3290,7 @@
                 </a:solidFill>
                 <a:latin typeface="Calibri"/>
               </a:rPr>
-              <a:t>Week 1 Day 4, half two: the segment summary and its denominators</a:t>
+              <a:t>Week 1 Day 4, half two: the segment summary, and the count it rests on</a:t>
             </a:r>
           </a:p>
         </p:txBody>
@@ -3348,7 +3359,60 @@
       </p:sp>
       <p:sp>
         <p:nvSpPr>
-          <p:cNvPr id="3" name="TextBox 2"/>
+          <p:cNvPr id="3" name="Rounded Rectangle 2"/>
+          <p:cNvSpPr/>
+          <p:nvPr/>
+        </p:nvSpPr>
+        <p:spPr>
+          <a:xfrm>
+            <a:off x="10195560" y="384048"/>
+            <a:ext cx="1188720" cy="310896"/>
+          </a:xfrm>
+          <a:prstGeom prst="roundRect">
+            <a:avLst/>
+          </a:prstGeom>
+          <a:solidFill>
+            <a:srgbClr val="2B4A7D"/>
+          </a:solidFill>
+          <a:ln>
+            <a:noFill/>
+          </a:ln>
+          <a:effectLst/>
+        </p:spPr>
+        <p:style>
+          <a:lnRef idx="1">
+            <a:schemeClr val="accent1"/>
+          </a:lnRef>
+          <a:fillRef idx="3">
+            <a:schemeClr val="accent1"/>
+          </a:fillRef>
+          <a:effectRef idx="2">
+            <a:schemeClr val="accent1"/>
+          </a:effectRef>
+          <a:fontRef idx="minor">
+            <a:schemeClr val="lt1"/>
+          </a:fontRef>
+        </p:style>
+        <p:txBody>
+          <a:bodyPr rtlCol="0" anchor="ctr"/>
+          <a:lstStyle/>
+          <a:p>
+            <a:pPr algn="ctr"/>
+            <a:r>
+              <a:rPr sz="1100" b="1">
+                <a:solidFill>
+                  <a:srgbClr val="FFFFFF"/>
+                </a:solidFill>
+                <a:latin typeface="Calibri"/>
+              </a:rPr>
+              <a:t>DEPTH</a:t>
+            </a:r>
+          </a:p>
+        </p:txBody>
+      </p:sp>
+      <p:sp>
+        <p:nvSpPr>
+          <p:cNvPr id="4" name="TextBox 3"/>
           <p:cNvSpPr txBox="1"/>
           <p:nvPr/>
         </p:nvSpPr>
@@ -3369,27 +3433,27 @@
           <a:lstStyle/>
           <a:p>
             <a:r>
-              <a:rPr sz="3600" b="1">
+              <a:rPr sz="3200" b="1">
                 <a:solidFill>
                   <a:srgbClr val="1C1C1A"/>
                 </a:solidFill>
                 <a:latin typeface="Calibri"/>
               </a:rPr>
-              <a:t>The rule</a:t>
-            </a:r>
-          </a:p>
-        </p:txBody>
-      </p:sp>
-      <p:sp>
-        <p:nvSpPr>
-          <p:cNvPr id="4" name="TextBox 3"/>
+              <a:t>A rate written properly, and the number nobody prints</a:t>
+            </a:r>
+          </a:p>
+        </p:txBody>
+      </p:sp>
+      <p:sp>
+        <p:nvSpPr>
+          <p:cNvPr id="5" name="TextBox 4"/>
           <p:cNvSpPr txBox="1"/>
           <p:nvPr/>
         </p:nvSpPr>
         <p:spPr>
           <a:xfrm>
             <a:off x="777240" y="1965960"/>
-            <a:ext cx="10607040" cy="4206240"/>
+            <a:ext cx="10607040" cy="2400300"/>
           </a:xfrm>
           <a:prstGeom prst="rect">
             <a:avLst/>
@@ -3402,38 +3466,426 @@
           </a:bodyPr>
           <a:lstStyle/>
           <a:p>
-            <a:r>
-              <a:rPr sz="2100" b="1">
+            <a:pPr>
+              <a:spcAft>
+                <a:spcPts val="1000"/>
+              </a:spcAft>
+            </a:pPr>
+            <a:r>
+              <a:rPr sz="2100" b="0">
                 <a:solidFill>
                   <a:srgbClr val="1C1C1A"/>
                 </a:solidFill>
                 <a:latin typeface="Calibri"/>
               </a:rPr>
-              <a:t>&gt; A rate travels with its denominator or it does not travel.</a:t>
-            </a:r>
-          </a:p>
-          <a:p>
-            <a:r>
-              <a:rPr sz="2100">
+              <a:t>$$\text{rate} = \frac{k}{n} \qquad \text{where } k \text{ did the thing and } n \text{ could have}$$</a:t>
+            </a:r>
+          </a:p>
+          <a:p>
+            <a:pPr>
+              <a:spcAft>
+                <a:spcPts val="1000"/>
+              </a:spcAft>
+            </a:pPr>
+            <a:r>
+              <a:rPr sz="2100" b="0">
                 <a:solidFill>
                   <a:srgbClr val="1C1C1A"/>
                 </a:solidFill>
                 <a:latin typeface="Calibri"/>
               </a:rPr>
-              <a:t>Write it as 11.1 percent of 9 and nobody can misread it. Write it as 11.1 percent and everybody will.</a:t>
-            </a:r>
-          </a:p>
-        </p:txBody>
-      </p:sp>
-      <p:sp>
-        <p:nvSpPr>
-          <p:cNvPr id="5" name="TextBox 4"/>
-          <p:cNvSpPr txBox="1"/>
-          <p:nvPr/>
-        </p:nvSpPr>
-        <p:spPr>
-          <a:xfrm>
-            <a:off x="777240" y="6263640"/>
+              <a:t>The reporting convention prints the quotient and discards $n$, and $n$ is the number that decides whether the quotient means anything.</a:t>
+            </a:r>
+          </a:p>
+          <a:p>
+            <a:pPr>
+              <a:spcAft>
+                <a:spcPts val="1000"/>
+              </a:spcAft>
+            </a:pPr>
+            <a:r>
+              <a:rPr sz="2100" b="0">
+                <a:solidFill>
+                  <a:srgbClr val="1C1C1A"/>
+                </a:solidFill>
+                <a:latin typeface="Calibri"/>
+              </a:rPr>
+              <a:t>Here is the arithmetic that makes the discard visible. One record changing side moves the rate by</a:t>
+            </a:r>
+          </a:p>
+          <a:p>
+            <a:pPr>
+              <a:spcAft>
+                <a:spcPts val="1000"/>
+              </a:spcAft>
+            </a:pPr>
+            <a:r>
+              <a:rPr sz="2100" b="0">
+                <a:solidFill>
+                  <a:srgbClr val="1C1C1A"/>
+                </a:solidFill>
+                <a:latin typeface="Calibri"/>
+              </a:rPr>
+              <a:t>$$\Delta = \frac{1}{n} \qquad \text{or, in percentage points, } \frac{100}{n}$$</a:t>
+            </a:r>
+          </a:p>
+        </p:txBody>
+      </p:sp>
+      <p:graphicFrame>
+        <p:nvGraphicFramePr>
+          <p:cNvPr id="6" name="Table 5"/>
+          <p:cNvGraphicFramePr>
+            <a:graphicFrameLocks noGrp="1"/>
+          </p:cNvGraphicFramePr>
+          <p:nvPr/>
+        </p:nvGraphicFramePr>
+        <p:xfrm>
+          <a:off x="777240" y="4503420"/>
+          <a:ext cx="10607040" cy="1920240"/>
+        </p:xfrm>
+        <a:graphic>
+          <a:graphicData uri="http://schemas.openxmlformats.org/drawingml/2006/table">
+            <a:tbl>
+              <a:tblPr firstRow="1" bandRow="1">
+                <a:tableStyleId>{5C22544A-7EE6-4342-B048-85BDC9FD1C3A}</a:tableStyleId>
+              </a:tblPr>
+              <a:tblGrid>
+                <a:gridCol w="3535680"/>
+                <a:gridCol w="3535680"/>
+                <a:gridCol w="3535680"/>
+              </a:tblGrid>
+              <a:tr h="384048">
+                <a:tc>
+                  <a:txBody>
+                    <a:bodyPr/>
+                    <a:lstStyle/>
+                    <a:p>
+                      <a:r>
+                        <a:rPr sz="1300" b="1">
+                          <a:solidFill>
+                            <a:srgbClr val="2B4A7D"/>
+                          </a:solidFill>
+                          <a:latin typeface="Calibri"/>
+                        </a:rPr>
+                        <a:t>Segment</a:t>
+                      </a:r>
+                    </a:p>
+                  </a:txBody>
+                  <a:tcPr marT="25400" marB="25400"/>
+                </a:tc>
+                <a:tc>
+                  <a:txBody>
+                    <a:bodyPr/>
+                    <a:lstStyle/>
+                    <a:p>
+                      <a:r>
+                        <a:rPr sz="1300" b="1">
+                          <a:solidFill>
+                            <a:srgbClr val="2B4A7D"/>
+                          </a:solidFill>
+                          <a:latin typeface="Calibri"/>
+                        </a:rPr>
+                        <a:t>$n$</a:t>
+                      </a:r>
+                    </a:p>
+                  </a:txBody>
+                  <a:tcPr marT="25400" marB="25400"/>
+                </a:tc>
+                <a:tc>
+                  <a:txBody>
+                    <a:bodyPr/>
+                    <a:lstStyle/>
+                    <a:p>
+                      <a:r>
+                        <a:rPr sz="1300" b="1">
+                          <a:solidFill>
+                            <a:srgbClr val="2B4A7D"/>
+                          </a:solidFill>
+                          <a:latin typeface="Calibri"/>
+                        </a:rPr>
+                        <a:t>One order moves the rate by</a:t>
+                      </a:r>
+                    </a:p>
+                  </a:txBody>
+                  <a:tcPr marT="25400" marB="25400"/>
+                </a:tc>
+              </a:tr>
+              <a:tr h="384048">
+                <a:tc>
+                  <a:txBody>
+                    <a:bodyPr/>
+                    <a:lstStyle/>
+                    <a:p>
+                      <a:r>
+                        <a:rPr sz="1400" b="0">
+                          <a:solidFill>
+                            <a:srgbClr val="1C1C1A"/>
+                          </a:solidFill>
+                          <a:latin typeface="Calibri"/>
+                        </a:rPr>
+                        <a:t>Business</a:t>
+                      </a:r>
+                    </a:p>
+                  </a:txBody>
+                  <a:tcPr marT="25400" marB="25400"/>
+                </a:tc>
+                <a:tc>
+                  <a:txBody>
+                    <a:bodyPr/>
+                    <a:lstStyle/>
+                    <a:p>
+                      <a:r>
+                        <a:rPr sz="1400" b="0">
+                          <a:solidFill>
+                            <a:srgbClr val="1C1C1A"/>
+                          </a:solidFill>
+                          <a:latin typeface="Calibri"/>
+                        </a:rPr>
+                        <a:t>9</a:t>
+                      </a:r>
+                    </a:p>
+                  </a:txBody>
+                  <a:tcPr marT="25400" marB="25400"/>
+                </a:tc>
+                <a:tc>
+                  <a:txBody>
+                    <a:bodyPr/>
+                    <a:lstStyle/>
+                    <a:p>
+                      <a:r>
+                        <a:rPr sz="1400" b="0">
+                          <a:solidFill>
+                            <a:srgbClr val="1C1C1A"/>
+                          </a:solidFill>
+                          <a:latin typeface="Calibri"/>
+                        </a:rPr>
+                        <a:t>11.1 points</a:t>
+                      </a:r>
+                    </a:p>
+                  </a:txBody>
+                  <a:tcPr marT="25400" marB="25400"/>
+                </a:tc>
+              </a:tr>
+              <a:tr h="384048">
+                <a:tc>
+                  <a:txBody>
+                    <a:bodyPr/>
+                    <a:lstStyle/>
+                    <a:p>
+                      <a:r>
+                        <a:rPr sz="1400" b="0">
+                          <a:solidFill>
+                            <a:srgbClr val="1C1C1A"/>
+                          </a:solidFill>
+                          <a:latin typeface="Calibri"/>
+                        </a:rPr>
+                        <a:t>Student</a:t>
+                      </a:r>
+                    </a:p>
+                  </a:txBody>
+                  <a:tcPr marT="25400" marB="25400"/>
+                </a:tc>
+                <a:tc>
+                  <a:txBody>
+                    <a:bodyPr/>
+                    <a:lstStyle/>
+                    <a:p>
+                      <a:r>
+                        <a:rPr sz="1400" b="0">
+                          <a:solidFill>
+                            <a:srgbClr val="1C1C1A"/>
+                          </a:solidFill>
+                          <a:latin typeface="Calibri"/>
+                        </a:rPr>
+                        <a:t>10</a:t>
+                      </a:r>
+                    </a:p>
+                  </a:txBody>
+                  <a:tcPr marT="25400" marB="25400"/>
+                </a:tc>
+                <a:tc>
+                  <a:txBody>
+                    <a:bodyPr/>
+                    <a:lstStyle/>
+                    <a:p>
+                      <a:r>
+                        <a:rPr sz="1400" b="0">
+                          <a:solidFill>
+                            <a:srgbClr val="1C1C1A"/>
+                          </a:solidFill>
+                          <a:latin typeface="Calibri"/>
+                        </a:rPr>
+                        <a:t>10.0 points</a:t>
+                      </a:r>
+                    </a:p>
+                  </a:txBody>
+                  <a:tcPr marT="25400" marB="25400"/>
+                </a:tc>
+              </a:tr>
+              <a:tr h="384048">
+                <a:tc>
+                  <a:txBody>
+                    <a:bodyPr/>
+                    <a:lstStyle/>
+                    <a:p>
+                      <a:r>
+                        <a:rPr sz="1400" b="0">
+                          <a:solidFill>
+                            <a:srgbClr val="1C1C1A"/>
+                          </a:solidFill>
+                          <a:latin typeface="Calibri"/>
+                        </a:rPr>
+                        <a:t>Retail-Plus</a:t>
+                      </a:r>
+                    </a:p>
+                  </a:txBody>
+                  <a:tcPr marT="25400" marB="25400"/>
+                </a:tc>
+                <a:tc>
+                  <a:txBody>
+                    <a:bodyPr/>
+                    <a:lstStyle/>
+                    <a:p>
+                      <a:r>
+                        <a:rPr sz="1400" b="0">
+                          <a:solidFill>
+                            <a:srgbClr val="1C1C1A"/>
+                          </a:solidFill>
+                          <a:latin typeface="Calibri"/>
+                        </a:rPr>
+                        <a:t>11</a:t>
+                      </a:r>
+                    </a:p>
+                  </a:txBody>
+                  <a:tcPr marT="25400" marB="25400"/>
+                </a:tc>
+                <a:tc>
+                  <a:txBody>
+                    <a:bodyPr/>
+                    <a:lstStyle/>
+                    <a:p>
+                      <a:r>
+                        <a:rPr sz="1400" b="0">
+                          <a:solidFill>
+                            <a:srgbClr val="1C1C1A"/>
+                          </a:solidFill>
+                          <a:latin typeface="Calibri"/>
+                        </a:rPr>
+                        <a:t>9.1 points</a:t>
+                      </a:r>
+                    </a:p>
+                  </a:txBody>
+                  <a:tcPr marT="25400" marB="25400"/>
+                </a:tc>
+              </a:tr>
+              <a:tr h="384048">
+                <a:tc>
+                  <a:txBody>
+                    <a:bodyPr/>
+                    <a:lstStyle/>
+                    <a:p>
+                      <a:r>
+                        <a:rPr sz="1400" b="0">
+                          <a:solidFill>
+                            <a:srgbClr val="1C1C1A"/>
+                          </a:solidFill>
+                          <a:latin typeface="Calibri"/>
+                        </a:rPr>
+                        <a:t>Retail-Core</a:t>
+                      </a:r>
+                    </a:p>
+                  </a:txBody>
+                  <a:tcPr marT="25400" marB="25400"/>
+                </a:tc>
+                <a:tc>
+                  <a:txBody>
+                    <a:bodyPr/>
+                    <a:lstStyle/>
+                    <a:p>
+                      <a:r>
+                        <a:rPr sz="1400" b="0">
+                          <a:solidFill>
+                            <a:srgbClr val="1C1C1A"/>
+                          </a:solidFill>
+                          <a:latin typeface="Calibri"/>
+                        </a:rPr>
+                        <a:t>14</a:t>
+                      </a:r>
+                    </a:p>
+                  </a:txBody>
+                  <a:tcPr marT="25400" marB="25400"/>
+                </a:tc>
+                <a:tc>
+                  <a:txBody>
+                    <a:bodyPr/>
+                    <a:lstStyle/>
+                    <a:p>
+                      <a:r>
+                        <a:rPr sz="1400" b="0">
+                          <a:solidFill>
+                            <a:srgbClr val="1C1C1A"/>
+                          </a:solidFill>
+                          <a:latin typeface="Calibri"/>
+                        </a:rPr>
+                        <a:t>7.1 points</a:t>
+                      </a:r>
+                    </a:p>
+                  </a:txBody>
+                  <a:tcPr marT="25400" marB="25400"/>
+                </a:tc>
+              </a:tr>
+            </a:tbl>
+          </a:graphicData>
+        </a:graphic>
+      </p:graphicFrame>
+      <p:sp>
+        <p:nvSpPr>
+          <p:cNvPr id="7" name="TextBox 6"/>
+          <p:cNvSpPr txBox="1"/>
+          <p:nvPr/>
+        </p:nvSpPr>
+        <p:spPr>
+          <a:xfrm>
+            <a:off x="777240" y="6606540"/>
+            <a:ext cx="10607040" cy="790575"/>
+          </a:xfrm>
+          <a:prstGeom prst="rect">
+            <a:avLst/>
+          </a:prstGeom>
+          <a:noFill/>
+        </p:spPr>
+        <p:txBody>
+          <a:bodyPr wrap="square">
+            <a:spAutoFit/>
+          </a:bodyPr>
+          <a:lstStyle/>
+          <a:p>
+            <a:pPr>
+              <a:spcAft>
+                <a:spcPts val="1000"/>
+              </a:spcAft>
+            </a:pPr>
+            <a:r>
+              <a:rPr sz="2100" b="0">
+                <a:solidFill>
+                  <a:srgbClr val="1C1C1A"/>
+                </a:solidFill>
+                <a:latin typeface="Calibri"/>
+              </a:rPr>
+              <a:t>Business's entire lead over Student is 8.9 points. One order in Business is worth 11.1. The lead is smaller than the resolution of the instrument that measured it.</a:t>
+            </a:r>
+          </a:p>
+        </p:txBody>
+      </p:sp>
+      <p:sp>
+        <p:nvSpPr>
+          <p:cNvPr id="8" name="TextBox 7"/>
+          <p:cNvSpPr txBox="1"/>
+          <p:nvPr/>
+        </p:nvSpPr>
+        <p:spPr>
+          <a:xfrm>
+            <a:off x="777240" y="6309360"/>
             <a:ext cx="10607040" cy="365760"/>
           </a:xfrm>
           <a:prstGeom prst="rect">
@@ -3454,7 +3906,7 @@
                 </a:solidFill>
                 <a:latin typeface="Calibri"/>
               </a:rPr>
-              <a:t>Week 1 Day 4, half two: the segment summary and its denominators</a:t>
+              <a:t>Week 1 Day 4, half two: the segment summary, and the count it rests on</a:t>
             </a:r>
           </a:p>
         </p:txBody>
@@ -3492,6 +3944,50 @@
             <a:avLst/>
           </a:prstGeom>
           <a:solidFill>
+            <a:srgbClr val="F7F7F5"/>
+          </a:solidFill>
+          <a:ln>
+            <a:noFill/>
+          </a:ln>
+          <a:effectLst/>
+        </p:spPr>
+        <p:style>
+          <a:lnRef idx="1">
+            <a:schemeClr val="accent1"/>
+          </a:lnRef>
+          <a:fillRef idx="3">
+            <a:schemeClr val="accent1"/>
+          </a:fillRef>
+          <a:effectRef idx="2">
+            <a:schemeClr val="accent1"/>
+          </a:effectRef>
+          <a:fontRef idx="minor">
+            <a:schemeClr val="lt1"/>
+          </a:fontRef>
+        </p:style>
+        <p:txBody>
+          <a:bodyPr rtlCol="0" anchor="ctr"/>
+          <a:lstStyle/>
+          <a:p>
+            <a:pPr algn="ctr"/>
+          </a:p>
+        </p:txBody>
+      </p:sp>
+      <p:sp>
+        <p:nvSpPr>
+          <p:cNvPr id="3" name="Rounded Rectangle 2"/>
+          <p:cNvSpPr/>
+          <p:nvPr/>
+        </p:nvSpPr>
+        <p:spPr>
+          <a:xfrm>
+            <a:off x="10195560" y="384048"/>
+            <a:ext cx="1188720" cy="310896"/>
+          </a:xfrm>
+          <a:prstGeom prst="roundRect">
+            <a:avLst/>
+          </a:prstGeom>
+          <a:solidFill>
             <a:srgbClr val="2B4A7D"/>
           </a:solidFill>
           <a:ln>
@@ -3518,12 +4014,21 @@
           <a:lstStyle/>
           <a:p>
             <a:pPr algn="ctr"/>
-          </a:p>
-        </p:txBody>
-      </p:sp>
-      <p:sp>
-        <p:nvSpPr>
-          <p:cNvPr id="3" name="TextBox 2"/>
+            <a:r>
+              <a:rPr sz="1100" b="1">
+                <a:solidFill>
+                  <a:srgbClr val="FFFFFF"/>
+                </a:solidFill>
+                <a:latin typeface="Calibri"/>
+              </a:rPr>
+              <a:t>DEPTH</a:t>
+            </a:r>
+          </a:p>
+        </p:txBody>
+      </p:sp>
+      <p:sp>
+        <p:nvSpPr>
+          <p:cNvPr id="4" name="TextBox 3"/>
           <p:cNvSpPr txBox="1"/>
           <p:nvPr/>
         </p:nvSpPr>
@@ -3544,27 +4049,51 @@
           <a:lstStyle/>
           <a:p>
             <a:r>
-              <a:rPr sz="3600" b="1">
-                <a:solidFill>
-                  <a:srgbClr val="FFFFFF"/>
-                </a:solidFill>
-                <a:latin typeface="Calibri"/>
-              </a:rPr>
-              <a:t>SECTION 2: THE ACCUMULATOR</a:t>
-            </a:r>
-          </a:p>
-        </p:txBody>
-      </p:sp>
-      <p:sp>
-        <p:nvSpPr>
-          <p:cNvPr id="4" name="TextBox 3"/>
-          <p:cNvSpPr txBox="1"/>
-          <p:nvPr/>
-        </p:nvSpPr>
-        <p:spPr>
-          <a:xfrm>
-            <a:off x="777240" y="1965960"/>
-            <a:ext cx="10607040" cy="4206240"/>
+              <a:rPr sz="3200" b="1">
+                <a:solidFill>
+                  <a:srgbClr val="1C1C1A"/>
+                </a:solidFill>
+                <a:latin typeface="Calibri"/>
+              </a:rPr>
+              <a:t>Why a ranking of small groups reads size as much as performance</a:t>
+            </a:r>
+          </a:p>
+        </p:txBody>
+      </p:sp>
+      <p:pic>
+        <p:nvPicPr>
+          <p:cNvPr id="5" name="Picture 4" descr="f726f2b897394eda.png"/>
+          <p:cNvPicPr>
+            <a:picLocks noChangeAspect="1"/>
+          </p:cNvPicPr>
+          <p:nvPr/>
+        </p:nvPicPr>
+        <p:blipFill>
+          <a:blip r:embed="rId2"/>
+          <a:stretch>
+            <a:fillRect/>
+          </a:stretch>
+        </p:blipFill>
+        <p:spPr>
+          <a:xfrm>
+            <a:off x="5448386" y="1965960"/>
+            <a:ext cx="1264746" cy="4023360"/>
+          </a:xfrm>
+          <a:prstGeom prst="rect">
+            <a:avLst/>
+          </a:prstGeom>
+        </p:spPr>
+      </p:pic>
+      <p:sp>
+        <p:nvSpPr>
+          <p:cNvPr id="6" name="TextBox 5"/>
+          <p:cNvSpPr txBox="1"/>
+          <p:nvPr/>
+        </p:nvSpPr>
+        <p:spPr>
+          <a:xfrm>
+            <a:off x="777240" y="6126480"/>
+            <a:ext cx="10607040" cy="790575"/>
           </a:xfrm>
           <a:prstGeom prst="rect">
             <a:avLst/>
@@ -3577,27 +4106,32 @@
           </a:bodyPr>
           <a:lstStyle/>
           <a:p>
-            <a:r>
-              <a:rPr sz="2100">
-                <a:solidFill>
-                  <a:srgbClr val="FFFFFF"/>
-                </a:solidFill>
-                <a:latin typeface="Calibri"/>
-              </a:rPr>
-              <a:t>[one column] &gt; [what is typical] &gt; [what one order does] &gt; [what the shape says] &gt; [per segment, with denominators]</a:t>
-            </a:r>
-          </a:p>
-        </p:txBody>
-      </p:sp>
-      <p:sp>
-        <p:nvSpPr>
-          <p:cNvPr id="5" name="TextBox 4"/>
-          <p:cNvSpPr txBox="1"/>
-          <p:nvPr/>
-        </p:nvSpPr>
-        <p:spPr>
-          <a:xfrm>
-            <a:off x="777240" y="6263640"/>
+            <a:pPr>
+              <a:spcAft>
+                <a:spcPts val="1000"/>
+              </a:spcAft>
+            </a:pPr>
+            <a:r>
+              <a:rPr sz="2100" b="0">
+                <a:solidFill>
+                  <a:srgbClr val="1C1C1A"/>
+                </a:solidFill>
+                <a:latin typeface="Calibri"/>
+              </a:rPr>
+              <a:t>Nothing is causing this and nothing is wrong with the data. It is what quotients over small denominators do, and it is why the fix is the denominator column rather than a better statistic.</a:t>
+            </a:r>
+          </a:p>
+        </p:txBody>
+      </p:sp>
+      <p:sp>
+        <p:nvSpPr>
+          <p:cNvPr id="7" name="TextBox 6"/>
+          <p:cNvSpPr txBox="1"/>
+          <p:nvPr/>
+        </p:nvSpPr>
+        <p:spPr>
+          <a:xfrm>
+            <a:off x="777240" y="6309360"/>
             <a:ext cx="10607040" cy="365760"/>
           </a:xfrm>
           <a:prstGeom prst="rect">
@@ -3618,7 +4152,7 @@
                 </a:solidFill>
                 <a:latin typeface="Calibri"/>
               </a:rPr>
-              <a:t>Week 1 Day 4, half two: the segment summary and its denominators</a:t>
+              <a:t>Week 1 Day 4, half two: the segment summary, and the count it rests on</a:t>
             </a:r>
           </a:p>
         </p:txBody>
@@ -3708,13 +4242,13 @@
           <a:lstStyle/>
           <a:p>
             <a:r>
-              <a:rPr sz="3600" b="1">
+              <a:rPr sz="3200" b="1">
                 <a:solidFill>
                   <a:srgbClr val="1C1C1A"/>
                 </a:solidFill>
                 <a:latin typeface="Calibri"/>
               </a:rPr>
-              <a:t>Counting into buckets</a:t>
+              <a:t>The rule</a:t>
             </a:r>
           </a:p>
         </p:txBody>
@@ -3728,7 +4262,7 @@
         <p:spPr>
           <a:xfrm>
             <a:off x="777240" y="1965960"/>
-            <a:ext cx="10607040" cy="4206240"/>
+            <a:ext cx="10607040" cy="1162050"/>
           </a:xfrm>
           <a:prstGeom prst="rect">
             <a:avLst/>
@@ -3741,69 +4275,35 @@
           </a:bodyPr>
           <a:lstStyle/>
           <a:p>
-            <a:r>
-              <a:rPr sz="2100">
+            <a:pPr>
+              <a:spcAft>
+                <a:spcPts val="1000"/>
+              </a:spcAft>
+            </a:pPr>
+            <a:r>
+              <a:rPr sz="2100" b="0">
                 <a:solidFill>
                   <a:srgbClr val="1C1C1A"/>
                 </a:solidFill>
                 <a:latin typeface="Calibri"/>
               </a:rPr>
-              <a:t>Monday you counted orders that passed a test. Today you count them into named piles, one pile per segment.</a:t>
-            </a:r>
-          </a:p>
-          <a:p>
-            <a:r>
-              <a:rPr sz="1700">
-                <a:solidFill>
-                  <a:srgbClr val="2B4A7D"/>
-                </a:solidFill>
-                <a:latin typeface="Consolas"/>
-              </a:rPr>
-              <a:t>counts = {"Retail-Core": 0, "Retail-Plus": 0, "Business": 0}</a:t>
-            </a:r>
-          </a:p>
-          <a:p>
-            <a:r>
-              <a:rPr sz="1700">
-                <a:solidFill>
-                  <a:srgbClr val="2B4A7D"/>
-                </a:solidFill>
-                <a:latin typeface="Consolas"/>
-              </a:rPr>
-              <a:t/>
-            </a:r>
-          </a:p>
-          <a:p>
-            <a:r>
-              <a:rPr sz="1700">
-                <a:solidFill>
-                  <a:srgbClr val="2B4A7D"/>
-                </a:solidFill>
-                <a:latin typeface="Consolas"/>
-              </a:rPr>
-              <a:t>for r in orders:</a:t>
-            </a:r>
-          </a:p>
-          <a:p>
-            <a:r>
-              <a:rPr sz="1700">
-                <a:solidFill>
-                  <a:srgbClr val="2B4A7D"/>
-                </a:solidFill>
-                <a:latin typeface="Consolas"/>
-              </a:rPr>
-              <a:t>    counts[r["segment"]] = counts[r["segment"]] + 1</a:t>
-            </a:r>
-          </a:p>
-          <a:p>
-            <a:r>
-              <a:rPr sz="2100">
+              <a:t>&gt; A rate travels with its denominator or it does not travel.</a:t>
+            </a:r>
+          </a:p>
+          <a:p>
+            <a:pPr>
+              <a:spcAft>
+                <a:spcPts val="1000"/>
+              </a:spcAft>
+            </a:pPr>
+            <a:r>
+              <a:rPr sz="2100" b="0">
                 <a:solidFill>
                   <a:srgbClr val="1C1C1A"/>
                 </a:solidFill>
                 <a:latin typeface="Calibri"/>
               </a:rPr>
-              <a:t>Reasonable code. The analyst listed the segments they remembered.</a:t>
+              <a:t>Write it as 11.1 percent of 9 and nobody can misread it. Write it as 11.1 percent and everybody will.</a:t>
             </a:r>
           </a:p>
         </p:txBody>
@@ -3816,7 +4316,7 @@
         </p:nvSpPr>
         <p:spPr>
           <a:xfrm>
-            <a:off x="777240" y="6263640"/>
+            <a:off x="777240" y="6309360"/>
             <a:ext cx="10607040" cy="365760"/>
           </a:xfrm>
           <a:prstGeom prst="rect">
@@ -3837,7 +4337,7 @@
                 </a:solidFill>
                 <a:latin typeface="Calibri"/>
               </a:rPr>
-              <a:t>Week 1 Day 4, half two: the segment summary and its denominators</a:t>
+              <a:t>Week 1 Day 4, half two: the segment summary, and the count it rests on</a:t>
             </a:r>
           </a:p>
         </p:txBody>
@@ -3875,7 +4375,7 @@
             <a:avLst/>
           </a:prstGeom>
           <a:solidFill>
-            <a:srgbClr val="F7F7F5"/>
+            <a:srgbClr val="2B4A7D"/>
           </a:solidFill>
           <a:ln>
             <a:noFill/>
@@ -3926,14 +4426,15 @@
           </a:bodyPr>
           <a:lstStyle/>
           <a:p>
+            <a:pPr algn="ctr"/>
             <a:r>
               <a:rPr sz="3600" b="1">
                 <a:solidFill>
-                  <a:srgbClr val="1C1C1A"/>
-                </a:solidFill>
-                <a:latin typeface="Calibri"/>
-              </a:rPr>
-              <a:t>Run it</a:t>
+                  <a:srgbClr val="FFFFFF"/>
+                </a:solidFill>
+                <a:latin typeface="Calibri"/>
+              </a:rPr>
+              <a:t>SECTION 2: THE ACCUMULATOR</a:t>
             </a:r>
           </a:p>
         </p:txBody>
@@ -3947,7 +4448,7 @@
         <p:spPr>
           <a:xfrm>
             <a:off x="777240" y="1965960"/>
-            <a:ext cx="10607040" cy="4206240"/>
+            <a:ext cx="10607040" cy="790575"/>
           </a:xfrm>
           <a:prstGeom prst="rect">
             <a:avLst/>
@@ -3960,25 +4461,28 @@
           </a:bodyPr>
           <a:lstStyle/>
           <a:p>
-            <a:r>
-              <a:rPr sz="1700">
-                <a:solidFill>
-                  <a:srgbClr val="2B4A7D"/>
-                </a:solidFill>
-                <a:latin typeface="Consolas"/>
-              </a:rPr>
-              <a:t>KeyError: 'Student'</a:t>
-            </a:r>
-          </a:p>
-          <a:p>
-            <a:r>
-              <a:rPr sz="2100">
-                <a:solidFill>
-                  <a:srgbClr val="1C1C1A"/>
-                </a:solidFill>
-                <a:latin typeface="Calibri"/>
-              </a:rPr>
-              <a:t>It failed on the very first order in the file.</a:t>
+            <a:pPr algn="ctr">
+              <a:spcAft>
+                <a:spcPts val="1000"/>
+              </a:spcAft>
+            </a:pPr>
+            <a:r>
+              <a:rPr sz="2100" b="0">
+                <a:solidFill>
+                  <a:srgbClr val="FFFFFF"/>
+                </a:solidFill>
+                <a:latin typeface="Calibri"/>
+              </a:rPr>
+              <a:t>[one column] &gt; [what is typical] &gt; [what one order does] &gt; [what the shape says] &gt; </a:t>
+            </a:r>
+            <a:r>
+              <a:rPr sz="2100" b="1">
+                <a:solidFill>
+                  <a:srgbClr val="FFFFFF"/>
+                </a:solidFill>
+                <a:latin typeface="Calibri"/>
+              </a:rPr>
+              <a:t>[per segment, with denominators]</a:t>
             </a:r>
           </a:p>
         </p:txBody>
@@ -3991,7 +4495,7 @@
         </p:nvSpPr>
         <p:spPr>
           <a:xfrm>
-            <a:off x="777240" y="6263640"/>
+            <a:off x="777240" y="6309360"/>
             <a:ext cx="10607040" cy="365760"/>
           </a:xfrm>
           <a:prstGeom prst="rect">
@@ -4012,7 +4516,7 @@
                 </a:solidFill>
                 <a:latin typeface="Calibri"/>
               </a:rPr>
-              <a:t>Week 1 Day 4, half two: the segment summary and its denominators</a:t>
+              <a:t>Week 1 Day 4, half two: the segment summary, and the count it rests on</a:t>
             </a:r>
           </a:p>
         </p:txBody>
@@ -4102,13 +4606,13 @@
           <a:lstStyle/>
           <a:p>
             <a:r>
-              <a:rPr sz="3600" b="1">
+              <a:rPr sz="3200" b="1">
                 <a:solidFill>
                   <a:srgbClr val="1C1C1A"/>
                 </a:solidFill>
                 <a:latin typeface="Calibri"/>
               </a:rPr>
-              <a:t>Reading it</a:t>
+              <a:t>Counting into buckets</a:t>
             </a:r>
           </a:p>
         </p:txBody>
@@ -4122,7 +4626,7 @@
         <p:spPr>
           <a:xfrm>
             <a:off x="777240" y="1965960"/>
-            <a:ext cx="10607040" cy="4206240"/>
+            <a:ext cx="10607040" cy="790575"/>
           </a:xfrm>
           <a:prstGeom prst="rect">
             <a:avLst/>
@@ -4135,60 +4639,149 @@
           </a:bodyPr>
           <a:lstStyle/>
           <a:p>
-            <a:r>
-              <a:rPr sz="2100">
+            <a:pPr>
+              <a:spcAft>
+                <a:spcPts val="1000"/>
+              </a:spcAft>
+            </a:pPr>
+            <a:r>
+              <a:rPr sz="2100" b="0">
                 <a:solidFill>
                   <a:srgbClr val="1C1C1A"/>
                 </a:solidFill>
                 <a:latin typeface="Calibri"/>
               </a:rPr>
-              <a:t>KeyError means a dictionary was asked for a key it does not hold. The key it did not hold is printed for you: Student.</a:t>
-            </a:r>
-          </a:p>
-          <a:p>
-            <a:r>
-              <a:rPr sz="2100">
+              <a:t>Monday you counted orders that passed a test. Today you count them into named piles, one pile per segment.</a:t>
+            </a:r>
+          </a:p>
+        </p:txBody>
+      </p:sp>
+      <p:sp>
+        <p:nvSpPr>
+          <p:cNvPr id="5" name="TextBox 4"/>
+          <p:cNvSpPr txBox="1"/>
+          <p:nvPr/>
+        </p:nvSpPr>
+        <p:spPr>
+          <a:xfrm>
+            <a:off x="777240" y="2893695"/>
+            <a:ext cx="10607040" cy="1162050"/>
+          </a:xfrm>
+          <a:prstGeom prst="rect">
+            <a:avLst/>
+          </a:prstGeom>
+          <a:noFill/>
+        </p:spPr>
+        <p:txBody>
+          <a:bodyPr wrap="square">
+            <a:spAutoFit/>
+          </a:bodyPr>
+          <a:lstStyle/>
+          <a:p>
+            <a:pPr>
+              <a:spcAft>
+                <a:spcPts val="400"/>
+              </a:spcAft>
+            </a:pPr>
+            <a:r>
+              <a:rPr sz="1700" b="0">
+                <a:solidFill>
+                  <a:srgbClr val="2B4A7D"/>
+                </a:solidFill>
+                <a:latin typeface="Consolas"/>
+              </a:rPr>
+              <a:t>counts = {"Retail-Core": 0, "Retail-Plus": 0, "Business": 0}</a:t>
+            </a:r>
+          </a:p>
+          <a:p>
+            <a:pPr>
+              <a:spcAft>
+                <a:spcPts val="400"/>
+              </a:spcAft>
+            </a:pPr>
+          </a:p>
+          <a:p>
+            <a:pPr>
+              <a:spcAft>
+                <a:spcPts val="400"/>
+              </a:spcAft>
+            </a:pPr>
+            <a:r>
+              <a:rPr sz="1700" b="0">
+                <a:solidFill>
+                  <a:srgbClr val="2B4A7D"/>
+                </a:solidFill>
+                <a:latin typeface="Consolas"/>
+              </a:rPr>
+              <a:t>for r in orders:</a:t>
+            </a:r>
+          </a:p>
+          <a:p>
+            <a:pPr>
+              <a:spcAft>
+                <a:spcPts val="400"/>
+              </a:spcAft>
+            </a:pPr>
+            <a:r>
+              <a:rPr sz="1700" b="0">
+                <a:solidFill>
+                  <a:srgbClr val="2B4A7D"/>
+                </a:solidFill>
+                <a:latin typeface="Consolas"/>
+              </a:rPr>
+              <a:t>    counts[r["segment"]] = counts[r["segment"]] + 1</a:t>
+            </a:r>
+          </a:p>
+        </p:txBody>
+      </p:sp>
+      <p:sp>
+        <p:nvSpPr>
+          <p:cNvPr id="6" name="TextBox 5"/>
+          <p:cNvSpPr txBox="1"/>
+          <p:nvPr/>
+        </p:nvSpPr>
+        <p:spPr>
+          <a:xfrm>
+            <a:off x="777240" y="4192904"/>
+            <a:ext cx="10607040" cy="542925"/>
+          </a:xfrm>
+          <a:prstGeom prst="rect">
+            <a:avLst/>
+          </a:prstGeom>
+          <a:noFill/>
+        </p:spPr>
+        <p:txBody>
+          <a:bodyPr wrap="square">
+            <a:spAutoFit/>
+          </a:bodyPr>
+          <a:lstStyle/>
+          <a:p>
+            <a:pPr>
+              <a:spcAft>
+                <a:spcPts val="1000"/>
+              </a:spcAft>
+            </a:pPr>
+            <a:r>
+              <a:rPr sz="2100" b="0">
                 <a:solidFill>
                   <a:srgbClr val="1C1C1A"/>
                 </a:solidFill>
                 <a:latin typeface="Calibri"/>
               </a:rPr>
-              <a:t>The dictionary held three segments because a person typed three segments. Kalpa Retail has four.</a:t>
-            </a:r>
-          </a:p>
-          <a:p>
-            <a:r>
-              <a:rPr sz="2100">
-                <a:solidFill>
-                  <a:srgbClr val="1C1C1A"/>
-                </a:solidFill>
-                <a:latin typeface="Calibri"/>
-              </a:rPr>
-              <a:t>Every hard-coded list of categories is a promise about data you have not read yet.</a:t>
-            </a:r>
-          </a:p>
-          <a:p>
-            <a:r>
-              <a:rPr sz="2100">
-                <a:solidFill>
-                  <a:srgbClr val="1C1C1A"/>
-                </a:solidFill>
-                <a:latin typeface="Calibri"/>
-              </a:rPr>
-              <a:t>This one is loud, because the first order in the file is a Student order. The dangerous version runs for six months and breaks the week a new segment launches.</a:t>
-            </a:r>
-          </a:p>
-        </p:txBody>
-      </p:sp>
-      <p:sp>
-        <p:nvSpPr>
-          <p:cNvPr id="5" name="TextBox 4"/>
-          <p:cNvSpPr txBox="1"/>
-          <p:nvPr/>
-        </p:nvSpPr>
-        <p:spPr>
-          <a:xfrm>
-            <a:off x="777240" y="6263640"/>
+              <a:t>Reasonable code. The analyst listed the segments they remembered.</a:t>
+            </a:r>
+          </a:p>
+        </p:txBody>
+      </p:sp>
+      <p:sp>
+        <p:nvSpPr>
+          <p:cNvPr id="7" name="TextBox 6"/>
+          <p:cNvSpPr txBox="1"/>
+          <p:nvPr/>
+        </p:nvSpPr>
+        <p:spPr>
+          <a:xfrm>
+            <a:off x="777240" y="6309360"/>
             <a:ext cx="10607040" cy="365760"/>
           </a:xfrm>
           <a:prstGeom prst="rect">
@@ -4209,7 +4802,7 @@
                 </a:solidFill>
                 <a:latin typeface="Calibri"/>
               </a:rPr>
-              <a:t>Week 1 Day 4, half two: the segment summary and its denominators</a:t>
+              <a:t>Week 1 Day 4, half two: the segment summary, and the count it rests on</a:t>
             </a:r>
           </a:p>
         </p:txBody>
@@ -4299,13 +4892,13 @@
           <a:lstStyle/>
           <a:p>
             <a:r>
-              <a:rPr sz="3600" b="1">
+              <a:rPr sz="3200" b="1">
                 <a:solidFill>
                   <a:srgbClr val="1C1C1A"/>
                 </a:solidFill>
                 <a:latin typeface="Calibri"/>
               </a:rPr>
-              <a:t>Build the key when you first see it</a:t>
+              <a:t>Run it</a:t>
             </a:r>
           </a:p>
         </p:txBody>
@@ -4319,7 +4912,7 @@
         <p:spPr>
           <a:xfrm>
             <a:off x="777240" y="1965960"/>
-            <a:ext cx="10607040" cy="4206240"/>
+            <a:ext cx="10607040" cy="502920"/>
           </a:xfrm>
           <a:prstGeom prst="rect">
             <a:avLst/>
@@ -4332,137 +4925,71 @@
           </a:bodyPr>
           <a:lstStyle/>
           <a:p>
-            <a:r>
-              <a:rPr sz="1700">
+            <a:pPr>
+              <a:spcAft>
+                <a:spcPts val="400"/>
+              </a:spcAft>
+            </a:pPr>
+            <a:r>
+              <a:rPr sz="1700" b="0">
                 <a:solidFill>
                   <a:srgbClr val="2B4A7D"/>
                 </a:solidFill>
                 <a:latin typeface="Consolas"/>
               </a:rPr>
-              <a:t>counts = {}</a:t>
-            </a:r>
-          </a:p>
-          <a:p>
-            <a:r>
-              <a:rPr sz="1700">
-                <a:solidFill>
-                  <a:srgbClr val="2B4A7D"/>
-                </a:solidFill>
-                <a:latin typeface="Consolas"/>
-              </a:rPr>
-              <a:t/>
-            </a:r>
-          </a:p>
-          <a:p>
-            <a:r>
-              <a:rPr sz="1700">
-                <a:solidFill>
-                  <a:srgbClr val="2B4A7D"/>
-                </a:solidFill>
-                <a:latin typeface="Consolas"/>
-              </a:rPr>
-              <a:t>for r in orders:</a:t>
-            </a:r>
-          </a:p>
-          <a:p>
-            <a:r>
-              <a:rPr sz="1700">
-                <a:solidFill>
-                  <a:srgbClr val="2B4A7D"/>
-                </a:solidFill>
-                <a:latin typeface="Consolas"/>
-              </a:rPr>
-              <a:t>    key = r["segment"]</a:t>
-            </a:r>
-          </a:p>
-          <a:p>
-            <a:r>
-              <a:rPr sz="1700">
-                <a:solidFill>
-                  <a:srgbClr val="2B4A7D"/>
-                </a:solidFill>
-                <a:latin typeface="Consolas"/>
-              </a:rPr>
-              <a:t>    if key not in counts:</a:t>
-            </a:r>
-          </a:p>
-          <a:p>
-            <a:r>
-              <a:rPr sz="1700">
-                <a:solidFill>
-                  <a:srgbClr val="2B4A7D"/>
-                </a:solidFill>
-                <a:latin typeface="Consolas"/>
-              </a:rPr>
-              <a:t>        counts[key] = 0</a:t>
-            </a:r>
-          </a:p>
-          <a:p>
-            <a:r>
-              <a:rPr sz="1700">
-                <a:solidFill>
-                  <a:srgbClr val="2B4A7D"/>
-                </a:solidFill>
-                <a:latin typeface="Consolas"/>
-              </a:rPr>
-              <a:t>    counts[key] = counts[key] + 1</a:t>
-            </a:r>
-          </a:p>
-          <a:p>
-            <a:r>
-              <a:rPr sz="2100">
+              <a:t>KeyError: 'Student'</a:t>
+            </a:r>
+          </a:p>
+        </p:txBody>
+      </p:sp>
+      <p:sp>
+        <p:nvSpPr>
+          <p:cNvPr id="5" name="TextBox 4"/>
+          <p:cNvSpPr txBox="1"/>
+          <p:nvPr/>
+        </p:nvSpPr>
+        <p:spPr>
+          <a:xfrm>
+            <a:off x="777240" y="2606040"/>
+            <a:ext cx="10607040" cy="542925"/>
+          </a:xfrm>
+          <a:prstGeom prst="rect">
+            <a:avLst/>
+          </a:prstGeom>
+          <a:noFill/>
+        </p:spPr>
+        <p:txBody>
+          <a:bodyPr wrap="square">
+            <a:spAutoFit/>
+          </a:bodyPr>
+          <a:lstStyle/>
+          <a:p>
+            <a:pPr>
+              <a:spcAft>
+                <a:spcPts val="1000"/>
+              </a:spcAft>
+            </a:pPr>
+            <a:r>
+              <a:rPr sz="2100" b="0">
                 <a:solidFill>
                   <a:srgbClr val="1C1C1A"/>
                 </a:solidFill>
                 <a:latin typeface="Calibri"/>
               </a:rPr>
-              <a:t>Three lines instead of one declaration, and the code now works on a file with segments nobody told you about.</a:t>
-            </a:r>
-          </a:p>
-          <a:p>
-            <a:r>
-              <a:rPr sz="2100">
-                <a:solidFill>
-                  <a:srgbClr val="1C1C1A"/>
-                </a:solidFill>
-                <a:latin typeface="Calibri"/>
-              </a:rPr>
-              <a:t>The same shape written shorter, which you will meet again in Week 2:</a:t>
-            </a:r>
-          </a:p>
-          <a:p>
-            <a:r>
-              <a:rPr sz="1700">
-                <a:solidFill>
-                  <a:srgbClr val="2B4A7D"/>
-                </a:solidFill>
-                <a:latin typeface="Consolas"/>
-              </a:rPr>
-              <a:t>counts[key] = counts.get(key, 0) + 1</a:t>
-            </a:r>
-          </a:p>
-          <a:p>
-            <a:r>
-              <a:rPr sz="2100">
-                <a:solidFill>
-                  <a:srgbClr val="1C1C1A"/>
-                </a:solidFill>
-                <a:latin typeface="Calibri"/>
-              </a:rPr>
-              <a:t>That is Monday's .get() with a default, doing exactly what it did on Monday.</a:t>
-            </a:r>
-          </a:p>
-        </p:txBody>
-      </p:sp>
-      <p:sp>
-        <p:nvSpPr>
-          <p:cNvPr id="5" name="TextBox 4"/>
-          <p:cNvSpPr txBox="1"/>
-          <p:nvPr/>
-        </p:nvSpPr>
-        <p:spPr>
-          <a:xfrm>
-            <a:off x="777240" y="6263640"/>
+              <a:t>It failed on the very first order in the file.</a:t>
+            </a:r>
+          </a:p>
+        </p:txBody>
+      </p:sp>
+      <p:sp>
+        <p:nvSpPr>
+          <p:cNvPr id="6" name="TextBox 5"/>
+          <p:cNvSpPr txBox="1"/>
+          <p:nvPr/>
+        </p:nvSpPr>
+        <p:spPr>
+          <a:xfrm>
+            <a:off x="777240" y="6309360"/>
             <a:ext cx="10607040" cy="365760"/>
           </a:xfrm>
           <a:prstGeom prst="rect">
@@ -4483,7 +5010,7 @@
                 </a:solidFill>
                 <a:latin typeface="Calibri"/>
               </a:rPr>
-              <a:t>Week 1 Day 4, half two: the segment summary and its denominators</a:t>
+              <a:t>Week 1 Day 4, half two: the segment summary, and the count it rests on</a:t>
             </a:r>
           </a:p>
         </p:txBody>
@@ -4573,13 +5100,13 @@
           <a:lstStyle/>
           <a:p>
             <a:r>
-              <a:rPr sz="3600" b="1">
+              <a:rPr sz="3200" b="1">
                 <a:solidFill>
                   <a:srgbClr val="1C1C1A"/>
                 </a:solidFill>
                 <a:latin typeface="Calibri"/>
               </a:rPr>
-              <a:t>The fixed count</a:t>
+              <a:t>Reading it</a:t>
             </a:r>
           </a:p>
         </p:txBody>
@@ -4593,7 +5120,7 @@
         <p:spPr>
           <a:xfrm>
             <a:off x="777240" y="1965960"/>
-            <a:ext cx="10607040" cy="4206240"/>
+            <a:ext cx="10607040" cy="2400300"/>
           </a:xfrm>
           <a:prstGeom prst="rect">
             <a:avLst/>
@@ -4606,80 +5133,67 @@
           </a:bodyPr>
           <a:lstStyle/>
           <a:p>
-            <a:r>
-              <a:rPr sz="1700">
-                <a:solidFill>
-                  <a:srgbClr val="2B4A7D"/>
-                </a:solidFill>
-                <a:latin typeface="Consolas"/>
-              </a:rPr>
-              <a:t>Business       9</a:t>
-            </a:r>
-          </a:p>
-          <a:p>
-            <a:r>
-              <a:rPr sz="1700">
-                <a:solidFill>
-                  <a:srgbClr val="2B4A7D"/>
-                </a:solidFill>
-                <a:latin typeface="Consolas"/>
-              </a:rPr>
-              <a:t>Retail-Core   14</a:t>
-            </a:r>
-          </a:p>
-          <a:p>
-            <a:r>
-              <a:rPr sz="1700">
-                <a:solidFill>
-                  <a:srgbClr val="2B4A7D"/>
-                </a:solidFill>
-                <a:latin typeface="Consolas"/>
-              </a:rPr>
-              <a:t>Retail-Plus   11</a:t>
-            </a:r>
-          </a:p>
-          <a:p>
-            <a:r>
-              <a:rPr sz="1700">
-                <a:solidFill>
-                  <a:srgbClr val="2B4A7D"/>
-                </a:solidFill>
-                <a:latin typeface="Consolas"/>
-              </a:rPr>
-              <a:t>Student       10</a:t>
-            </a:r>
-          </a:p>
-          <a:p>
-            <a:r>
-              <a:rPr sz="1700">
-                <a:solidFill>
-                  <a:srgbClr val="2B4A7D"/>
-                </a:solidFill>
-                <a:latin typeface="Consolas"/>
-              </a:rPr>
-              <a:t>      total   44</a:t>
-            </a:r>
-          </a:p>
-          <a:p>
-            <a:r>
-              <a:rPr sz="2100">
+            <a:pPr>
+              <a:spcAft>
+                <a:spcPts val="1000"/>
+              </a:spcAft>
+            </a:pPr>
+            <a:r>
+              <a:rPr sz="2100" b="0">
                 <a:solidFill>
                   <a:srgbClr val="1C1C1A"/>
                 </a:solidFill>
                 <a:latin typeface="Calibri"/>
               </a:rPr>
-              <a:t>The total matches your profiled order count. If it did not, you would have a bug and the last line is how you would know.</a:t>
-            </a:r>
-          </a:p>
-          <a:p>
-            <a:r>
-              <a:rPr sz="2100">
+              <a:t>KeyError means a dictionary was asked for a key it does not hold. The key it did not hold is printed for you: Student.</a:t>
+            </a:r>
+          </a:p>
+          <a:p>
+            <a:pPr>
+              <a:spcAft>
+                <a:spcPts val="1000"/>
+              </a:spcAft>
+            </a:pPr>
+            <a:r>
+              <a:rPr sz="2100" b="0">
                 <a:solidFill>
                   <a:srgbClr val="1C1C1A"/>
                 </a:solidFill>
                 <a:latin typeface="Calibri"/>
               </a:rPr>
-              <a:t>One number here deserves a second look. Student holds ten. The raw file held twelve, and two Student orders were rejected yesterday for failing conversion. Your cleaning changed the denominator of your smallest segment by seventeen percent, and nothing in today's code would tell you. Yesterday's rejects log is the only place it is written down.</a:t>
+              <a:t>The dictionary held three segments because a person typed three segments. Kalpa Retail has four.</a:t>
+            </a:r>
+          </a:p>
+          <a:p>
+            <a:pPr>
+              <a:spcAft>
+                <a:spcPts val="1000"/>
+              </a:spcAft>
+            </a:pPr>
+            <a:r>
+              <a:rPr sz="2100" b="0">
+                <a:solidFill>
+                  <a:srgbClr val="1C1C1A"/>
+                </a:solidFill>
+                <a:latin typeface="Calibri"/>
+              </a:rPr>
+              <a:t>Every hard-coded list of categories is a promise about data you have not read yet.</a:t>
+            </a:r>
+          </a:p>
+          <a:p>
+            <a:pPr>
+              <a:spcAft>
+                <a:spcPts val="1000"/>
+              </a:spcAft>
+            </a:pPr>
+            <a:r>
+              <a:rPr sz="2100" b="0">
+                <a:solidFill>
+                  <a:srgbClr val="1C1C1A"/>
+                </a:solidFill>
+                <a:latin typeface="Calibri"/>
+              </a:rPr>
+              <a:t>This one is loud, because the first order in the file is a Student order. The dangerous version runs for six months and breaks the week a new segment launches.</a:t>
             </a:r>
           </a:p>
         </p:txBody>
@@ -4692,7 +5206,7 @@
         </p:nvSpPr>
         <p:spPr>
           <a:xfrm>
-            <a:off x="777240" y="6263640"/>
+            <a:off x="777240" y="6309360"/>
             <a:ext cx="10607040" cy="365760"/>
           </a:xfrm>
           <a:prstGeom prst="rect">
@@ -4713,7 +5227,7 @@
                 </a:solidFill>
                 <a:latin typeface="Calibri"/>
               </a:rPr>
-              <a:t>Week 1 Day 4, half two: the segment summary and its denominators</a:t>
+              <a:t>Week 1 Day 4, half two: the segment summary, and the count it rests on</a:t>
             </a:r>
           </a:p>
         </p:txBody>
@@ -4751,6 +5265,50 @@
             <a:avLst/>
           </a:prstGeom>
           <a:solidFill>
+            <a:srgbClr val="F7F7F5"/>
+          </a:solidFill>
+          <a:ln>
+            <a:noFill/>
+          </a:ln>
+          <a:effectLst/>
+        </p:spPr>
+        <p:style>
+          <a:lnRef idx="1">
+            <a:schemeClr val="accent1"/>
+          </a:lnRef>
+          <a:fillRef idx="3">
+            <a:schemeClr val="accent1"/>
+          </a:fillRef>
+          <a:effectRef idx="2">
+            <a:schemeClr val="accent1"/>
+          </a:effectRef>
+          <a:fontRef idx="minor">
+            <a:schemeClr val="lt1"/>
+          </a:fontRef>
+        </p:style>
+        <p:txBody>
+          <a:bodyPr rtlCol="0" anchor="ctr"/>
+          <a:lstStyle/>
+          <a:p>
+            <a:pPr algn="ctr"/>
+          </a:p>
+        </p:txBody>
+      </p:sp>
+      <p:sp>
+        <p:nvSpPr>
+          <p:cNvPr id="3" name="Rounded Rectangle 2"/>
+          <p:cNvSpPr/>
+          <p:nvPr/>
+        </p:nvSpPr>
+        <p:spPr>
+          <a:xfrm>
+            <a:off x="10195560" y="384048"/>
+            <a:ext cx="1188720" cy="310896"/>
+          </a:xfrm>
+          <a:prstGeom prst="roundRect">
+            <a:avLst/>
+          </a:prstGeom>
+          <a:solidFill>
             <a:srgbClr val="2B4A7D"/>
           </a:solidFill>
           <a:ln>
@@ -4777,12 +5335,21 @@
           <a:lstStyle/>
           <a:p>
             <a:pPr algn="ctr"/>
-          </a:p>
-        </p:txBody>
-      </p:sp>
-      <p:sp>
-        <p:nvSpPr>
-          <p:cNvPr id="3" name="TextBox 2"/>
+            <a:r>
+              <a:rPr sz="1100" b="1">
+                <a:solidFill>
+                  <a:srgbClr val="FFFFFF"/>
+                </a:solidFill>
+                <a:latin typeface="Calibri"/>
+              </a:rPr>
+              <a:t>DEPTH</a:t>
+            </a:r>
+          </a:p>
+        </p:txBody>
+      </p:sp>
+      <p:sp>
+        <p:nvSpPr>
+          <p:cNvPr id="4" name="TextBox 3"/>
           <p:cNvSpPr txBox="1"/>
           <p:nvPr/>
         </p:nvSpPr>
@@ -4803,27 +5370,27 @@
           <a:lstStyle/>
           <a:p>
             <a:r>
-              <a:rPr sz="3600" b="1">
-                <a:solidFill>
-                  <a:srgbClr val="FFFFFF"/>
-                </a:solidFill>
-                <a:latin typeface="Calibri"/>
-              </a:rPr>
-              <a:t>SECTION 3: THE SEGMENT SUMMARY</a:t>
-            </a:r>
-          </a:p>
-        </p:txBody>
-      </p:sp>
-      <p:sp>
-        <p:nvSpPr>
-          <p:cNvPr id="4" name="TextBox 3"/>
+              <a:rPr sz="3200" b="1">
+                <a:solidFill>
+                  <a:srgbClr val="1C1C1A"/>
+                </a:solidFill>
+                <a:latin typeface="Calibri"/>
+              </a:rPr>
+              <a:t>The failure that is worse than the KeyError</a:t>
+            </a:r>
+          </a:p>
+        </p:txBody>
+      </p:sp>
+      <p:sp>
+        <p:nvSpPr>
+          <p:cNvPr id="5" name="TextBox 4"/>
           <p:cNvSpPr txBox="1"/>
           <p:nvPr/>
         </p:nvSpPr>
         <p:spPr>
           <a:xfrm>
             <a:off x="777240" y="1965960"/>
-            <a:ext cx="10607040" cy="4206240"/>
+            <a:ext cx="10607040" cy="542925"/>
           </a:xfrm>
           <a:prstGeom prst="rect">
             <a:avLst/>
@@ -4836,27 +5403,181 @@
           </a:bodyPr>
           <a:lstStyle/>
           <a:p>
-            <a:r>
-              <a:rPr sz="2100">
-                <a:solidFill>
-                  <a:srgbClr val="FFFFFF"/>
-                </a:solidFill>
-                <a:latin typeface="Calibri"/>
-              </a:rPr>
-              <a:t>[one column] &gt; [what is typical] &gt; [what one order does] &gt; [what the shape says] &gt; [per segment, with denominators]</a:t>
-            </a:r>
-          </a:p>
-        </p:txBody>
-      </p:sp>
-      <p:sp>
-        <p:nvSpPr>
-          <p:cNvPr id="5" name="TextBox 4"/>
-          <p:cNvSpPr txBox="1"/>
-          <p:nvPr/>
-        </p:nvSpPr>
-        <p:spPr>
-          <a:xfrm>
-            <a:off x="777240" y="6263640"/>
+            <a:pPr>
+              <a:spcAft>
+                <a:spcPts val="1000"/>
+              </a:spcAft>
+            </a:pPr>
+            <a:r>
+              <a:rPr sz="2100" b="0">
+                <a:solidFill>
+                  <a:srgbClr val="1C1C1A"/>
+                </a:solidFill>
+                <a:latin typeface="Calibri"/>
+              </a:rPr>
+              <a:t>The KeyError was the good case, because it stopped.</a:t>
+            </a:r>
+          </a:p>
+        </p:txBody>
+      </p:sp>
+      <p:sp>
+        <p:nvSpPr>
+          <p:cNvPr id="6" name="TextBox 5"/>
+          <p:cNvSpPr txBox="1"/>
+          <p:nvPr/>
+        </p:nvSpPr>
+        <p:spPr>
+          <a:xfrm>
+            <a:off x="777240" y="2646045"/>
+            <a:ext cx="10607040" cy="1409700"/>
+          </a:xfrm>
+          <a:prstGeom prst="rect">
+            <a:avLst/>
+          </a:prstGeom>
+          <a:noFill/>
+        </p:spPr>
+        <p:txBody>
+          <a:bodyPr wrap="square">
+            <a:spAutoFit/>
+          </a:bodyPr>
+          <a:lstStyle/>
+          <a:p>
+            <a:pPr>
+              <a:spcAft>
+                <a:spcPts val="400"/>
+              </a:spcAft>
+            </a:pPr>
+            <a:r>
+              <a:rPr sz="1700" b="0">
+                <a:solidFill>
+                  <a:srgbClr val="2B4A7D"/>
+                </a:solidFill>
+                <a:latin typeface="Consolas"/>
+              </a:rPr>
+              <a:t>counts = {"Retail-Core": 0, "Retail-Plus": 0, "Business": 0}</a:t>
+            </a:r>
+          </a:p>
+          <a:p>
+            <a:pPr>
+              <a:spcAft>
+                <a:spcPts val="400"/>
+              </a:spcAft>
+            </a:pPr>
+          </a:p>
+          <a:p>
+            <a:pPr>
+              <a:spcAft>
+                <a:spcPts val="400"/>
+              </a:spcAft>
+            </a:pPr>
+            <a:r>
+              <a:rPr sz="1700" b="0">
+                <a:solidFill>
+                  <a:srgbClr val="2B4A7D"/>
+                </a:solidFill>
+                <a:latin typeface="Consolas"/>
+              </a:rPr>
+              <a:t>for r in orders:</a:t>
+            </a:r>
+          </a:p>
+          <a:p>
+            <a:pPr>
+              <a:spcAft>
+                <a:spcPts val="400"/>
+              </a:spcAft>
+            </a:pPr>
+            <a:r>
+              <a:rPr sz="1700" b="0">
+                <a:solidFill>
+                  <a:srgbClr val="2B4A7D"/>
+                </a:solidFill>
+                <a:latin typeface="Consolas"/>
+              </a:rPr>
+              <a:t>    if r["segment"] in counts:</a:t>
+            </a:r>
+          </a:p>
+          <a:p>
+            <a:pPr>
+              <a:spcAft>
+                <a:spcPts val="400"/>
+              </a:spcAft>
+            </a:pPr>
+            <a:r>
+              <a:rPr sz="1700" b="0">
+                <a:solidFill>
+                  <a:srgbClr val="2B4A7D"/>
+                </a:solidFill>
+                <a:latin typeface="Consolas"/>
+              </a:rPr>
+              <a:t>        counts[r["segment"]] = counts[r["segment"]] + 1</a:t>
+            </a:r>
+          </a:p>
+        </p:txBody>
+      </p:sp>
+      <p:sp>
+        <p:nvSpPr>
+          <p:cNvPr id="7" name="TextBox 6"/>
+          <p:cNvSpPr txBox="1"/>
+          <p:nvPr/>
+        </p:nvSpPr>
+        <p:spPr>
+          <a:xfrm>
+            <a:off x="777240" y="4192904"/>
+            <a:ext cx="10607040" cy="1657350"/>
+          </a:xfrm>
+          <a:prstGeom prst="rect">
+            <a:avLst/>
+          </a:prstGeom>
+          <a:noFill/>
+        </p:spPr>
+        <p:txBody>
+          <a:bodyPr wrap="square">
+            <a:spAutoFit/>
+          </a:bodyPr>
+          <a:lstStyle/>
+          <a:p>
+            <a:pPr>
+              <a:spcAft>
+                <a:spcPts val="1000"/>
+              </a:spcAft>
+            </a:pPr>
+            <a:r>
+              <a:rPr sz="2100" b="0">
+                <a:solidFill>
+                  <a:srgbClr val="1C1C1A"/>
+                </a:solidFill>
+                <a:latin typeface="Calibri"/>
+              </a:rPr>
+              <a:t>Somebody who has met a KeyError once often writes this next. It never raises. It silently ignores every Student order, so the counts come to 34 rather than 44, the totals are all understated, and the file looks fine.</a:t>
+            </a:r>
+          </a:p>
+          <a:p>
+            <a:pPr>
+              <a:spcAft>
+                <a:spcPts val="1000"/>
+              </a:spcAft>
+            </a:pPr>
+            <a:r>
+              <a:rPr sz="2100" b="0">
+                <a:solidFill>
+                  <a:srgbClr val="1C1C1A"/>
+                </a:solidFill>
+                <a:latin typeface="Calibri"/>
+              </a:rPr>
+              <a:t>The check that catches it is the one you already write: the segment counts have to add up to the order count. Ten orders are missing and the last line is the only place that shows.</a:t>
+            </a:r>
+          </a:p>
+        </p:txBody>
+      </p:sp>
+      <p:sp>
+        <p:nvSpPr>
+          <p:cNvPr id="8" name="TextBox 7"/>
+          <p:cNvSpPr txBox="1"/>
+          <p:nvPr/>
+        </p:nvSpPr>
+        <p:spPr>
+          <a:xfrm>
+            <a:off x="777240" y="6309360"/>
             <a:ext cx="10607040" cy="365760"/>
           </a:xfrm>
           <a:prstGeom prst="rect">
@@ -4877,7 +5598,7 @@
                 </a:solidFill>
                 <a:latin typeface="Calibri"/>
               </a:rPr>
-              <a:t>Week 1 Day 4, half two: the segment summary and its denominators</a:t>
+              <a:t>Week 1 Day 4, half two: the segment summary, and the count it rests on</a:t>
             </a:r>
           </a:p>
         </p:txBody>
@@ -4967,13 +5688,13 @@
           <a:lstStyle/>
           <a:p>
             <a:r>
-              <a:rPr sz="3600" b="1">
+              <a:rPr sz="3200" b="1">
                 <a:solidFill>
                   <a:srgbClr val="1C1C1A"/>
                 </a:solidFill>
                 <a:latin typeface="Calibri"/>
               </a:rPr>
-              <a:t>Three accumulators, one pass</a:t>
+              <a:t>Build the key when you first see it</a:t>
             </a:r>
           </a:p>
         </p:txBody>
@@ -4987,7 +5708,7 @@
         <p:spPr>
           <a:xfrm>
             <a:off x="777240" y="1965960"/>
-            <a:ext cx="10607040" cy="4206240"/>
+            <a:ext cx="10607040" cy="1905000"/>
           </a:xfrm>
           <a:prstGeom prst="rect">
             <a:avLst/>
@@ -5000,93 +5721,252 @@
           </a:bodyPr>
           <a:lstStyle/>
           <a:p>
-            <a:r>
-              <a:rPr sz="2100">
+            <a:pPr>
+              <a:spcAft>
+                <a:spcPts val="400"/>
+              </a:spcAft>
+            </a:pPr>
+            <a:r>
+              <a:rPr sz="1700" b="0">
+                <a:solidFill>
+                  <a:srgbClr val="2B4A7D"/>
+                </a:solidFill>
+                <a:latin typeface="Consolas"/>
+              </a:rPr>
+              <a:t>counts = {}</a:t>
+            </a:r>
+          </a:p>
+          <a:p>
+            <a:pPr>
+              <a:spcAft>
+                <a:spcPts val="400"/>
+              </a:spcAft>
+            </a:pPr>
+          </a:p>
+          <a:p>
+            <a:pPr>
+              <a:spcAft>
+                <a:spcPts val="400"/>
+              </a:spcAft>
+            </a:pPr>
+            <a:r>
+              <a:rPr sz="1700" b="0">
+                <a:solidFill>
+                  <a:srgbClr val="2B4A7D"/>
+                </a:solidFill>
+                <a:latin typeface="Consolas"/>
+              </a:rPr>
+              <a:t>for r in orders:</a:t>
+            </a:r>
+          </a:p>
+          <a:p>
+            <a:pPr>
+              <a:spcAft>
+                <a:spcPts val="400"/>
+              </a:spcAft>
+            </a:pPr>
+            <a:r>
+              <a:rPr sz="1700" b="0">
+                <a:solidFill>
+                  <a:srgbClr val="2B4A7D"/>
+                </a:solidFill>
+                <a:latin typeface="Consolas"/>
+              </a:rPr>
+              <a:t>    key = r["segment"]</a:t>
+            </a:r>
+          </a:p>
+          <a:p>
+            <a:pPr>
+              <a:spcAft>
+                <a:spcPts val="400"/>
+              </a:spcAft>
+            </a:pPr>
+            <a:r>
+              <a:rPr sz="1700" b="0">
+                <a:solidFill>
+                  <a:srgbClr val="2B4A7D"/>
+                </a:solidFill>
+                <a:latin typeface="Consolas"/>
+              </a:rPr>
+              <a:t>    if key not in counts:</a:t>
+            </a:r>
+          </a:p>
+          <a:p>
+            <a:pPr>
+              <a:spcAft>
+                <a:spcPts val="400"/>
+              </a:spcAft>
+            </a:pPr>
+            <a:r>
+              <a:rPr sz="1700" b="0">
+                <a:solidFill>
+                  <a:srgbClr val="2B4A7D"/>
+                </a:solidFill>
+                <a:latin typeface="Consolas"/>
+              </a:rPr>
+              <a:t>        counts[key] = 0</a:t>
+            </a:r>
+          </a:p>
+          <a:p>
+            <a:pPr>
+              <a:spcAft>
+                <a:spcPts val="400"/>
+              </a:spcAft>
+            </a:pPr>
+            <a:r>
+              <a:rPr sz="1700" b="0">
+                <a:solidFill>
+                  <a:srgbClr val="2B4A7D"/>
+                </a:solidFill>
+                <a:latin typeface="Consolas"/>
+              </a:rPr>
+              <a:t>    counts[key] = counts[key] + 1</a:t>
+            </a:r>
+          </a:p>
+        </p:txBody>
+      </p:sp>
+      <p:sp>
+        <p:nvSpPr>
+          <p:cNvPr id="5" name="TextBox 4"/>
+          <p:cNvSpPr txBox="1"/>
+          <p:nvPr/>
+        </p:nvSpPr>
+        <p:spPr>
+          <a:xfrm>
+            <a:off x="777240" y="4008119"/>
+            <a:ext cx="10607040" cy="1162050"/>
+          </a:xfrm>
+          <a:prstGeom prst="rect">
+            <a:avLst/>
+          </a:prstGeom>
+          <a:noFill/>
+        </p:spPr>
+        <p:txBody>
+          <a:bodyPr wrap="square">
+            <a:spAutoFit/>
+          </a:bodyPr>
+          <a:lstStyle/>
+          <a:p>
+            <a:pPr>
+              <a:spcAft>
+                <a:spcPts val="1000"/>
+              </a:spcAft>
+            </a:pPr>
+            <a:r>
+              <a:rPr sz="2100" b="0">
                 <a:solidFill>
                   <a:srgbClr val="1C1C1A"/>
                 </a:solidFill>
                 <a:latin typeface="Calibri"/>
               </a:rPr>
-              <a:t>Per segment you need three things: how many orders, what a typical amount looks like, and what share came back.</a:t>
-            </a:r>
-          </a:p>
-          <a:p>
-            <a:r>
-              <a:rPr sz="1700">
+              <a:t>Three lines instead of one declaration, and the code now works on a file with segments nobody told you about.</a:t>
+            </a:r>
+          </a:p>
+          <a:p>
+            <a:pPr>
+              <a:spcAft>
+                <a:spcPts val="1000"/>
+              </a:spcAft>
+            </a:pPr>
+            <a:r>
+              <a:rPr sz="2100" b="0">
+                <a:solidFill>
+                  <a:srgbClr val="1C1C1A"/>
+                </a:solidFill>
+                <a:latin typeface="Calibri"/>
+              </a:rPr>
+              <a:t>The same shape written shorter, which you will meet again in Week 2:</a:t>
+            </a:r>
+          </a:p>
+        </p:txBody>
+      </p:sp>
+      <p:sp>
+        <p:nvSpPr>
+          <p:cNvPr id="6" name="TextBox 5"/>
+          <p:cNvSpPr txBox="1"/>
+          <p:nvPr/>
+        </p:nvSpPr>
+        <p:spPr>
+          <a:xfrm>
+            <a:off x="777240" y="5307330"/>
+            <a:ext cx="10607040" cy="502920"/>
+          </a:xfrm>
+          <a:prstGeom prst="rect">
+            <a:avLst/>
+          </a:prstGeom>
+          <a:noFill/>
+        </p:spPr>
+        <p:txBody>
+          <a:bodyPr wrap="square">
+            <a:spAutoFit/>
+          </a:bodyPr>
+          <a:lstStyle/>
+          <a:p>
+            <a:pPr>
+              <a:spcAft>
+                <a:spcPts val="400"/>
+              </a:spcAft>
+            </a:pPr>
+            <a:r>
+              <a:rPr sz="1700" b="0">
                 <a:solidFill>
                   <a:srgbClr val="2B4A7D"/>
                 </a:solidFill>
                 <a:latin typeface="Consolas"/>
               </a:rPr>
-              <a:t>per_segment[key] = {</a:t>
-            </a:r>
-          </a:p>
-          <a:p>
-            <a:r>
-              <a:rPr sz="1700">
-                <a:solidFill>
-                  <a:srgbClr val="2B4A7D"/>
-                </a:solidFill>
-                <a:latin typeface="Consolas"/>
-              </a:rPr>
-              <a:t>    "count":    how many orders landed here,</a:t>
-            </a:r>
-          </a:p>
-          <a:p>
-            <a:r>
-              <a:rPr sz="1700">
-                <a:solidFill>
-                  <a:srgbClr val="2B4A7D"/>
-                </a:solidFill>
-                <a:latin typeface="Consolas"/>
-              </a:rPr>
-              <a:t>    "amounts":  every amount, collected so the median can be taken at the end,</a:t>
-            </a:r>
-          </a:p>
-          <a:p>
-            <a:r>
-              <a:rPr sz="1700">
-                <a:solidFill>
-                  <a:srgbClr val="2B4A7D"/>
-                </a:solidFill>
-                <a:latin typeface="Consolas"/>
-              </a:rPr>
-              <a:t>    "returned": how many had status "returned",</a:t>
-            </a:r>
-          </a:p>
-          <a:p>
-            <a:r>
-              <a:rPr sz="1700">
-                <a:solidFill>
-                  <a:srgbClr val="2B4A7D"/>
-                </a:solidFill>
-                <a:latin typeface="Consolas"/>
-              </a:rPr>
-              <a:t>}</a:t>
-            </a:r>
-          </a:p>
-          <a:p>
-            <a:r>
-              <a:rPr sz="2100">
+              <a:t>counts[key] = counts.get(key, 0) + 1</a:t>
+            </a:r>
+          </a:p>
+        </p:txBody>
+      </p:sp>
+      <p:sp>
+        <p:nvSpPr>
+          <p:cNvPr id="7" name="TextBox 6"/>
+          <p:cNvSpPr txBox="1"/>
+          <p:nvPr/>
+        </p:nvSpPr>
+        <p:spPr>
+          <a:xfrm>
+            <a:off x="777240" y="5947410"/>
+            <a:ext cx="10607040" cy="542925"/>
+          </a:xfrm>
+          <a:prstGeom prst="rect">
+            <a:avLst/>
+          </a:prstGeom>
+          <a:noFill/>
+        </p:spPr>
+        <p:txBody>
+          <a:bodyPr wrap="square">
+            <a:spAutoFit/>
+          </a:bodyPr>
+          <a:lstStyle/>
+          <a:p>
+            <a:pPr>
+              <a:spcAft>
+                <a:spcPts val="1000"/>
+              </a:spcAft>
+            </a:pPr>
+            <a:r>
+              <a:rPr sz="2100" b="0">
                 <a:solidFill>
                   <a:srgbClr val="1C1C1A"/>
                 </a:solidFill>
                 <a:latin typeface="Calibri"/>
               </a:rPr>
-              <a:t>The median cannot be accumulated one order at a time. It needs the whole list sorted, so the list is collected during the pass and the median is taken after it.</a:t>
-            </a:r>
-          </a:p>
-        </p:txBody>
-      </p:sp>
-      <p:sp>
-        <p:nvSpPr>
-          <p:cNvPr id="5" name="TextBox 4"/>
-          <p:cNvSpPr txBox="1"/>
-          <p:nvPr/>
-        </p:nvSpPr>
-        <p:spPr>
-          <a:xfrm>
-            <a:off x="777240" y="6263640"/>
+              <a:t>That is Monday's .get() with a default, doing exactly what it did on Monday.</a:t>
+            </a:r>
+          </a:p>
+        </p:txBody>
+      </p:sp>
+      <p:sp>
+        <p:nvSpPr>
+          <p:cNvPr id="8" name="TextBox 7"/>
+          <p:cNvSpPr txBox="1"/>
+          <p:nvPr/>
+        </p:nvSpPr>
+        <p:spPr>
+          <a:xfrm>
+            <a:off x="777240" y="6309360"/>
             <a:ext cx="10607040" cy="365760"/>
           </a:xfrm>
           <a:prstGeom prst="rect">
@@ -5107,7 +5987,7 @@
                 </a:solidFill>
                 <a:latin typeface="Calibri"/>
               </a:rPr>
-              <a:t>Week 1 Day 4, half two: the segment summary and its denominators</a:t>
+              <a:t>Week 1 Day 4, half two: the segment summary, and the count it rests on</a:t>
             </a:r>
           </a:p>
         </p:txBody>
@@ -5197,13 +6077,13 @@
           <a:lstStyle/>
           <a:p>
             <a:r>
-              <a:rPr sz="3600" b="1">
+              <a:rPr sz="3200" b="1">
                 <a:solidFill>
                   <a:srgbClr val="1C1C1A"/>
                 </a:solidFill>
                 <a:latin typeface="Calibri"/>
               </a:rPr>
-              <a:t>The table</a:t>
+              <a:t>The fixed count</a:t>
             </a:r>
           </a:p>
         </p:txBody>
@@ -5217,7 +6097,7 @@
         <p:spPr>
           <a:xfrm>
             <a:off x="777240" y="1965960"/>
-            <a:ext cx="10607040" cy="4206240"/>
+            <a:ext cx="10607040" cy="1409700"/>
           </a:xfrm>
           <a:prstGeom prst="rect">
             <a:avLst/>
@@ -5230,82 +6110,169 @@
           </a:bodyPr>
           <a:lstStyle/>
           <a:p>
-            <a:r>
-              <a:rPr sz="1700">
+            <a:pPr>
+              <a:spcAft>
+                <a:spcPts val="400"/>
+              </a:spcAft>
+            </a:pPr>
+            <a:r>
+              <a:rPr sz="1700" b="0">
                 <a:solidFill>
                   <a:srgbClr val="2B4A7D"/>
                 </a:solidFill>
                 <a:latin typeface="Consolas"/>
               </a:rPr>
-              <a:t>segment        orders   median amount   returned   rate</a:t>
-            </a:r>
-          </a:p>
-          <a:p>
-            <a:r>
-              <a:rPr sz="1700">
+              <a:t>Business       9</a:t>
+            </a:r>
+          </a:p>
+          <a:p>
+            <a:pPr>
+              <a:spcAft>
+                <a:spcPts val="400"/>
+              </a:spcAft>
+            </a:pPr>
+            <a:r>
+              <a:rPr sz="1700" b="0">
                 <a:solidFill>
                   <a:srgbClr val="2B4A7D"/>
                 </a:solidFill>
                 <a:latin typeface="Consolas"/>
               </a:rPr>
-              <a:t>Business            9        Rs 2,050          1   11.1%</a:t>
-            </a:r>
-          </a:p>
-          <a:p>
-            <a:r>
-              <a:rPr sz="1700">
+              <a:t>Retail-Core   14</a:t>
+            </a:r>
+          </a:p>
+          <a:p>
+            <a:pPr>
+              <a:spcAft>
+                <a:spcPts val="400"/>
+              </a:spcAft>
+            </a:pPr>
+            <a:r>
+              <a:rPr sz="1700" b="0">
                 <a:solidFill>
                   <a:srgbClr val="2B4A7D"/>
                 </a:solidFill>
                 <a:latin typeface="Consolas"/>
               </a:rPr>
-              <a:t>Retail-Core        14        Rs 1,910          5   35.7%</a:t>
-            </a:r>
-          </a:p>
-          <a:p>
-            <a:r>
-              <a:rPr sz="1700">
+              <a:t>Retail-Plus   11</a:t>
+            </a:r>
+          </a:p>
+          <a:p>
+            <a:pPr>
+              <a:spcAft>
+                <a:spcPts val="400"/>
+              </a:spcAft>
+            </a:pPr>
+            <a:r>
+              <a:rPr sz="1700" b="0">
                 <a:solidFill>
                   <a:srgbClr val="2B4A7D"/>
                 </a:solidFill>
                 <a:latin typeface="Consolas"/>
               </a:rPr>
-              <a:t>Retail-Plus        11        Rs 1,435          4   36.4%</a:t>
-            </a:r>
-          </a:p>
-          <a:p>
-            <a:r>
-              <a:rPr sz="1700">
+              <a:t>Student       10</a:t>
+            </a:r>
+          </a:p>
+          <a:p>
+            <a:pPr>
+              <a:spcAft>
+                <a:spcPts val="400"/>
+              </a:spcAft>
+            </a:pPr>
+            <a:r>
+              <a:rPr sz="1700" b="0">
                 <a:solidFill>
                   <a:srgbClr val="2B4A7D"/>
                 </a:solidFill>
                 <a:latin typeface="Consolas"/>
               </a:rPr>
-              <a:t>Student            10        Rs 1,430          2   20.0%</a:t>
-            </a:r>
-          </a:p>
-          <a:p>
-            <a:r>
-              <a:rPr sz="2100">
+              <a:t>      total   44</a:t>
+            </a:r>
+          </a:p>
+        </p:txBody>
+      </p:sp>
+      <p:sp>
+        <p:nvSpPr>
+          <p:cNvPr id="5" name="TextBox 4"/>
+          <p:cNvSpPr txBox="1"/>
+          <p:nvPr/>
+        </p:nvSpPr>
+        <p:spPr>
+          <a:xfrm>
+            <a:off x="777240" y="3512820"/>
+            <a:ext cx="10607040" cy="1905000"/>
+          </a:xfrm>
+          <a:prstGeom prst="rect">
+            <a:avLst/>
+          </a:prstGeom>
+          <a:noFill/>
+        </p:spPr>
+        <p:txBody>
+          <a:bodyPr wrap="square">
+            <a:spAutoFit/>
+          </a:bodyPr>
+          <a:lstStyle/>
+          <a:p>
+            <a:pPr>
+              <a:spcAft>
+                <a:spcPts val="1000"/>
+              </a:spcAft>
+            </a:pPr>
+            <a:r>
+              <a:rPr sz="2100" b="0">
                 <a:solidFill>
                   <a:srgbClr val="1C1C1A"/>
                 </a:solidFill>
                 <a:latin typeface="Calibri"/>
               </a:rPr>
-              <a:t>Note what is absent from every row: the mean. Half one settled that.</a:t>
-            </a:r>
-          </a:p>
-        </p:txBody>
-      </p:sp>
-      <p:sp>
-        <p:nvSpPr>
-          <p:cNvPr id="5" name="TextBox 4"/>
-          <p:cNvSpPr txBox="1"/>
-          <p:nvPr/>
-        </p:nvSpPr>
-        <p:spPr>
-          <a:xfrm>
-            <a:off x="777240" y="6263640"/>
+              <a:t>The total matches your profiled order count. If it did not, you would have a bug and the last line is how you would know.</a:t>
+            </a:r>
+          </a:p>
+          <a:p>
+            <a:pPr>
+              <a:spcAft>
+                <a:spcPts val="1000"/>
+              </a:spcAft>
+            </a:pPr>
+            <a:r>
+              <a:rPr sz="2100" b="0">
+                <a:solidFill>
+                  <a:srgbClr val="1C1C1A"/>
+                </a:solidFill>
+                <a:latin typeface="Calibri"/>
+              </a:rPr>
+              <a:t>One number here deserves a second look. Student holds ten. The raw file held twelve, and two Student orders were rejected yesterday for failing conversion. </a:t>
+            </a:r>
+            <a:r>
+              <a:rPr sz="2100" b="1">
+                <a:solidFill>
+                  <a:srgbClr val="1C1C1A"/>
+                </a:solidFill>
+                <a:latin typeface="Calibri"/>
+              </a:rPr>
+              <a:t>Your cleaning changed the denominator of your smallest segment by seventeen percent</a:t>
+            </a:r>
+            <a:r>
+              <a:rPr sz="2100" b="0">
+                <a:solidFill>
+                  <a:srgbClr val="1C1C1A"/>
+                </a:solidFill>
+                <a:latin typeface="Calibri"/>
+              </a:rPr>
+              <a:t>, and nothing in today's code would tell you. Yesterday's rejects log is the only place it is written down.</a:t>
+            </a:r>
+          </a:p>
+        </p:txBody>
+      </p:sp>
+      <p:sp>
+        <p:nvSpPr>
+          <p:cNvPr id="6" name="TextBox 5"/>
+          <p:cNvSpPr txBox="1"/>
+          <p:nvPr/>
+        </p:nvSpPr>
+        <p:spPr>
+          <a:xfrm>
+            <a:off x="777240" y="6309360"/>
             <a:ext cx="10607040" cy="365760"/>
           </a:xfrm>
           <a:prstGeom prst="rect">
@@ -5326,7 +6293,7 @@
                 </a:solidFill>
                 <a:latin typeface="Calibri"/>
               </a:rPr>
-              <a:t>Week 1 Day 4, half two: the segment summary and its denominators</a:t>
+              <a:t>Week 1 Day 4, half two: the segment summary, and the count it rests on</a:t>
             </a:r>
           </a:p>
         </p:txBody>
@@ -5416,13 +6383,13 @@
           <a:lstStyle/>
           <a:p>
             <a:r>
-              <a:rPr sz="3600" b="1">
+              <a:rPr sz="3200" b="1">
                 <a:solidFill>
                   <a:srgbClr val="1C1C1A"/>
                 </a:solidFill>
                 <a:latin typeface="Calibri"/>
               </a:rPr>
-              <a:t>Per segment, with denominators</a:t>
+              <a:t>Where we are</a:t>
             </a:r>
           </a:p>
         </p:txBody>
@@ -5436,7 +6403,7 @@
         <p:spPr>
           <a:xfrm>
             <a:off x="777240" y="1965960"/>
-            <a:ext cx="10607040" cy="4206240"/>
+            <a:ext cx="10607040" cy="1657350"/>
           </a:xfrm>
           <a:prstGeom prst="rect">
             <a:avLst/>
@@ -5449,25 +6416,44 @@
           </a:bodyPr>
           <a:lstStyle/>
           <a:p>
-            <a:r>
-              <a:rPr sz="2100">
+            <a:pPr>
+              <a:spcAft>
+                <a:spcPts val="1000"/>
+              </a:spcAft>
+            </a:pPr>
+            <a:r>
+              <a:rPr sz="2100" b="0">
                 <a:solidFill>
                   <a:srgbClr val="1C1C1A"/>
                 </a:solidFill>
                 <a:latin typeface="Calibri"/>
               </a:rPr>
-              <a:t>Half one gave you one number for the whole file. Nobody runs a business unit on one number.</a:t>
-            </a:r>
-          </a:p>
-          <a:p>
-            <a:r>
-              <a:rPr sz="2100">
+              <a:t>[one column] &gt; [what is typical] &gt; [what one order does] &gt; [what the shape says] &gt; </a:t>
+            </a:r>
+            <a:r>
+              <a:rPr sz="2100" b="1">
                 <a:solidFill>
                   <a:srgbClr val="1C1C1A"/>
                 </a:solidFill>
                 <a:latin typeface="Calibri"/>
               </a:rPr>
-              <a:t>The question is always the same one level down: which part of Kalpa Retail is working, and how sure can you be.</a:t>
+              <a:t>[per segment, with denominators]</a:t>
+            </a:r>
+          </a:p>
+          <a:p>
+            <a:pPr>
+              <a:spcAft>
+                <a:spcPts val="1000"/>
+              </a:spcAft>
+            </a:pPr>
+            <a:r>
+              <a:rPr sz="2100" b="0">
+                <a:solidFill>
+                  <a:srgbClr val="1C1C1A"/>
+                </a:solidFill>
+                <a:latin typeface="Calibri"/>
+              </a:rPr>
+              <a:t>You can now pick an honest statistic for a column. Half two splits the file by segment, computes that statistic per group, and attaches the one thing that decides whether the answer means anything.</a:t>
             </a:r>
           </a:p>
         </p:txBody>
@@ -5480,7 +6466,7 @@
         </p:nvSpPr>
         <p:spPr>
           <a:xfrm>
-            <a:off x="777240" y="6263640"/>
+            <a:off x="777240" y="6309360"/>
             <a:ext cx="10607040" cy="365760"/>
           </a:xfrm>
           <a:prstGeom prst="rect">
@@ -5501,7 +6487,7 @@
                 </a:solidFill>
                 <a:latin typeface="Calibri"/>
               </a:rPr>
-              <a:t>Week 1 Day 4, half two: the segment summary and its denominators</a:t>
+              <a:t>Week 1 Day 4, half two: the segment summary, and the count it rests on</a:t>
             </a:r>
           </a:p>
         </p:txBody>
@@ -5539,7 +6525,7 @@
             <a:avLst/>
           </a:prstGeom>
           <a:solidFill>
-            <a:srgbClr val="F7F7F5"/>
+            <a:srgbClr val="2B4A7D"/>
           </a:solidFill>
           <a:ln>
             <a:noFill/>
@@ -5590,14 +6576,15 @@
           </a:bodyPr>
           <a:lstStyle/>
           <a:p>
+            <a:pPr algn="ctr"/>
             <a:r>
               <a:rPr sz="3600" b="1">
                 <a:solidFill>
-                  <a:srgbClr val="1C1C1A"/>
-                </a:solidFill>
-                <a:latin typeface="Calibri"/>
-              </a:rPr>
-              <a:t>Sort by rate, the way anyone would</a:t>
+                  <a:srgbClr val="FFFFFF"/>
+                </a:solidFill>
+                <a:latin typeface="Calibri"/>
+              </a:rPr>
+              <a:t>SECTION 3: THE SEGMENT SUMMARY</a:t>
             </a:r>
           </a:p>
         </p:txBody>
@@ -5611,7 +6598,7 @@
         <p:spPr>
           <a:xfrm>
             <a:off x="777240" y="1965960"/>
-            <a:ext cx="10607040" cy="4206240"/>
+            <a:ext cx="10607040" cy="790575"/>
           </a:xfrm>
           <a:prstGeom prst="rect">
             <a:avLst/>
@@ -5624,69 +6611,28 @@
           </a:bodyPr>
           <a:lstStyle/>
           <a:p>
-            <a:r>
-              <a:rPr sz="1700">
-                <a:solidFill>
-                  <a:srgbClr val="2B4A7D"/>
-                </a:solidFill>
-                <a:latin typeface="Consolas"/>
-              </a:rPr>
-              <a:t>Business      11.1%</a:t>
-            </a:r>
-          </a:p>
-          <a:p>
-            <a:r>
-              <a:rPr sz="1700">
-                <a:solidFill>
-                  <a:srgbClr val="2B4A7D"/>
-                </a:solidFill>
-                <a:latin typeface="Consolas"/>
-              </a:rPr>
-              <a:t>Student       20.0%</a:t>
-            </a:r>
-          </a:p>
-          <a:p>
-            <a:r>
-              <a:rPr sz="1700">
-                <a:solidFill>
-                  <a:srgbClr val="2B4A7D"/>
-                </a:solidFill>
-                <a:latin typeface="Consolas"/>
-              </a:rPr>
-              <a:t>Retail-Core   35.7%</a:t>
-            </a:r>
-          </a:p>
-          <a:p>
-            <a:r>
-              <a:rPr sz="1700">
-                <a:solidFill>
-                  <a:srgbClr val="2B4A7D"/>
-                </a:solidFill>
-                <a:latin typeface="Consolas"/>
-              </a:rPr>
-              <a:t>Retail-Plus   36.4%</a:t>
-            </a:r>
-          </a:p>
-          <a:p>
-            <a:r>
-              <a:rPr sz="2100">
-                <a:solidFill>
-                  <a:srgbClr val="1C1C1A"/>
-                </a:solidFill>
-                <a:latin typeface="Calibri"/>
-              </a:rPr>
-              <a:t>A clean ranking. Business returns at less than a third of the worst segment.</a:t>
-            </a:r>
-          </a:p>
-          <a:p>
-            <a:r>
-              <a:rPr sz="2100">
-                <a:solidFill>
-                  <a:srgbClr val="1C1C1A"/>
-                </a:solidFill>
-                <a:latin typeface="Calibri"/>
-              </a:rPr>
-              <a:t>Somebody in a meeting is about to move budget towards Business.</a:t>
+            <a:pPr algn="ctr">
+              <a:spcAft>
+                <a:spcPts val="1000"/>
+              </a:spcAft>
+            </a:pPr>
+            <a:r>
+              <a:rPr sz="2100" b="0">
+                <a:solidFill>
+                  <a:srgbClr val="FFFFFF"/>
+                </a:solidFill>
+                <a:latin typeface="Calibri"/>
+              </a:rPr>
+              <a:t>[one column] &gt; [what is typical] &gt; [what one order does] &gt; [what the shape says] &gt; </a:t>
+            </a:r>
+            <a:r>
+              <a:rPr sz="2100" b="1">
+                <a:solidFill>
+                  <a:srgbClr val="FFFFFF"/>
+                </a:solidFill>
+                <a:latin typeface="Calibri"/>
+              </a:rPr>
+              <a:t>[per segment, with denominators]</a:t>
             </a:r>
           </a:p>
         </p:txBody>
@@ -5699,7 +6645,7 @@
         </p:nvSpPr>
         <p:spPr>
           <a:xfrm>
-            <a:off x="777240" y="6263640"/>
+            <a:off x="777240" y="6309360"/>
             <a:ext cx="10607040" cy="365760"/>
           </a:xfrm>
           <a:prstGeom prst="rect">
@@ -5720,7 +6666,7 @@
                 </a:solidFill>
                 <a:latin typeface="Calibri"/>
               </a:rPr>
-              <a:t>Week 1 Day 4, half two: the segment summary and its denominators</a:t>
+              <a:t>Week 1 Day 4, half two: the segment summary, and the count it rests on</a:t>
             </a:r>
           </a:p>
         </p:txBody>
@@ -5789,7 +6735,60 @@
       </p:sp>
       <p:sp>
         <p:nvSpPr>
-          <p:cNvPr id="3" name="TextBox 2"/>
+          <p:cNvPr id="3" name="Rounded Rectangle 2"/>
+          <p:cNvSpPr/>
+          <p:nvPr/>
+        </p:nvSpPr>
+        <p:spPr>
+          <a:xfrm>
+            <a:off x="10195560" y="384048"/>
+            <a:ext cx="1188720" cy="310896"/>
+          </a:xfrm>
+          <a:prstGeom prst="roundRect">
+            <a:avLst/>
+          </a:prstGeom>
+          <a:solidFill>
+            <a:srgbClr val="2B4A7D"/>
+          </a:solidFill>
+          <a:ln>
+            <a:noFill/>
+          </a:ln>
+          <a:effectLst/>
+        </p:spPr>
+        <p:style>
+          <a:lnRef idx="1">
+            <a:schemeClr val="accent1"/>
+          </a:lnRef>
+          <a:fillRef idx="3">
+            <a:schemeClr val="accent1"/>
+          </a:fillRef>
+          <a:effectRef idx="2">
+            <a:schemeClr val="accent1"/>
+          </a:effectRef>
+          <a:fontRef idx="minor">
+            <a:schemeClr val="lt1"/>
+          </a:fontRef>
+        </p:style>
+        <p:txBody>
+          <a:bodyPr rtlCol="0" anchor="ctr"/>
+          <a:lstStyle/>
+          <a:p>
+            <a:pPr algn="ctr"/>
+            <a:r>
+              <a:rPr sz="1100" b="1">
+                <a:solidFill>
+                  <a:srgbClr val="FFFFFF"/>
+                </a:solidFill>
+                <a:latin typeface="Calibri"/>
+              </a:rPr>
+              <a:t>DEPTH</a:t>
+            </a:r>
+          </a:p>
+        </p:txBody>
+      </p:sp>
+      <p:sp>
+        <p:nvSpPr>
+          <p:cNvPr id="4" name="TextBox 3"/>
           <p:cNvSpPr txBox="1"/>
           <p:nvPr/>
         </p:nvSpPr>
@@ -5810,27 +6809,51 @@
           <a:lstStyle/>
           <a:p>
             <a:r>
-              <a:rPr sz="3600" b="1">
+              <a:rPr sz="3200" b="1">
                 <a:solidFill>
                   <a:srgbClr val="1C1C1A"/>
                 </a:solidFill>
                 <a:latin typeface="Calibri"/>
               </a:rPr>
-              <a:t>Put the count back</a:t>
-            </a:r>
-          </a:p>
-        </p:txBody>
-      </p:sp>
-      <p:sp>
-        <p:nvSpPr>
-          <p:cNvPr id="4" name="TextBox 3"/>
-          <p:cNvSpPr txBox="1"/>
-          <p:nvPr/>
-        </p:nvSpPr>
-        <p:spPr>
-          <a:xfrm>
-            <a:off x="777240" y="1965960"/>
-            <a:ext cx="10607040" cy="4206240"/>
+              <a:t>Why the median cannot be accumulated and the count can</a:t>
+            </a:r>
+          </a:p>
+        </p:txBody>
+      </p:sp>
+      <p:pic>
+        <p:nvPicPr>
+          <p:cNvPr id="5" name="Picture 4" descr="35ad2645dce4da21.png"/>
+          <p:cNvPicPr>
+            <a:picLocks noChangeAspect="1"/>
+          </p:cNvPicPr>
+          <p:nvPr/>
+        </p:nvPicPr>
+        <p:blipFill>
+          <a:blip r:embed="rId2"/>
+          <a:stretch>
+            <a:fillRect/>
+          </a:stretch>
+        </p:blipFill>
+        <p:spPr>
+          <a:xfrm>
+            <a:off x="2203623" y="1965960"/>
+            <a:ext cx="7754273" cy="4023360"/>
+          </a:xfrm>
+          <a:prstGeom prst="rect">
+            <a:avLst/>
+          </a:prstGeom>
+        </p:spPr>
+      </p:pic>
+      <p:sp>
+        <p:nvSpPr>
+          <p:cNvPr id="6" name="TextBox 5"/>
+          <p:cNvSpPr txBox="1"/>
+          <p:nvPr/>
+        </p:nvSpPr>
+        <p:spPr>
+          <a:xfrm>
+            <a:off x="777240" y="6126480"/>
+            <a:ext cx="10607040" cy="1285875"/>
           </a:xfrm>
           <a:prstGeom prst="rect">
             <a:avLst/>
@@ -5843,82 +6866,32 @@
           </a:bodyPr>
           <a:lstStyle/>
           <a:p>
-            <a:r>
-              <a:rPr sz="1700">
-                <a:solidFill>
-                  <a:srgbClr val="2B4A7D"/>
-                </a:solidFill>
-                <a:latin typeface="Consolas"/>
-              </a:rPr>
-              <a:t>Business      11.1%   on  9 orders</a:t>
-            </a:r>
-          </a:p>
-          <a:p>
-            <a:r>
-              <a:rPr sz="1700">
-                <a:solidFill>
-                  <a:srgbClr val="2B4A7D"/>
-                </a:solidFill>
-                <a:latin typeface="Consolas"/>
-              </a:rPr>
-              <a:t>Student       20.0%   on 10 orders</a:t>
-            </a:r>
-          </a:p>
-          <a:p>
-            <a:r>
-              <a:rPr sz="1700">
-                <a:solidFill>
-                  <a:srgbClr val="2B4A7D"/>
-                </a:solidFill>
-                <a:latin typeface="Consolas"/>
-              </a:rPr>
-              <a:t>Retail-Core   35.7%   on 14 orders</a:t>
-            </a:r>
-          </a:p>
-          <a:p>
-            <a:r>
-              <a:rPr sz="1700">
-                <a:solidFill>
-                  <a:srgbClr val="2B4A7D"/>
-                </a:solidFill>
-                <a:latin typeface="Consolas"/>
-              </a:rPr>
-              <a:t>Retail-Plus   36.4%   on 11 orders</a:t>
-            </a:r>
-          </a:p>
-          <a:p>
-            <a:r>
-              <a:rPr sz="2100">
+            <a:pPr>
+              <a:spcAft>
+                <a:spcPts val="1000"/>
+              </a:spcAft>
+            </a:pPr>
+            <a:r>
+              <a:rPr sz="2100" b="0">
                 <a:solidFill>
                   <a:srgbClr val="1C1C1A"/>
                 </a:solidFill>
                 <a:latin typeface="Calibri"/>
               </a:rPr>
-              <a:t>The top two performers are the two smallest segments in the file.</a:t>
-            </a:r>
-          </a:p>
-          <a:p>
-            <a:r>
-              <a:rPr sz="2100">
-                <a:solidFill>
-                  <a:srgbClr val="1C1C1A"/>
-                </a:solidFill>
-                <a:latin typeface="Calibri"/>
-              </a:rPr>
-              <a:t>Business wins on nine orders.</a:t>
-            </a:r>
-          </a:p>
-        </p:txBody>
-      </p:sp>
-      <p:sp>
-        <p:nvSpPr>
-          <p:cNvPr id="5" name="TextBox 4"/>
-          <p:cNvSpPr txBox="1"/>
-          <p:nvPr/>
-        </p:nvSpPr>
-        <p:spPr>
-          <a:xfrm>
-            <a:off x="777240" y="6263640"/>
+              <a:t>A count is a running total, so it is finished the moment the pass is. A median is a position in a sorted list, so it cannot exist until every value has arrived. That distinction is why the code collects amounts into a list rather than trying to be clever, and it is the same reason a median is expensive on data too large to hold.</a:t>
+            </a:r>
+          </a:p>
+        </p:txBody>
+      </p:sp>
+      <p:sp>
+        <p:nvSpPr>
+          <p:cNvPr id="7" name="TextBox 6"/>
+          <p:cNvSpPr txBox="1"/>
+          <p:nvPr/>
+        </p:nvSpPr>
+        <p:spPr>
+          <a:xfrm>
+            <a:off x="777240" y="6309360"/>
             <a:ext cx="10607040" cy="365760"/>
           </a:xfrm>
           <a:prstGeom prst="rect">
@@ -5939,7 +6912,7 @@
                 </a:solidFill>
                 <a:latin typeface="Calibri"/>
               </a:rPr>
-              <a:t>Week 1 Day 4, half two: the segment summary and its denominators</a:t>
+              <a:t>Week 1 Day 4, half two: the segment summary, and the count it rests on</a:t>
             </a:r>
           </a:p>
         </p:txBody>
@@ -6029,13 +7002,13 @@
           <a:lstStyle/>
           <a:p>
             <a:r>
-              <a:rPr sz="3600" b="1">
+              <a:rPr sz="3200" b="1">
                 <a:solidFill>
                   <a:srgbClr val="1C1C1A"/>
                 </a:solidFill>
                 <a:latin typeface="Calibri"/>
               </a:rPr>
-              <a:t>One order</a:t>
+              <a:t>Three accumulators, one pass</a:t>
             </a:r>
           </a:p>
         </p:txBody>
@@ -6049,7 +7022,7 @@
         <p:spPr>
           <a:xfrm>
             <a:off x="777240" y="1965960"/>
-            <a:ext cx="10607040" cy="4206240"/>
+            <a:ext cx="10607040" cy="790575"/>
           </a:xfrm>
           <a:prstGeom prst="rect">
             <a:avLst/>
@@ -6062,71 +7035,174 @@
           </a:bodyPr>
           <a:lstStyle/>
           <a:p>
-            <a:r>
-              <a:rPr sz="1700">
+            <a:pPr>
+              <a:spcAft>
+                <a:spcPts val="1000"/>
+              </a:spcAft>
+            </a:pPr>
+            <a:r>
+              <a:rPr sz="2100" b="0">
+                <a:solidFill>
+                  <a:srgbClr val="1C1C1A"/>
+                </a:solidFill>
+                <a:latin typeface="Calibri"/>
+              </a:rPr>
+              <a:t>Per segment you need three things: how many orders, what a typical amount looks like, and what share came back.</a:t>
+            </a:r>
+          </a:p>
+        </p:txBody>
+      </p:sp>
+      <p:sp>
+        <p:nvSpPr>
+          <p:cNvPr id="5" name="TextBox 4"/>
+          <p:cNvSpPr txBox="1"/>
+          <p:nvPr/>
+        </p:nvSpPr>
+        <p:spPr>
+          <a:xfrm>
+            <a:off x="777240" y="2893695"/>
+            <a:ext cx="10607040" cy="1409700"/>
+          </a:xfrm>
+          <a:prstGeom prst="rect">
+            <a:avLst/>
+          </a:prstGeom>
+          <a:noFill/>
+        </p:spPr>
+        <p:txBody>
+          <a:bodyPr wrap="square">
+            <a:spAutoFit/>
+          </a:bodyPr>
+          <a:lstStyle/>
+          <a:p>
+            <a:pPr>
+              <a:spcAft>
+                <a:spcPts val="400"/>
+              </a:spcAft>
+            </a:pPr>
+            <a:r>
+              <a:rPr sz="1700" b="0">
                 <a:solidFill>
                   <a:srgbClr val="2B4A7D"/>
                 </a:solidFill>
                 <a:latin typeface="Consolas"/>
               </a:rPr>
-              <a:t>if 0 more Business orders had been returned:  11.1%   still best</a:t>
-            </a:r>
-          </a:p>
-          <a:p>
-            <a:r>
-              <a:rPr sz="1700">
+              <a:t>per_segment[key] = {</a:t>
+            </a:r>
+          </a:p>
+          <a:p>
+            <a:pPr>
+              <a:spcAft>
+                <a:spcPts val="400"/>
+              </a:spcAft>
+            </a:pPr>
+            <a:r>
+              <a:rPr sz="1700" b="0">
                 <a:solidFill>
                   <a:srgbClr val="2B4A7D"/>
                 </a:solidFill>
                 <a:latin typeface="Consolas"/>
               </a:rPr>
-              <a:t>if 1 more Business order  had been returned:  22.2%   no longer best</a:t>
-            </a:r>
-          </a:p>
-          <a:p>
-            <a:r>
-              <a:rPr sz="2100">
+              <a:t>    "count":    how many orders landed here,</a:t>
+            </a:r>
+          </a:p>
+          <a:p>
+            <a:pPr>
+              <a:spcAft>
+                <a:spcPts val="400"/>
+              </a:spcAft>
+            </a:pPr>
+            <a:r>
+              <a:rPr sz="1700" b="0">
+                <a:solidFill>
+                  <a:srgbClr val="2B4A7D"/>
+                </a:solidFill>
+                <a:latin typeface="Consolas"/>
+              </a:rPr>
+              <a:t>    "amounts":  every amount, collected so the median can be taken at the end,</a:t>
+            </a:r>
+          </a:p>
+          <a:p>
+            <a:pPr>
+              <a:spcAft>
+                <a:spcPts val="400"/>
+              </a:spcAft>
+            </a:pPr>
+            <a:r>
+              <a:rPr sz="1700" b="0">
+                <a:solidFill>
+                  <a:srgbClr val="2B4A7D"/>
+                </a:solidFill>
+                <a:latin typeface="Consolas"/>
+              </a:rPr>
+              <a:t>    "returned": how many had status "returned",</a:t>
+            </a:r>
+          </a:p>
+          <a:p>
+            <a:pPr>
+              <a:spcAft>
+                <a:spcPts val="400"/>
+              </a:spcAft>
+            </a:pPr>
+            <a:r>
+              <a:rPr sz="1700" b="0">
+                <a:solidFill>
+                  <a:srgbClr val="2B4A7D"/>
+                </a:solidFill>
+                <a:latin typeface="Consolas"/>
+              </a:rPr>
+              <a:t>}</a:t>
+            </a:r>
+          </a:p>
+        </p:txBody>
+      </p:sp>
+      <p:sp>
+        <p:nvSpPr>
+          <p:cNvPr id="6" name="TextBox 5"/>
+          <p:cNvSpPr txBox="1"/>
+          <p:nvPr/>
+        </p:nvSpPr>
+        <p:spPr>
+          <a:xfrm>
+            <a:off x="777240" y="4440555"/>
+            <a:ext cx="10607040" cy="790575"/>
+          </a:xfrm>
+          <a:prstGeom prst="rect">
+            <a:avLst/>
+          </a:prstGeom>
+          <a:noFill/>
+        </p:spPr>
+        <p:txBody>
+          <a:bodyPr wrap="square">
+            <a:spAutoFit/>
+          </a:bodyPr>
+          <a:lstStyle/>
+          <a:p>
+            <a:pPr>
+              <a:spcAft>
+                <a:spcPts val="1000"/>
+              </a:spcAft>
+            </a:pPr>
+            <a:r>
+              <a:rPr sz="2100" b="0">
                 <a:solidFill>
                   <a:srgbClr val="1C1C1A"/>
                 </a:solidFill>
                 <a:latin typeface="Calibri"/>
               </a:rPr>
-              <a:t>One order out of forty-four, in a segment of nine, and the best segment in the file is no longer the best segment in the file.</a:t>
-            </a:r>
-          </a:p>
-          <a:p>
-            <a:r>
-              <a:rPr sz="2100">
-                <a:solidFill>
-                  <a:srgbClr val="1C1C1A"/>
-                </a:solidFill>
-                <a:latin typeface="Calibri"/>
-              </a:rPr>
-              <a:t>Small groups produce extreme rates in both directions, in any dataset, with nothing causing it. Rank groups by a rate and the smallest drift to both ends of the list, so the ranking reads group size as much as performance.</a:t>
-            </a:r>
-          </a:p>
-          <a:p>
-            <a:r>
-              <a:rPr sz="2100">
-                <a:solidFill>
-                  <a:srgbClr val="1C1C1A"/>
-                </a:solidFill>
-                <a:latin typeface="Calibri"/>
-              </a:rPr>
-              <a:t>The fix is not a cleverer statistic. It is the column you already have.</a:t>
-            </a:r>
-          </a:p>
-        </p:txBody>
-      </p:sp>
-      <p:sp>
-        <p:nvSpPr>
-          <p:cNvPr id="5" name="TextBox 4"/>
-          <p:cNvSpPr txBox="1"/>
-          <p:nvPr/>
-        </p:nvSpPr>
-        <p:spPr>
-          <a:xfrm>
-            <a:off x="777240" y="6263640"/>
+              <a:t>The median cannot be accumulated one order at a time. It needs the whole list sorted, so the list is collected during the pass and the median is taken after it.</a:t>
+            </a:r>
+          </a:p>
+        </p:txBody>
+      </p:sp>
+      <p:sp>
+        <p:nvSpPr>
+          <p:cNvPr id="7" name="TextBox 6"/>
+          <p:cNvSpPr txBox="1"/>
+          <p:nvPr/>
+        </p:nvSpPr>
+        <p:spPr>
+          <a:xfrm>
+            <a:off x="777240" y="6309360"/>
             <a:ext cx="10607040" cy="365760"/>
           </a:xfrm>
           <a:prstGeom prst="rect">
@@ -6147,7 +7223,7 @@
                 </a:solidFill>
                 <a:latin typeface="Calibri"/>
               </a:rPr>
-              <a:t>Week 1 Day 4, half two: the segment summary and its denominators</a:t>
+              <a:t>Week 1 Day 4, half two: the segment summary, and the count it rests on</a:t>
             </a:r>
           </a:p>
         </p:txBody>
@@ -6185,7 +7261,7 @@
             <a:avLst/>
           </a:prstGeom>
           <a:solidFill>
-            <a:srgbClr val="2B4A7D"/>
+            <a:srgbClr val="F7F7F5"/>
           </a:solidFill>
           <a:ln>
             <a:noFill/>
@@ -6237,13 +7313,13 @@
           <a:lstStyle/>
           <a:p>
             <a:r>
-              <a:rPr sz="3600" b="1">
-                <a:solidFill>
-                  <a:srgbClr val="FFFFFF"/>
-                </a:solidFill>
-                <a:latin typeface="Calibri"/>
-              </a:rPr>
-              <a:t>SECTION 4: THE HONEST SENTENCE</a:t>
+              <a:rPr sz="3200" b="1">
+                <a:solidFill>
+                  <a:srgbClr val="1C1C1A"/>
+                </a:solidFill>
+                <a:latin typeface="Calibri"/>
+              </a:rPr>
+              <a:t>The table</a:t>
             </a:r>
           </a:p>
         </p:txBody>
@@ -6257,7 +7333,7 @@
         <p:spPr>
           <a:xfrm>
             <a:off x="777240" y="1965960"/>
-            <a:ext cx="10607040" cy="4206240"/>
+            <a:ext cx="10607040" cy="1409700"/>
           </a:xfrm>
           <a:prstGeom prst="rect">
             <a:avLst/>
@@ -6270,14 +7346,83 @@
           </a:bodyPr>
           <a:lstStyle/>
           <a:p>
-            <a:r>
-              <a:rPr sz="2100">
-                <a:solidFill>
-                  <a:srgbClr val="FFFFFF"/>
-                </a:solidFill>
-                <a:latin typeface="Calibri"/>
-              </a:rPr>
-              <a:t>[one column] &gt; [what is typical] &gt; [what one order does] &gt; [what the shape says] &gt; [per segment, with denominators]</a:t>
+            <a:pPr>
+              <a:spcAft>
+                <a:spcPts val="400"/>
+              </a:spcAft>
+            </a:pPr>
+            <a:r>
+              <a:rPr sz="1700" b="0">
+                <a:solidFill>
+                  <a:srgbClr val="2B4A7D"/>
+                </a:solidFill>
+                <a:latin typeface="Consolas"/>
+              </a:rPr>
+              <a:t>segment        orders   median amount   returned   rate</a:t>
+            </a:r>
+          </a:p>
+          <a:p>
+            <a:pPr>
+              <a:spcAft>
+                <a:spcPts val="400"/>
+              </a:spcAft>
+            </a:pPr>
+            <a:r>
+              <a:rPr sz="1700" b="0">
+                <a:solidFill>
+                  <a:srgbClr val="2B4A7D"/>
+                </a:solidFill>
+                <a:latin typeface="Consolas"/>
+              </a:rPr>
+              <a:t>Business            9        Rs 2,050          1   11.1%</a:t>
+            </a:r>
+          </a:p>
+          <a:p>
+            <a:pPr>
+              <a:spcAft>
+                <a:spcPts val="400"/>
+              </a:spcAft>
+            </a:pPr>
+            <a:r>
+              <a:rPr sz="1700" b="0">
+                <a:solidFill>
+                  <a:srgbClr val="2B4A7D"/>
+                </a:solidFill>
+                <a:latin typeface="Consolas"/>
+              </a:rPr>
+              <a:t>Retail-Core        14        Rs 1,910          5   35.7%</a:t>
+            </a:r>
+          </a:p>
+          <a:p>
+            <a:pPr>
+              <a:spcAft>
+                <a:spcPts val="400"/>
+              </a:spcAft>
+            </a:pPr>
+            <a:r>
+              <a:rPr sz="1700" b="0">
+                <a:solidFill>
+                  <a:srgbClr val="2B4A7D"/>
+                </a:solidFill>
+                <a:latin typeface="Consolas"/>
+              </a:rPr>
+              <a:t>Retail-Plus        11        Rs 1,435          4   36.4%</a:t>
+            </a:r>
+          </a:p>
+          <a:p>
+            <a:pPr>
+              <a:spcAft>
+                <a:spcPts val="400"/>
+              </a:spcAft>
+            </a:pPr>
+            <a:r>
+              <a:rPr sz="1700" b="0">
+                <a:solidFill>
+                  <a:srgbClr val="2B4A7D"/>
+                </a:solidFill>
+                <a:latin typeface="Consolas"/>
+              </a:rPr>
+              <a:t>Student            10        Rs 1,430          2   20.0%</a:t>
             </a:r>
           </a:p>
         </p:txBody>
@@ -6290,7 +7435,46 @@
         </p:nvSpPr>
         <p:spPr>
           <a:xfrm>
-            <a:off x="777240" y="6263640"/>
+            <a:off x="777240" y="3512820"/>
+            <a:ext cx="10607040" cy="542925"/>
+          </a:xfrm>
+          <a:prstGeom prst="rect">
+            <a:avLst/>
+          </a:prstGeom>
+          <a:noFill/>
+        </p:spPr>
+        <p:txBody>
+          <a:bodyPr wrap="square">
+            <a:spAutoFit/>
+          </a:bodyPr>
+          <a:lstStyle/>
+          <a:p>
+            <a:pPr>
+              <a:spcAft>
+                <a:spcPts val="1000"/>
+              </a:spcAft>
+            </a:pPr>
+            <a:r>
+              <a:rPr sz="2100" b="0">
+                <a:solidFill>
+                  <a:srgbClr val="1C1C1A"/>
+                </a:solidFill>
+                <a:latin typeface="Calibri"/>
+              </a:rPr>
+              <a:t>Note what is absent from every row: the mean. Half one settled that.</a:t>
+            </a:r>
+          </a:p>
+        </p:txBody>
+      </p:sp>
+      <p:sp>
+        <p:nvSpPr>
+          <p:cNvPr id="6" name="TextBox 5"/>
+          <p:cNvSpPr txBox="1"/>
+          <p:nvPr/>
+        </p:nvSpPr>
+        <p:spPr>
+          <a:xfrm>
+            <a:off x="777240" y="6309360"/>
             <a:ext cx="10607040" cy="365760"/>
           </a:xfrm>
           <a:prstGeom prst="rect">
@@ -6311,7 +7495,7 @@
                 </a:solidFill>
                 <a:latin typeface="Calibri"/>
               </a:rPr>
-              <a:t>Week 1 Day 4, half two: the segment summary and its denominators</a:t>
+              <a:t>Week 1 Day 4, half two: the segment summary, and the count it rests on</a:t>
             </a:r>
           </a:p>
         </p:txBody>
@@ -6401,13 +7585,13 @@
           <a:lstStyle/>
           <a:p>
             <a:r>
-              <a:rPr sz="3600" b="1">
+              <a:rPr sz="3200" b="1">
                 <a:solidFill>
                   <a:srgbClr val="1C1C1A"/>
                 </a:solidFill>
                 <a:latin typeface="Calibri"/>
               </a:rPr>
-              <a:t>The shape of the sentence</a:t>
+              <a:t>Sort by rate, the way anyone would</a:t>
             </a:r>
           </a:p>
         </p:txBody>
@@ -6421,7 +7605,7 @@
         <p:spPr>
           <a:xfrm>
             <a:off x="777240" y="1965960"/>
-            <a:ext cx="10607040" cy="4206240"/>
+            <a:ext cx="10607040" cy="1162050"/>
           </a:xfrm>
           <a:prstGeom prst="rect">
             <a:avLst/>
@@ -6434,49 +7618,135 @@
           </a:bodyPr>
           <a:lstStyle/>
           <a:p>
-            <a:r>
-              <a:rPr sz="2100">
+            <a:pPr>
+              <a:spcAft>
+                <a:spcPts val="400"/>
+              </a:spcAft>
+            </a:pPr>
+            <a:r>
+              <a:rPr sz="1700" b="0">
+                <a:solidFill>
+                  <a:srgbClr val="2B4A7D"/>
+                </a:solidFill>
+                <a:latin typeface="Consolas"/>
+              </a:rPr>
+              <a:t>Business      11.1%</a:t>
+            </a:r>
+          </a:p>
+          <a:p>
+            <a:pPr>
+              <a:spcAft>
+                <a:spcPts val="400"/>
+              </a:spcAft>
+            </a:pPr>
+            <a:r>
+              <a:rPr sz="1700" b="0">
+                <a:solidFill>
+                  <a:srgbClr val="2B4A7D"/>
+                </a:solidFill>
+                <a:latin typeface="Consolas"/>
+              </a:rPr>
+              <a:t>Student       20.0%</a:t>
+            </a:r>
+          </a:p>
+          <a:p>
+            <a:pPr>
+              <a:spcAft>
+                <a:spcPts val="400"/>
+              </a:spcAft>
+            </a:pPr>
+            <a:r>
+              <a:rPr sz="1700" b="0">
+                <a:solidFill>
+                  <a:srgbClr val="2B4A7D"/>
+                </a:solidFill>
+                <a:latin typeface="Consolas"/>
+              </a:rPr>
+              <a:t>Retail-Core   35.7%</a:t>
+            </a:r>
+          </a:p>
+          <a:p>
+            <a:pPr>
+              <a:spcAft>
+                <a:spcPts val="400"/>
+              </a:spcAft>
+            </a:pPr>
+            <a:r>
+              <a:rPr sz="1700" b="0">
+                <a:solidFill>
+                  <a:srgbClr val="2B4A7D"/>
+                </a:solidFill>
+                <a:latin typeface="Consolas"/>
+              </a:rPr>
+              <a:t>Retail-Plus   36.4%</a:t>
+            </a:r>
+          </a:p>
+        </p:txBody>
+      </p:sp>
+      <p:sp>
+        <p:nvSpPr>
+          <p:cNvPr id="5" name="TextBox 4"/>
+          <p:cNvSpPr txBox="1"/>
+          <p:nvPr/>
+        </p:nvSpPr>
+        <p:spPr>
+          <a:xfrm>
+            <a:off x="777240" y="3265169"/>
+            <a:ext cx="10607040" cy="914400"/>
+          </a:xfrm>
+          <a:prstGeom prst="rect">
+            <a:avLst/>
+          </a:prstGeom>
+          <a:noFill/>
+        </p:spPr>
+        <p:txBody>
+          <a:bodyPr wrap="square">
+            <a:spAutoFit/>
+          </a:bodyPr>
+          <a:lstStyle/>
+          <a:p>
+            <a:pPr>
+              <a:spcAft>
+                <a:spcPts val="1000"/>
+              </a:spcAft>
+            </a:pPr>
+            <a:r>
+              <a:rPr sz="2100" b="0">
                 <a:solidFill>
                   <a:srgbClr val="1C1C1A"/>
                 </a:solidFill>
                 <a:latin typeface="Calibri"/>
               </a:rPr>
-              <a:t>Three parts, in this order, every time:</a:t>
-            </a:r>
-          </a:p>
-          <a:p>
-            <a:r>
-              <a:rPr sz="1700">
-                <a:solidFill>
-                  <a:srgbClr val="2B4A7D"/>
-                </a:solidFill>
-                <a:latin typeface="Consolas"/>
-              </a:rPr>
-              <a:t>[the number]   [the denominator]   [what it does not yet support]</a:t>
-            </a:r>
-          </a:p>
-          <a:p>
-            <a:r>
-              <a:rPr sz="2100">
+              <a:t>A clean ranking. Business returns at less than a third of the worst segment.</a:t>
+            </a:r>
+          </a:p>
+          <a:p>
+            <a:pPr>
+              <a:spcAft>
+                <a:spcPts val="1000"/>
+              </a:spcAft>
+            </a:pPr>
+            <a:r>
+              <a:rPr sz="2100" b="0">
                 <a:solidFill>
                   <a:srgbClr val="1C1C1A"/>
                 </a:solidFill>
                 <a:latin typeface="Calibri"/>
               </a:rPr>
-              <a:t>Leaving out the third part is how a caveat gets lost between your notebook and a slide somebody else builds.</a:t>
-            </a:r>
-          </a:p>
-        </p:txBody>
-      </p:sp>
-      <p:sp>
-        <p:nvSpPr>
-          <p:cNvPr id="5" name="TextBox 4"/>
-          <p:cNvSpPr txBox="1"/>
-          <p:nvPr/>
-        </p:nvSpPr>
-        <p:spPr>
-          <a:xfrm>
-            <a:off x="777240" y="6263640"/>
+              <a:t>Somebody in a meeting is about to move budget towards Business.</a:t>
+            </a:r>
+          </a:p>
+        </p:txBody>
+      </p:sp>
+      <p:sp>
+        <p:nvSpPr>
+          <p:cNvPr id="6" name="TextBox 5"/>
+          <p:cNvSpPr txBox="1"/>
+          <p:nvPr/>
+        </p:nvSpPr>
+        <p:spPr>
+          <a:xfrm>
+            <a:off x="777240" y="6309360"/>
             <a:ext cx="10607040" cy="365760"/>
           </a:xfrm>
           <a:prstGeom prst="rect">
@@ -6497,7 +7767,7 @@
                 </a:solidFill>
                 <a:latin typeface="Calibri"/>
               </a:rPr>
-              <a:t>Week 1 Day 4, half two: the segment summary and its denominators</a:t>
+              <a:t>Week 1 Day 4, half two: the segment summary, and the count it rests on</a:t>
             </a:r>
           </a:p>
         </p:txBody>
@@ -6587,13 +7857,13 @@
           <a:lstStyle/>
           <a:p>
             <a:r>
-              <a:rPr sz="3600" b="1">
+              <a:rPr sz="3200" b="1">
                 <a:solidFill>
                   <a:srgbClr val="1C1C1A"/>
                 </a:solidFill>
                 <a:latin typeface="Calibri"/>
               </a:rPr>
-              <a:t>Four sentences, one per segment</a:t>
+              <a:t>Put the count back</a:t>
             </a:r>
           </a:p>
         </p:txBody>
@@ -6607,7 +7877,7 @@
         <p:spPr>
           <a:xfrm>
             <a:off x="777240" y="1965960"/>
-            <a:ext cx="10607040" cy="4206240"/>
+            <a:ext cx="10607040" cy="1162050"/>
           </a:xfrm>
           <a:prstGeom prst="rect">
             <a:avLst/>
@@ -6620,170 +7890,135 @@
           </a:bodyPr>
           <a:lstStyle/>
           <a:p>
-            <a:r>
-              <a:rPr sz="1700">
+            <a:pPr>
+              <a:spcAft>
+                <a:spcPts val="400"/>
+              </a:spcAft>
+            </a:pPr>
+            <a:r>
+              <a:rPr sz="1700" b="0">
                 <a:solidFill>
                   <a:srgbClr val="2B4A7D"/>
                 </a:solidFill>
                 <a:latin typeface="Consolas"/>
               </a:rPr>
-              <a:t>Business:    returned on 1 of 9 orders, 11.1 percent. Lowest in the file and the</a:t>
-            </a:r>
-          </a:p>
-          <a:p>
-            <a:r>
-              <a:rPr sz="1700">
+              <a:t>Business      11.1%   on  9 orders</a:t>
+            </a:r>
+          </a:p>
+          <a:p>
+            <a:pPr>
+              <a:spcAft>
+                <a:spcPts val="400"/>
+              </a:spcAft>
+            </a:pPr>
+            <a:r>
+              <a:rPr sz="1700" b="0">
                 <a:solidFill>
                   <a:srgbClr val="2B4A7D"/>
                 </a:solidFill>
                 <a:latin typeface="Consolas"/>
               </a:rPr>
-              <a:t>             smallest segment in it. One more return takes it to 22.2 percent and</a:t>
-            </a:r>
-          </a:p>
-          <a:p>
-            <a:r>
-              <a:rPr sz="1700">
+              <a:t>Student       20.0%   on 10 orders</a:t>
+            </a:r>
+          </a:p>
+          <a:p>
+            <a:pPr>
+              <a:spcAft>
+                <a:spcPts val="400"/>
+              </a:spcAft>
+            </a:pPr>
+            <a:r>
+              <a:rPr sz="1700" b="0">
                 <a:solidFill>
                   <a:srgbClr val="2B4A7D"/>
                 </a:solidFill>
                 <a:latin typeface="Consolas"/>
               </a:rPr>
-              <a:t>             behind Student, so this is not yet a finding.</a:t>
-            </a:r>
-          </a:p>
-          <a:p>
-            <a:r>
-              <a:rPr sz="1700">
+              <a:t>Retail-Core   35.7%   on 14 orders</a:t>
+            </a:r>
+          </a:p>
+          <a:p>
+            <a:pPr>
+              <a:spcAft>
+                <a:spcPts val="400"/>
+              </a:spcAft>
+            </a:pPr>
+            <a:r>
+              <a:rPr sz="1700" b="0">
                 <a:solidFill>
                   <a:srgbClr val="2B4A7D"/>
                 </a:solidFill>
                 <a:latin typeface="Consolas"/>
               </a:rPr>
-              <a:t/>
-            </a:r>
-          </a:p>
-          <a:p>
-            <a:r>
-              <a:rPr sz="1700">
-                <a:solidFill>
-                  <a:srgbClr val="2B4A7D"/>
-                </a:solidFill>
-                <a:latin typeface="Consolas"/>
-              </a:rPr>
-              <a:t>Student:     returned on 2 of 10 orders, 20.0 percent. Ten orders, and the raw file</a:t>
-            </a:r>
-          </a:p>
-          <a:p>
-            <a:r>
-              <a:rPr sz="1700">
-                <a:solidFill>
-                  <a:srgbClr val="2B4A7D"/>
-                </a:solidFill>
-                <a:latin typeface="Consolas"/>
-              </a:rPr>
-              <a:t>             held twelve before two failed conversion. Treat as unmeasured.</a:t>
-            </a:r>
-          </a:p>
-          <a:p>
-            <a:r>
-              <a:rPr sz="1700">
-                <a:solidFill>
-                  <a:srgbClr val="2B4A7D"/>
-                </a:solidFill>
-                <a:latin typeface="Consolas"/>
-              </a:rPr>
-              <a:t/>
-            </a:r>
-          </a:p>
-          <a:p>
-            <a:r>
-              <a:rPr sz="1700">
-                <a:solidFill>
-                  <a:srgbClr val="2B4A7D"/>
-                </a:solidFill>
-                <a:latin typeface="Consolas"/>
-              </a:rPr>
-              <a:t>Retail-Core: returned on 5 of 14 orders, 35.7 percent. Largest segment and the</a:t>
-            </a:r>
-          </a:p>
-          <a:p>
-            <a:r>
-              <a:rPr sz="1700">
-                <a:solidFill>
-                  <a:srgbClr val="2B4A7D"/>
-                </a:solidFill>
-                <a:latin typeface="Consolas"/>
-              </a:rPr>
-              <a:t>             steadiest number here. Median order Rs 1,910; the mean of Rs 36,027.14</a:t>
-            </a:r>
-          </a:p>
-          <a:p>
-            <a:r>
-              <a:rPr sz="1700">
-                <a:solidFill>
-                  <a:srgbClr val="2B4A7D"/>
-                </a:solidFill>
-                <a:latin typeface="Consolas"/>
-              </a:rPr>
-              <a:t>             is the Rs 480,000 order and should not be quoted.</a:t>
-            </a:r>
-          </a:p>
-          <a:p>
-            <a:r>
-              <a:rPr sz="1700">
-                <a:solidFill>
-                  <a:srgbClr val="2B4A7D"/>
-                </a:solidFill>
-                <a:latin typeface="Consolas"/>
-              </a:rPr>
-              <a:t/>
-            </a:r>
-          </a:p>
-          <a:p>
-            <a:r>
-              <a:rPr sz="1700">
-                <a:solidFill>
-                  <a:srgbClr val="2B4A7D"/>
-                </a:solidFill>
-                <a:latin typeface="Consolas"/>
-              </a:rPr>
-              <a:t>Retail-Plus: returned on 4 of 11 orders, 36.4 percent. Highest in the file, within</a:t>
-            </a:r>
-          </a:p>
-          <a:p>
-            <a:r>
-              <a:rPr sz="1700">
-                <a:solidFill>
-                  <a:srgbClr val="2B4A7D"/>
-                </a:solidFill>
-                <a:latin typeface="Consolas"/>
-              </a:rPr>
-              <a:t>             one order of Retail-Core. The two are not separated by this data.</a:t>
-            </a:r>
-          </a:p>
-          <a:p>
-            <a:r>
-              <a:rPr sz="2100">
+              <a:t>Retail-Plus   36.4%   on 11 orders</a:t>
+            </a:r>
+          </a:p>
+        </p:txBody>
+      </p:sp>
+      <p:sp>
+        <p:nvSpPr>
+          <p:cNvPr id="5" name="TextBox 4"/>
+          <p:cNvSpPr txBox="1"/>
+          <p:nvPr/>
+        </p:nvSpPr>
+        <p:spPr>
+          <a:xfrm>
+            <a:off x="777240" y="3265169"/>
+            <a:ext cx="10607040" cy="914400"/>
+          </a:xfrm>
+          <a:prstGeom prst="rect">
+            <a:avLst/>
+          </a:prstGeom>
+          <a:noFill/>
+        </p:spPr>
+        <p:txBody>
+          <a:bodyPr wrap="square">
+            <a:spAutoFit/>
+          </a:bodyPr>
+          <a:lstStyle/>
+          <a:p>
+            <a:pPr>
+              <a:spcAft>
+                <a:spcPts val="1000"/>
+              </a:spcAft>
+            </a:pPr>
+            <a:r>
+              <a:rPr sz="2100" b="0">
                 <a:solidFill>
                   <a:srgbClr val="1C1C1A"/>
                 </a:solidFill>
                 <a:latin typeface="Calibri"/>
               </a:rPr>
-              <a:t>Two decline to make a claim and a third says two segments cannot be told apart. That is the sentence doing its job.</a:t>
-            </a:r>
-          </a:p>
-        </p:txBody>
-      </p:sp>
-      <p:sp>
-        <p:nvSpPr>
-          <p:cNvPr id="5" name="TextBox 4"/>
-          <p:cNvSpPr txBox="1"/>
-          <p:nvPr/>
-        </p:nvSpPr>
-        <p:spPr>
-          <a:xfrm>
-            <a:off x="777240" y="6263640"/>
+              <a:t>The top two performers are the two smallest segments in the file.</a:t>
+            </a:r>
+          </a:p>
+          <a:p>
+            <a:pPr>
+              <a:spcAft>
+                <a:spcPts val="1000"/>
+              </a:spcAft>
+            </a:pPr>
+            <a:r>
+              <a:rPr sz="2100" b="0">
+                <a:solidFill>
+                  <a:srgbClr val="1C1C1A"/>
+                </a:solidFill>
+                <a:latin typeface="Calibri"/>
+              </a:rPr>
+              <a:t>Business wins on nine orders.</a:t>
+            </a:r>
+          </a:p>
+        </p:txBody>
+      </p:sp>
+      <p:sp>
+        <p:nvSpPr>
+          <p:cNvPr id="6" name="TextBox 5"/>
+          <p:cNvSpPr txBox="1"/>
+          <p:nvPr/>
+        </p:nvSpPr>
+        <p:spPr>
+          <a:xfrm>
+            <a:off x="777240" y="6309360"/>
             <a:ext cx="10607040" cy="365760"/>
           </a:xfrm>
           <a:prstGeom prst="rect">
@@ -6804,7 +8039,7 @@
                 </a:solidFill>
                 <a:latin typeface="Calibri"/>
               </a:rPr>
-              <a:t>Week 1 Day 4, half two: the segment summary and its denominators</a:t>
+              <a:t>Week 1 Day 4, half two: the segment summary, and the count it rests on</a:t>
             </a:r>
           </a:p>
         </p:txBody>
@@ -6873,7 +8108,60 @@
       </p:sp>
       <p:sp>
         <p:nvSpPr>
-          <p:cNvPr id="3" name="TextBox 2"/>
+          <p:cNvPr id="3" name="Rounded Rectangle 2"/>
+          <p:cNvSpPr/>
+          <p:nvPr/>
+        </p:nvSpPr>
+        <p:spPr>
+          <a:xfrm>
+            <a:off x="10195560" y="384048"/>
+            <a:ext cx="1188720" cy="310896"/>
+          </a:xfrm>
+          <a:prstGeom prst="roundRect">
+            <a:avLst/>
+          </a:prstGeom>
+          <a:solidFill>
+            <a:srgbClr val="2B4A7D"/>
+          </a:solidFill>
+          <a:ln>
+            <a:noFill/>
+          </a:ln>
+          <a:effectLst/>
+        </p:spPr>
+        <p:style>
+          <a:lnRef idx="1">
+            <a:schemeClr val="accent1"/>
+          </a:lnRef>
+          <a:fillRef idx="3">
+            <a:schemeClr val="accent1"/>
+          </a:fillRef>
+          <a:effectRef idx="2">
+            <a:schemeClr val="accent1"/>
+          </a:effectRef>
+          <a:fontRef idx="minor">
+            <a:schemeClr val="lt1"/>
+          </a:fontRef>
+        </p:style>
+        <p:txBody>
+          <a:bodyPr rtlCol="0" anchor="ctr"/>
+          <a:lstStyle/>
+          <a:p>
+            <a:pPr algn="ctr"/>
+            <a:r>
+              <a:rPr sz="1100" b="1">
+                <a:solidFill>
+                  <a:srgbClr val="FFFFFF"/>
+                </a:solidFill>
+                <a:latin typeface="Calibri"/>
+              </a:rPr>
+              <a:t>DEPTH</a:t>
+            </a:r>
+          </a:p>
+        </p:txBody>
+      </p:sp>
+      <p:sp>
+        <p:nvSpPr>
+          <p:cNvPr id="4" name="TextBox 3"/>
           <p:cNvSpPr txBox="1"/>
           <p:nvPr/>
         </p:nvSpPr>
@@ -6894,27 +8182,27 @@
           <a:lstStyle/>
           <a:p>
             <a:r>
-              <a:rPr sz="3600" b="1">
+              <a:rPr sz="3200" b="1">
                 <a:solidFill>
                   <a:srgbClr val="1C1C1A"/>
                 </a:solidFill>
                 <a:latin typeface="Calibri"/>
               </a:rPr>
-              <a:t>The convention this follows</a:t>
-            </a:r>
-          </a:p>
-        </p:txBody>
-      </p:sp>
-      <p:sp>
-        <p:nvSpPr>
-          <p:cNvPr id="4" name="TextBox 3"/>
+              <a:t>The same argument, run on every segment</a:t>
+            </a:r>
+          </a:p>
+        </p:txBody>
+      </p:sp>
+      <p:sp>
+        <p:nvSpPr>
+          <p:cNvPr id="5" name="TextBox 4"/>
           <p:cNvSpPr txBox="1"/>
           <p:nvPr/>
         </p:nvSpPr>
         <p:spPr>
           <a:xfrm>
             <a:off x="777240" y="1965960"/>
-            <a:ext cx="10607040" cy="4206240"/>
+            <a:ext cx="10607040" cy="542925"/>
           </a:xfrm>
           <a:prstGeom prst="rect">
             <a:avLst/>
@@ -6927,38 +8215,469 @@
           </a:bodyPr>
           <a:lstStyle/>
           <a:p>
-            <a:r>
-              <a:rPr sz="2100">
+            <a:pPr>
+              <a:spcAft>
+                <a:spcPts val="1000"/>
+              </a:spcAft>
+            </a:pPr>
+            <a:r>
+              <a:rPr sz="2100" b="0">
                 <a:solidFill>
                   <a:srgbClr val="1C1C1A"/>
                 </a:solidFill>
                 <a:latin typeface="Calibri"/>
               </a:rPr>
-              <a:t>Retail-Core's mean order value is Rs 36,027.14. Its median is Rs 1,910. One order separates those.</a:t>
-            </a:r>
-          </a:p>
-          <a:p>
-            <a:r>
-              <a:rPr sz="2100">
+              <a:t>Take each segment in turn and ask what one more return would do.</a:t>
+            </a:r>
+          </a:p>
+        </p:txBody>
+      </p:sp>
+      <p:graphicFrame>
+        <p:nvGraphicFramePr>
+          <p:cNvPr id="6" name="Table 5"/>
+          <p:cNvGraphicFramePr>
+            <a:graphicFrameLocks noGrp="1"/>
+          </p:cNvGraphicFramePr>
+          <p:nvPr/>
+        </p:nvGraphicFramePr>
+        <p:xfrm>
+          <a:off x="777240" y="2646045"/>
+          <a:ext cx="10607040" cy="1920240"/>
+        </p:xfrm>
+        <a:graphic>
+          <a:graphicData uri="http://schemas.openxmlformats.org/drawingml/2006/table">
+            <a:tbl>
+              <a:tblPr firstRow="1" bandRow="1">
+                <a:tableStyleId>{5C22544A-7EE6-4342-B048-85BDC9FD1C3A}</a:tableStyleId>
+              </a:tblPr>
+              <a:tblGrid>
+                <a:gridCol w="2651760"/>
+                <a:gridCol w="2651760"/>
+                <a:gridCol w="2651760"/>
+                <a:gridCol w="2651760"/>
+              </a:tblGrid>
+              <a:tr h="384048">
+                <a:tc>
+                  <a:txBody>
+                    <a:bodyPr/>
+                    <a:lstStyle/>
+                    <a:p>
+                      <a:r>
+                        <a:rPr sz="1300" b="1">
+                          <a:solidFill>
+                            <a:srgbClr val="2B4A7D"/>
+                          </a:solidFill>
+                          <a:latin typeface="Calibri"/>
+                        </a:rPr>
+                        <a:t>Segment</a:t>
+                      </a:r>
+                    </a:p>
+                  </a:txBody>
+                  <a:tcPr marT="25400" marB="25400"/>
+                </a:tc>
+                <a:tc>
+                  <a:txBody>
+                    <a:bodyPr/>
+                    <a:lstStyle/>
+                    <a:p>
+                      <a:r>
+                        <a:rPr sz="1300" b="1">
+                          <a:solidFill>
+                            <a:srgbClr val="2B4A7D"/>
+                          </a:solidFill>
+                          <a:latin typeface="Calibri"/>
+                        </a:rPr>
+                        <a:t>Now</a:t>
+                      </a:r>
+                    </a:p>
+                  </a:txBody>
+                  <a:tcPr marT="25400" marB="25400"/>
+                </a:tc>
+                <a:tc>
+                  <a:txBody>
+                    <a:bodyPr/>
+                    <a:lstStyle/>
+                    <a:p>
+                      <a:r>
+                        <a:rPr sz="1300" b="1">
+                          <a:solidFill>
+                            <a:srgbClr val="2B4A7D"/>
+                          </a:solidFill>
+                          <a:latin typeface="Calibri"/>
+                        </a:rPr>
+                        <a:t>With one more return</a:t>
+                      </a:r>
+                    </a:p>
+                  </a:txBody>
+                  <a:tcPr marT="25400" marB="25400"/>
+                </a:tc>
+                <a:tc>
+                  <a:txBody>
+                    <a:bodyPr/>
+                    <a:lstStyle/>
+                    <a:p>
+                      <a:r>
+                        <a:rPr sz="1300" b="1">
+                          <a:solidFill>
+                            <a:srgbClr val="2B4A7D"/>
+                          </a:solidFill>
+                          <a:latin typeface="Calibri"/>
+                        </a:rPr>
+                        <a:t>Does the ranking change</a:t>
+                      </a:r>
+                    </a:p>
+                  </a:txBody>
+                  <a:tcPr marT="25400" marB="25400"/>
+                </a:tc>
+              </a:tr>
+              <a:tr h="384048">
+                <a:tc>
+                  <a:txBody>
+                    <a:bodyPr/>
+                    <a:lstStyle/>
+                    <a:p>
+                      <a:r>
+                        <a:rPr sz="1400" b="0">
+                          <a:solidFill>
+                            <a:srgbClr val="1C1C1A"/>
+                          </a:solidFill>
+                          <a:latin typeface="Calibri"/>
+                        </a:rPr>
+                        <a:t>Business</a:t>
+                      </a:r>
+                    </a:p>
+                  </a:txBody>
+                  <a:tcPr marT="25400" marB="25400"/>
+                </a:tc>
+                <a:tc>
+                  <a:txBody>
+                    <a:bodyPr/>
+                    <a:lstStyle/>
+                    <a:p>
+                      <a:r>
+                        <a:rPr sz="1400" b="0">
+                          <a:solidFill>
+                            <a:srgbClr val="1C1C1A"/>
+                          </a:solidFill>
+                          <a:latin typeface="Calibri"/>
+                        </a:rPr>
+                        <a:t>1 of 9, 11.1 percent</a:t>
+                      </a:r>
+                    </a:p>
+                  </a:txBody>
+                  <a:tcPr marT="25400" marB="25400"/>
+                </a:tc>
+                <a:tc>
+                  <a:txBody>
+                    <a:bodyPr/>
+                    <a:lstStyle/>
+                    <a:p>
+                      <a:r>
+                        <a:rPr sz="1400" b="0">
+                          <a:solidFill>
+                            <a:srgbClr val="1C1C1A"/>
+                          </a:solidFill>
+                          <a:latin typeface="Calibri"/>
+                        </a:rPr>
+                        <a:t>2 of 9, 22.2 percent</a:t>
+                      </a:r>
+                    </a:p>
+                  </a:txBody>
+                  <a:tcPr marT="25400" marB="25400"/>
+                </a:tc>
+                <a:tc>
+                  <a:txBody>
+                    <a:bodyPr/>
+                    <a:lstStyle/>
+                    <a:p>
+                      <a:r>
+                        <a:rPr sz="1400" b="0">
+                          <a:solidFill>
+                            <a:srgbClr val="1C1C1A"/>
+                          </a:solidFill>
+                          <a:latin typeface="Calibri"/>
+                        </a:rPr>
+                        <a:t>Yes. It falls behind Student and stops being the best segment.</a:t>
+                      </a:r>
+                    </a:p>
+                  </a:txBody>
+                  <a:tcPr marT="25400" marB="25400"/>
+                </a:tc>
+              </a:tr>
+              <a:tr h="384048">
+                <a:tc>
+                  <a:txBody>
+                    <a:bodyPr/>
+                    <a:lstStyle/>
+                    <a:p>
+                      <a:r>
+                        <a:rPr sz="1400" b="0">
+                          <a:solidFill>
+                            <a:srgbClr val="1C1C1A"/>
+                          </a:solidFill>
+                          <a:latin typeface="Calibri"/>
+                        </a:rPr>
+                        <a:t>Student</a:t>
+                      </a:r>
+                    </a:p>
+                  </a:txBody>
+                  <a:tcPr marT="25400" marB="25400"/>
+                </a:tc>
+                <a:tc>
+                  <a:txBody>
+                    <a:bodyPr/>
+                    <a:lstStyle/>
+                    <a:p>
+                      <a:r>
+                        <a:rPr sz="1400" b="0">
+                          <a:solidFill>
+                            <a:srgbClr val="1C1C1A"/>
+                          </a:solidFill>
+                          <a:latin typeface="Calibri"/>
+                        </a:rPr>
+                        <a:t>2 of 10, 20.0 percent</a:t>
+                      </a:r>
+                    </a:p>
+                  </a:txBody>
+                  <a:tcPr marT="25400" marB="25400"/>
+                </a:tc>
+                <a:tc>
+                  <a:txBody>
+                    <a:bodyPr/>
+                    <a:lstStyle/>
+                    <a:p>
+                      <a:r>
+                        <a:rPr sz="1400" b="0">
+                          <a:solidFill>
+                            <a:srgbClr val="1C1C1A"/>
+                          </a:solidFill>
+                          <a:latin typeface="Calibri"/>
+                        </a:rPr>
+                        <a:t>3 of 10, 30.0 percent</a:t>
+                      </a:r>
+                    </a:p>
+                  </a:txBody>
+                  <a:tcPr marT="25400" marB="25400"/>
+                </a:tc>
+                <a:tc>
+                  <a:txBody>
+                    <a:bodyPr/>
+                    <a:lstStyle/>
+                    <a:p>
+                      <a:r>
+                        <a:rPr sz="1400" b="0">
+                          <a:solidFill>
+                            <a:srgbClr val="1C1C1A"/>
+                          </a:solidFill>
+                          <a:latin typeface="Calibri"/>
+                        </a:rPr>
+                        <a:t>No. It stays second, because it was already ahead of Retail-Core.</a:t>
+                      </a:r>
+                    </a:p>
+                  </a:txBody>
+                  <a:tcPr marT="25400" marB="25400"/>
+                </a:tc>
+              </a:tr>
+              <a:tr h="384048">
+                <a:tc>
+                  <a:txBody>
+                    <a:bodyPr/>
+                    <a:lstStyle/>
+                    <a:p>
+                      <a:r>
+                        <a:rPr sz="1400" b="0">
+                          <a:solidFill>
+                            <a:srgbClr val="1C1C1A"/>
+                          </a:solidFill>
+                          <a:latin typeface="Calibri"/>
+                        </a:rPr>
+                        <a:t>Retail-Core</a:t>
+                      </a:r>
+                    </a:p>
+                  </a:txBody>
+                  <a:tcPr marT="25400" marB="25400"/>
+                </a:tc>
+                <a:tc>
+                  <a:txBody>
+                    <a:bodyPr/>
+                    <a:lstStyle/>
+                    <a:p>
+                      <a:r>
+                        <a:rPr sz="1400" b="0">
+                          <a:solidFill>
+                            <a:srgbClr val="1C1C1A"/>
+                          </a:solidFill>
+                          <a:latin typeface="Calibri"/>
+                        </a:rPr>
+                        <a:t>5 of 14, 35.7 percent</a:t>
+                      </a:r>
+                    </a:p>
+                  </a:txBody>
+                  <a:tcPr marT="25400" marB="25400"/>
+                </a:tc>
+                <a:tc>
+                  <a:txBody>
+                    <a:bodyPr/>
+                    <a:lstStyle/>
+                    <a:p>
+                      <a:r>
+                        <a:rPr sz="1400" b="0">
+                          <a:solidFill>
+                            <a:srgbClr val="1C1C1A"/>
+                          </a:solidFill>
+                          <a:latin typeface="Calibri"/>
+                        </a:rPr>
+                        <a:t>6 of 14, 42.9 percent</a:t>
+                      </a:r>
+                    </a:p>
+                  </a:txBody>
+                  <a:tcPr marT="25400" marB="25400"/>
+                </a:tc>
+                <a:tc>
+                  <a:txBody>
+                    <a:bodyPr/>
+                    <a:lstStyle/>
+                    <a:p>
+                      <a:r>
+                        <a:rPr sz="1400" b="0">
+                          <a:solidFill>
+                            <a:srgbClr val="1C1C1A"/>
+                          </a:solidFill>
+                          <a:latin typeface="Calibri"/>
+                        </a:rPr>
+                        <a:t>Yes. It becomes the worst segment.</a:t>
+                      </a:r>
+                    </a:p>
+                  </a:txBody>
+                  <a:tcPr marT="25400" marB="25400"/>
+                </a:tc>
+              </a:tr>
+              <a:tr h="384048">
+                <a:tc>
+                  <a:txBody>
+                    <a:bodyPr/>
+                    <a:lstStyle/>
+                    <a:p>
+                      <a:r>
+                        <a:rPr sz="1400" b="0">
+                          <a:solidFill>
+                            <a:srgbClr val="1C1C1A"/>
+                          </a:solidFill>
+                          <a:latin typeface="Calibri"/>
+                        </a:rPr>
+                        <a:t>Retail-Plus</a:t>
+                      </a:r>
+                    </a:p>
+                  </a:txBody>
+                  <a:tcPr marT="25400" marB="25400"/>
+                </a:tc>
+                <a:tc>
+                  <a:txBody>
+                    <a:bodyPr/>
+                    <a:lstStyle/>
+                    <a:p>
+                      <a:r>
+                        <a:rPr sz="1400" b="0">
+                          <a:solidFill>
+                            <a:srgbClr val="1C1C1A"/>
+                          </a:solidFill>
+                          <a:latin typeface="Calibri"/>
+                        </a:rPr>
+                        <a:t>4 of 11, 36.4 percent</a:t>
+                      </a:r>
+                    </a:p>
+                  </a:txBody>
+                  <a:tcPr marT="25400" marB="25400"/>
+                </a:tc>
+                <a:tc>
+                  <a:txBody>
+                    <a:bodyPr/>
+                    <a:lstStyle/>
+                    <a:p>
+                      <a:r>
+                        <a:rPr sz="1400" b="0">
+                          <a:solidFill>
+                            <a:srgbClr val="1C1C1A"/>
+                          </a:solidFill>
+                          <a:latin typeface="Calibri"/>
+                        </a:rPr>
+                        <a:t>5 of 11, 45.5 percent</a:t>
+                      </a:r>
+                    </a:p>
+                  </a:txBody>
+                  <a:tcPr marT="25400" marB="25400"/>
+                </a:tc>
+                <a:tc>
+                  <a:txBody>
+                    <a:bodyPr/>
+                    <a:lstStyle/>
+                    <a:p>
+                      <a:r>
+                        <a:rPr sz="1400" b="0">
+                          <a:solidFill>
+                            <a:srgbClr val="1C1C1A"/>
+                          </a:solidFill>
+                          <a:latin typeface="Calibri"/>
+                        </a:rPr>
+                        <a:t>It was already last and stays there.</a:t>
+                      </a:r>
+                    </a:p>
+                  </a:txBody>
+                  <a:tcPr marT="25400" marB="25400"/>
+                </a:tc>
+              </a:tr>
+            </a:tbl>
+          </a:graphicData>
+        </a:graphic>
+      </p:graphicFrame>
+      <p:sp>
+        <p:nvSpPr>
+          <p:cNvPr id="7" name="TextBox 6"/>
+          <p:cNvSpPr txBox="1"/>
+          <p:nvPr/>
+        </p:nvSpPr>
+        <p:spPr>
+          <a:xfrm>
+            <a:off x="777240" y="4749165"/>
+            <a:ext cx="10607040" cy="1038225"/>
+          </a:xfrm>
+          <a:prstGeom prst="rect">
+            <a:avLst/>
+          </a:prstGeom>
+          <a:noFill/>
+        </p:spPr>
+        <p:txBody>
+          <a:bodyPr wrap="square">
+            <a:spAutoFit/>
+          </a:bodyPr>
+          <a:lstStyle/>
+          <a:p>
+            <a:pPr>
+              <a:spcAft>
+                <a:spcPts val="1000"/>
+              </a:spcAft>
+            </a:pPr>
+            <a:r>
+              <a:rPr sz="2100" b="0">
                 <a:solidFill>
                   <a:srgbClr val="1C1C1A"/>
                 </a:solidFill>
                 <a:latin typeface="Calibri"/>
               </a:rPr>
-              <a:t>Reporting the median for money is the standing convention wherever a few very large values sit in a long tail, which is why national statistics report median household income. You applied it in half one to a column. Here it applies to a cell in a table somebody will screenshot.</a:t>
-            </a:r>
-          </a:p>
-        </p:txBody>
-      </p:sp>
-      <p:sp>
-        <p:nvSpPr>
-          <p:cNvPr id="5" name="TextBox 4"/>
-          <p:cNvSpPr txBox="1"/>
-          <p:nvPr/>
-        </p:nvSpPr>
-        <p:spPr>
-          <a:xfrm>
-            <a:off x="777240" y="6263640"/>
+              <a:t>Two of the four positions change on one order, and one of those two is the top of the table. A ranking whose leader can be overturned by a single record is a ranking that should be sent with its counts and a sentence, which is exactly what the next section builds.</a:t>
+            </a:r>
+          </a:p>
+        </p:txBody>
+      </p:sp>
+      <p:sp>
+        <p:nvSpPr>
+          <p:cNvPr id="8" name="TextBox 7"/>
+          <p:cNvSpPr txBox="1"/>
+          <p:nvPr/>
+        </p:nvSpPr>
+        <p:spPr>
+          <a:xfrm>
+            <a:off x="777240" y="6309360"/>
             <a:ext cx="10607040" cy="365760"/>
           </a:xfrm>
           <a:prstGeom prst="rect">
@@ -6979,7 +8698,7 @@
                 </a:solidFill>
                 <a:latin typeface="Calibri"/>
               </a:rPr>
-              <a:t>Week 1 Day 4, half two: the segment summary and its denominators</a:t>
+              <a:t>Week 1 Day 4, half two: the segment summary, and the count it rests on</a:t>
             </a:r>
           </a:p>
         </p:txBody>
@@ -7069,13 +8788,13 @@
           <a:lstStyle/>
           <a:p>
             <a:r>
-              <a:rPr sz="3600" b="1">
+              <a:rPr sz="3200" b="1">
                 <a:solidFill>
                   <a:srgbClr val="1C1C1A"/>
                 </a:solidFill>
                 <a:latin typeface="Calibri"/>
               </a:rPr>
-              <a:t>The question you are not answering today</a:t>
+              <a:t>One order</a:t>
             </a:r>
           </a:p>
         </p:txBody>
@@ -7089,7 +8808,7 @@
         <p:spPr>
           <a:xfrm>
             <a:off x="777240" y="1965960"/>
-            <a:ext cx="10607040" cy="4206240"/>
+            <a:ext cx="10607040" cy="666750"/>
           </a:xfrm>
           <a:prstGeom prst="rect">
             <a:avLst/>
@@ -7102,49 +8821,128 @@
           </a:bodyPr>
           <a:lstStyle/>
           <a:p>
-            <a:r>
-              <a:rPr sz="2100">
+            <a:pPr>
+              <a:spcAft>
+                <a:spcPts val="400"/>
+              </a:spcAft>
+            </a:pPr>
+            <a:r>
+              <a:rPr sz="1700" b="0">
+                <a:solidFill>
+                  <a:srgbClr val="2B4A7D"/>
+                </a:solidFill>
+                <a:latin typeface="Consolas"/>
+              </a:rPr>
+              <a:t>if 0 more Business orders had been returned:  11.1%   still best</a:t>
+            </a:r>
+          </a:p>
+          <a:p>
+            <a:pPr>
+              <a:spcAft>
+                <a:spcPts val="400"/>
+              </a:spcAft>
+            </a:pPr>
+            <a:r>
+              <a:rPr sz="1700" b="0">
+                <a:solidFill>
+                  <a:srgbClr val="2B4A7D"/>
+                </a:solidFill>
+                <a:latin typeface="Consolas"/>
+              </a:rPr>
+              <a:t>if 1 more Business order  had been returned:  22.2%   no longer best</a:t>
+            </a:r>
+          </a:p>
+        </p:txBody>
+      </p:sp>
+      <p:sp>
+        <p:nvSpPr>
+          <p:cNvPr id="5" name="TextBox 4"/>
+          <p:cNvSpPr txBox="1"/>
+          <p:nvPr/>
+        </p:nvSpPr>
+        <p:spPr>
+          <a:xfrm>
+            <a:off x="777240" y="2769870"/>
+            <a:ext cx="10607040" cy="2028825"/>
+          </a:xfrm>
+          <a:prstGeom prst="rect">
+            <a:avLst/>
+          </a:prstGeom>
+          <a:noFill/>
+        </p:spPr>
+        <p:txBody>
+          <a:bodyPr wrap="square">
+            <a:spAutoFit/>
+          </a:bodyPr>
+          <a:lstStyle/>
+          <a:p>
+            <a:pPr>
+              <a:spcAft>
+                <a:spcPts val="1000"/>
+              </a:spcAft>
+            </a:pPr>
+            <a:r>
+              <a:rPr sz="2100" b="1">
                 <a:solidFill>
                   <a:srgbClr val="1C1C1A"/>
                 </a:solidFill>
                 <a:latin typeface="Calibri"/>
               </a:rPr>
-              <a:t>Is Business genuinely better than Retail-Plus, or is 11.1 against 36.4 what four groups of these sizes do on their own?</a:t>
-            </a:r>
-          </a:p>
-          <a:p>
-            <a:r>
-              <a:rPr sz="2100">
+              <a:t>One order</a:t>
+            </a:r>
+            <a:r>
+              <a:rPr sz="2100" b="0">
                 <a:solidFill>
                   <a:srgbClr val="1C1C1A"/>
                 </a:solidFill>
                 <a:latin typeface="Calibri"/>
               </a:rPr>
-              <a:t>That question has a real answer and a method behind it, and it is Monday's session.</a:t>
-            </a:r>
-          </a:p>
-          <a:p>
-            <a:r>
-              <a:rPr sz="2100">
+              <a:t> out of forty-four, in a segment of nine, and the best segment in the file is no longer the best segment in the file.</a:t>
+            </a:r>
+          </a:p>
+          <a:p>
+            <a:pPr>
+              <a:spcAft>
+                <a:spcPts val="1000"/>
+              </a:spcAft>
+            </a:pPr>
+            <a:r>
+              <a:rPr sz="2100" b="0">
                 <a:solidFill>
                   <a:srgbClr val="1C1C1A"/>
                 </a:solidFill>
                 <a:latin typeface="Calibri"/>
               </a:rPr>
-              <a:t>Today you name the question, write it in the notebook, and stop. Saying "we do not know yet, and here is what would tell us" is a complete professional answer.</a:t>
-            </a:r>
-          </a:p>
-        </p:txBody>
-      </p:sp>
-      <p:sp>
-        <p:nvSpPr>
-          <p:cNvPr id="5" name="TextBox 4"/>
-          <p:cNvSpPr txBox="1"/>
-          <p:nvPr/>
-        </p:nvSpPr>
-        <p:spPr>
-          <a:xfrm>
-            <a:off x="777240" y="6263640"/>
+              <a:t>Small groups produce extreme rates in both directions, in any dataset, with nothing causing it. Rank groups by a rate and the smallest drift to both ends of the list, so the ranking reads group size as much as performance.</a:t>
+            </a:r>
+          </a:p>
+          <a:p>
+            <a:pPr>
+              <a:spcAft>
+                <a:spcPts val="1000"/>
+              </a:spcAft>
+            </a:pPr>
+            <a:r>
+              <a:rPr sz="2100" b="0">
+                <a:solidFill>
+                  <a:srgbClr val="1C1C1A"/>
+                </a:solidFill>
+                <a:latin typeface="Calibri"/>
+              </a:rPr>
+              <a:t>The fix is not a cleverer statistic. It is the column you already have.</a:t>
+            </a:r>
+          </a:p>
+        </p:txBody>
+      </p:sp>
+      <p:sp>
+        <p:nvSpPr>
+          <p:cNvPr id="6" name="TextBox 5"/>
+          <p:cNvSpPr txBox="1"/>
+          <p:nvPr/>
+        </p:nvSpPr>
+        <p:spPr>
+          <a:xfrm>
+            <a:off x="777240" y="6309360"/>
             <a:ext cx="10607040" cy="365760"/>
           </a:xfrm>
           <a:prstGeom prst="rect">
@@ -7165,7 +8963,7 @@
                 </a:solidFill>
                 <a:latin typeface="Calibri"/>
               </a:rPr>
-              <a:t>Week 1 Day 4, half two: the segment summary and its denominators</a:t>
+              <a:t>Week 1 Day 4, half two: the segment summary, and the count it rests on</a:t>
             </a:r>
           </a:p>
         </p:txBody>
@@ -7203,7 +9001,7 @@
             <a:avLst/>
           </a:prstGeom>
           <a:solidFill>
-            <a:srgbClr val="F7F7F5"/>
+            <a:srgbClr val="2B4A7D"/>
           </a:solidFill>
           <a:ln>
             <a:noFill/>
@@ -7254,14 +9052,15 @@
           </a:bodyPr>
           <a:lstStyle/>
           <a:p>
+            <a:pPr algn="ctr"/>
             <a:r>
               <a:rPr sz="3600" b="1">
                 <a:solidFill>
-                  <a:srgbClr val="1C1C1A"/>
-                </a:solidFill>
-                <a:latin typeface="Calibri"/>
-              </a:rPr>
-              <a:t>The decision card</a:t>
+                  <a:srgbClr val="FFFFFF"/>
+                </a:solidFill>
+                <a:latin typeface="Calibri"/>
+              </a:rPr>
+              <a:t>SECTION 4: THE HONEST SENTENCE</a:t>
             </a:r>
           </a:p>
         </p:txBody>
@@ -7275,7 +9074,7 @@
         <p:spPr>
           <a:xfrm>
             <a:off x="777240" y="1965960"/>
-            <a:ext cx="10607040" cy="4206240"/>
+            <a:ext cx="10607040" cy="790575"/>
           </a:xfrm>
           <a:prstGeom prst="rect">
             <a:avLst/>
@@ -7288,80 +9087,28 @@
           </a:bodyPr>
           <a:lstStyle/>
           <a:p>
-            <a:r>
-              <a:rPr sz="1700">
-                <a:solidFill>
-                  <a:srgbClr val="2B4A7D"/>
-                </a:solidFill>
-                <a:latin typeface="Consolas"/>
-              </a:rPr>
-              <a:t>| Before you send a rate | Check |</a:t>
-            </a:r>
-          </a:p>
-          <a:p>
-            <a:r>
-              <a:rPr sz="1700">
-                <a:solidFill>
-                  <a:srgbClr val="2B4A7D"/>
-                </a:solidFill>
-                <a:latin typeface="Consolas"/>
-              </a:rPr>
-              <a:t>|---|---|</a:t>
-            </a:r>
-          </a:p>
-          <a:p>
-            <a:r>
-              <a:rPr sz="1700">
-                <a:solidFill>
-                  <a:srgbClr val="2B4A7D"/>
-                </a:solidFill>
-                <a:latin typeface="Consolas"/>
-              </a:rPr>
-              <a:t>| Is the denominator on the same line as the number | If not, it is not ready |</a:t>
-            </a:r>
-          </a:p>
-          <a:p>
-            <a:r>
-              <a:rPr sz="1700">
-                <a:solidFill>
-                  <a:srgbClr val="2B4A7D"/>
-                </a:solidFill>
-                <a:latin typeface="Consolas"/>
-              </a:rPr>
-              <a:t>| Is any group under about 30 orders | Say so in the sentence, in words |</a:t>
-            </a:r>
-          </a:p>
-          <a:p>
-            <a:r>
-              <a:rPr sz="1700">
-                <a:solidFill>
-                  <a:srgbClr val="2B4A7D"/>
-                </a:solidFill>
-                <a:latin typeface="Consolas"/>
-              </a:rPr>
-              <a:t>| Did you rank groups of very different sizes | Say what the ranking is partly measuring |</a:t>
-            </a:r>
-          </a:p>
-          <a:p>
-            <a:r>
-              <a:rPr sz="1700">
-                <a:solidFill>
-                  <a:srgbClr val="2B4A7D"/>
-                </a:solidFill>
-                <a:latin typeface="Consolas"/>
-              </a:rPr>
-              <a:t>| Is a mean quoted on a money column | Replace it with the median |</a:t>
-            </a:r>
-          </a:p>
-          <a:p>
-            <a:r>
-              <a:rPr sz="1700">
-                <a:solidFill>
-                  <a:srgbClr val="2B4A7D"/>
-                </a:solidFill>
-                <a:latin typeface="Consolas"/>
-              </a:rPr>
-              <a:t>| Is a difference being called real | Park it and name what would settle it |</a:t>
+            <a:pPr algn="ctr">
+              <a:spcAft>
+                <a:spcPts val="1000"/>
+              </a:spcAft>
+            </a:pPr>
+            <a:r>
+              <a:rPr sz="2100" b="0">
+                <a:solidFill>
+                  <a:srgbClr val="FFFFFF"/>
+                </a:solidFill>
+                <a:latin typeface="Calibri"/>
+              </a:rPr>
+              <a:t>[one column] &gt; [what is typical] &gt; [what one order does] &gt; [what the shape says] &gt; </a:t>
+            </a:r>
+            <a:r>
+              <a:rPr sz="2100" b="1">
+                <a:solidFill>
+                  <a:srgbClr val="FFFFFF"/>
+                </a:solidFill>
+                <a:latin typeface="Calibri"/>
+              </a:rPr>
+              <a:t>[per segment, with denominators]</a:t>
             </a:r>
           </a:p>
         </p:txBody>
@@ -7374,7 +9121,7 @@
         </p:nvSpPr>
         <p:spPr>
           <a:xfrm>
-            <a:off x="777240" y="6263640"/>
+            <a:off x="777240" y="6309360"/>
             <a:ext cx="10607040" cy="365760"/>
           </a:xfrm>
           <a:prstGeom prst="rect">
@@ -7395,7 +9142,7 @@
                 </a:solidFill>
                 <a:latin typeface="Calibri"/>
               </a:rPr>
-              <a:t>Week 1 Day 4, half two: the segment summary and its denominators</a:t>
+              <a:t>Week 1 Day 4, half two: the segment summary, and the count it rests on</a:t>
             </a:r>
           </a:p>
         </p:txBody>
@@ -7485,13 +9232,13 @@
           <a:lstStyle/>
           <a:p>
             <a:r>
-              <a:rPr sz="3600" b="1">
+              <a:rPr sz="3200" b="1">
                 <a:solidFill>
                   <a:srgbClr val="1C1C1A"/>
                 </a:solidFill>
                 <a:latin typeface="Calibri"/>
               </a:rPr>
-              <a:t>Crux</a:t>
+              <a:t>The shape of the sentence</a:t>
             </a:r>
           </a:p>
         </p:txBody>
@@ -7505,7 +9252,7 @@
         <p:spPr>
           <a:xfrm>
             <a:off x="777240" y="1965960"/>
-            <a:ext cx="10607040" cy="4206240"/>
+            <a:ext cx="10607040" cy="542925"/>
           </a:xfrm>
           <a:prstGeom prst="rect">
             <a:avLst/>
@@ -7518,49 +9265,110 @@
           </a:bodyPr>
           <a:lstStyle/>
           <a:p>
-            <a:r>
-              <a:rPr sz="2100" b="1">
+            <a:pPr>
+              <a:spcAft>
+                <a:spcPts val="1000"/>
+              </a:spcAft>
+            </a:pPr>
+            <a:r>
+              <a:rPr sz="2100" b="0">
                 <a:solidFill>
                   <a:srgbClr val="1C1C1A"/>
                 </a:solidFill>
                 <a:latin typeface="Calibri"/>
               </a:rPr>
-              <a:t>&gt; Every rate carries its denominator, or it lies for you while you are not in the room.</a:t>
-            </a:r>
-          </a:p>
-          <a:p>
-            <a:r>
-              <a:rPr sz="2100" b="1">
+              <a:t>Three parts, in this order, every time:</a:t>
+            </a:r>
+          </a:p>
+        </p:txBody>
+      </p:sp>
+      <p:sp>
+        <p:nvSpPr>
+          <p:cNvPr id="5" name="TextBox 4"/>
+          <p:cNvSpPr txBox="1"/>
+          <p:nvPr/>
+        </p:nvSpPr>
+        <p:spPr>
+          <a:xfrm>
+            <a:off x="777240" y="2646045"/>
+            <a:ext cx="10607040" cy="502920"/>
+          </a:xfrm>
+          <a:prstGeom prst="rect">
+            <a:avLst/>
+          </a:prstGeom>
+          <a:noFill/>
+        </p:spPr>
+        <p:txBody>
+          <a:bodyPr wrap="square">
+            <a:spAutoFit/>
+          </a:bodyPr>
+          <a:lstStyle/>
+          <a:p>
+            <a:pPr>
+              <a:spcAft>
+                <a:spcPts val="400"/>
+              </a:spcAft>
+            </a:pPr>
+            <a:r>
+              <a:rPr sz="1700" b="0">
+                <a:solidFill>
+                  <a:srgbClr val="2B4A7D"/>
+                </a:solidFill>
+                <a:latin typeface="Consolas"/>
+              </a:rPr>
+              <a:t>[the number]   [the denominator]   [what it does not yet support]</a:t>
+            </a:r>
+          </a:p>
+        </p:txBody>
+      </p:sp>
+      <p:sp>
+        <p:nvSpPr>
+          <p:cNvPr id="6" name="TextBox 5"/>
+          <p:cNvSpPr txBox="1"/>
+          <p:nvPr/>
+        </p:nvSpPr>
+        <p:spPr>
+          <a:xfrm>
+            <a:off x="777240" y="3286125"/>
+            <a:ext cx="10607040" cy="790575"/>
+          </a:xfrm>
+          <a:prstGeom prst="rect">
+            <a:avLst/>
+          </a:prstGeom>
+          <a:noFill/>
+        </p:spPr>
+        <p:txBody>
+          <a:bodyPr wrap="square">
+            <a:spAutoFit/>
+          </a:bodyPr>
+          <a:lstStyle/>
+          <a:p>
+            <a:pPr>
+              <a:spcAft>
+                <a:spcPts val="1000"/>
+              </a:spcAft>
+            </a:pPr>
+            <a:r>
+              <a:rPr sz="2100" b="0">
                 <a:solidFill>
                   <a:srgbClr val="1C1C1A"/>
                 </a:solidFill>
                 <a:latin typeface="Calibri"/>
               </a:rPr>
-              <a:t>&gt; The best-performing segment in this file is also the smallest, and one order takes the lead away.</a:t>
-            </a:r>
-          </a:p>
-          <a:p>
-            <a:r>
-              <a:rPr sz="2100">
-                <a:solidFill>
-                  <a:srgbClr val="1C1C1A"/>
-                </a:solidFill>
-                <a:latin typeface="Calibri"/>
-              </a:rPr>
-              <a:t>Tomorrow is Gandhi Jayanti and the institute is closed. These same orders, cleaned by you, come back as SQL tables and pandas frames in Week 2, and the summary you built by hand today becomes one line of code you will already know the answer to.</a:t>
-            </a:r>
-          </a:p>
-        </p:txBody>
-      </p:sp>
-      <p:sp>
-        <p:nvSpPr>
-          <p:cNvPr id="5" name="TextBox 4"/>
-          <p:cNvSpPr txBox="1"/>
-          <p:nvPr/>
-        </p:nvSpPr>
-        <p:spPr>
-          <a:xfrm>
-            <a:off x="777240" y="6263640"/>
+              <a:t>Leaving out the third part is how a caveat gets lost between your notebook and a slide somebody else builds.</a:t>
+            </a:r>
+          </a:p>
+        </p:txBody>
+      </p:sp>
+      <p:sp>
+        <p:nvSpPr>
+          <p:cNvPr id="7" name="TextBox 6"/>
+          <p:cNvSpPr txBox="1"/>
+          <p:nvPr/>
+        </p:nvSpPr>
+        <p:spPr>
+          <a:xfrm>
+            <a:off x="777240" y="6309360"/>
             <a:ext cx="10607040" cy="365760"/>
           </a:xfrm>
           <a:prstGeom prst="rect">
@@ -7581,7 +9389,7 @@
                 </a:solidFill>
                 <a:latin typeface="Calibri"/>
               </a:rPr>
-              <a:t>Week 1 Day 4, half two: the segment summary and its denominators</a:t>
+              <a:t>Week 1 Day 4, half two: the segment summary, and the count it rests on</a:t>
             </a:r>
           </a:p>
         </p:txBody>
@@ -7671,13 +9479,2124 @@
           <a:lstStyle/>
           <a:p>
             <a:r>
+              <a:rPr sz="3200" b="1">
+                <a:solidFill>
+                  <a:srgbClr val="1C1C1A"/>
+                </a:solidFill>
+                <a:latin typeface="Calibri"/>
+              </a:rPr>
+              <a:t>The metric, named before it is computed</a:t>
+            </a:r>
+          </a:p>
+        </p:txBody>
+      </p:sp>
+      <p:sp>
+        <p:nvSpPr>
+          <p:cNvPr id="4" name="TextBox 3"/>
+          <p:cNvSpPr txBox="1"/>
+          <p:nvPr/>
+        </p:nvSpPr>
+        <p:spPr>
+          <a:xfrm>
+            <a:off x="777240" y="1965960"/>
+            <a:ext cx="10607040" cy="790575"/>
+          </a:xfrm>
+          <a:prstGeom prst="rect">
+            <a:avLst/>
+          </a:prstGeom>
+          <a:noFill/>
+        </p:spPr>
+        <p:txBody>
+          <a:bodyPr wrap="square">
+            <a:spAutoFit/>
+          </a:bodyPr>
+          <a:lstStyle/>
+          <a:p>
+            <a:pPr>
+              <a:spcAft>
+                <a:spcPts val="1000"/>
+              </a:spcAft>
+            </a:pPr>
+            <a:r>
+              <a:rPr sz="2100" b="0">
+                <a:solidFill>
+                  <a:srgbClr val="1C1C1A"/>
+                </a:solidFill>
+                <a:latin typeface="Calibri"/>
+              </a:rPr>
+              <a:t>Kalpa Retail cares about returns. A returned order costs the delivery, the reverse logistics and usually the margin.</a:t>
+            </a:r>
+          </a:p>
+        </p:txBody>
+      </p:sp>
+      <p:sp>
+        <p:nvSpPr>
+          <p:cNvPr id="5" name="TextBox 4"/>
+          <p:cNvSpPr txBox="1"/>
+          <p:nvPr/>
+        </p:nvSpPr>
+        <p:spPr>
+          <a:xfrm>
+            <a:off x="777240" y="2893695"/>
+            <a:ext cx="10607040" cy="502920"/>
+          </a:xfrm>
+          <a:prstGeom prst="rect">
+            <a:avLst/>
+          </a:prstGeom>
+          <a:noFill/>
+        </p:spPr>
+        <p:txBody>
+          <a:bodyPr wrap="square">
+            <a:spAutoFit/>
+          </a:bodyPr>
+          <a:lstStyle/>
+          <a:p>
+            <a:pPr>
+              <a:spcAft>
+                <a:spcPts val="400"/>
+              </a:spcAft>
+            </a:pPr>
+            <a:r>
+              <a:rPr sz="1700" b="0">
+                <a:solidFill>
+                  <a:srgbClr val="2B4A7D"/>
+                </a:solidFill>
+                <a:latin typeface="Consolas"/>
+              </a:rPr>
+              <a:t>return rate  =  orders with status "returned"  /  all orders in the group</a:t>
+            </a:r>
+          </a:p>
+        </p:txBody>
+      </p:sp>
+      <p:sp>
+        <p:nvSpPr>
+          <p:cNvPr id="6" name="TextBox 5"/>
+          <p:cNvSpPr txBox="1"/>
+          <p:nvPr/>
+        </p:nvSpPr>
+        <p:spPr>
+          <a:xfrm>
+            <a:off x="777240" y="3533775"/>
+            <a:ext cx="10607040" cy="1038225"/>
+          </a:xfrm>
+          <a:prstGeom prst="rect">
+            <a:avLst/>
+          </a:prstGeom>
+          <a:noFill/>
+        </p:spPr>
+        <p:txBody>
+          <a:bodyPr wrap="square">
+            <a:spAutoFit/>
+          </a:bodyPr>
+          <a:lstStyle/>
+          <a:p>
+            <a:pPr>
+              <a:spcAft>
+                <a:spcPts val="1000"/>
+              </a:spcAft>
+            </a:pPr>
+            <a:r>
+              <a:rPr sz="2100" b="0">
+                <a:solidFill>
+                  <a:srgbClr val="1C1C1A"/>
+                </a:solidFill>
+                <a:latin typeface="Calibri"/>
+              </a:rPr>
+              <a:t>This is the first metric in the programme where </a:t>
+            </a:r>
+            <a:r>
+              <a:rPr sz="2100" b="1">
+                <a:solidFill>
+                  <a:srgbClr val="1C1C1A"/>
+                </a:solidFill>
+                <a:latin typeface="Calibri"/>
+              </a:rPr>
+              <a:t>lower is better</a:t>
+            </a:r>
+            <a:r>
+              <a:rPr sz="2100" b="0">
+                <a:solidFill>
+                  <a:srgbClr val="1C1C1A"/>
+                </a:solidFill>
+                <a:latin typeface="Calibri"/>
+              </a:rPr>
+              <a:t>. A ranking of return rates puts the best performer at the top with the smallest number beside it. Keep that straight or the next four slides will read backwards.</a:t>
+            </a:r>
+          </a:p>
+        </p:txBody>
+      </p:sp>
+      <p:sp>
+        <p:nvSpPr>
+          <p:cNvPr id="7" name="TextBox 6"/>
+          <p:cNvSpPr txBox="1"/>
+          <p:nvPr/>
+        </p:nvSpPr>
+        <p:spPr>
+          <a:xfrm>
+            <a:off x="777240" y="6309360"/>
+            <a:ext cx="10607040" cy="365760"/>
+          </a:xfrm>
+          <a:prstGeom prst="rect">
+            <a:avLst/>
+          </a:prstGeom>
+          <a:noFill/>
+        </p:spPr>
+        <p:txBody>
+          <a:bodyPr wrap="none">
+            <a:spAutoFit/>
+          </a:bodyPr>
+          <a:lstStyle/>
+          <a:p>
+            <a:r>
+              <a:rPr sz="1000">
+                <a:solidFill>
+                  <a:srgbClr val="5F6360"/>
+                </a:solidFill>
+                <a:latin typeface="Calibri"/>
+              </a:rPr>
+              <a:t>Week 1 Day 4, half two: the segment summary, and the count it rests on</a:t>
+            </a:r>
+          </a:p>
+        </p:txBody>
+      </p:sp>
+    </p:spTree>
+  </p:cSld>
+  <p:clrMapOvr>
+    <a:masterClrMapping/>
+  </p:clrMapOvr>
+</p:sld>
+</file>
+
+<file path=ppt/slides/slide30.xml><?xml version="1.0" encoding="utf-8"?>
+<p:sld xmlns:a="http://schemas.openxmlformats.org/drawingml/2006/main" xmlns:p="http://schemas.openxmlformats.org/presentationml/2006/main" xmlns:r="http://schemas.openxmlformats.org/officeDocument/2006/relationships">
+  <p:cSld>
+    <p:spTree>
+      <p:nvGrpSpPr>
+        <p:cNvPr id="1" name=""/>
+        <p:cNvGrpSpPr/>
+        <p:nvPr/>
+      </p:nvGrpSpPr>
+      <p:grpSpPr/>
+      <p:sp>
+        <p:nvSpPr>
+          <p:cNvPr id="2" name="Rectangle 1"/>
+          <p:cNvSpPr/>
+          <p:nvPr/>
+        </p:nvSpPr>
+        <p:spPr>
+          <a:xfrm>
+            <a:off x="0" y="0"/>
+            <a:ext cx="12191695" cy="6858000"/>
+          </a:xfrm>
+          <a:prstGeom prst="rect">
+            <a:avLst/>
+          </a:prstGeom>
+          <a:solidFill>
+            <a:srgbClr val="F7F7F5"/>
+          </a:solidFill>
+          <a:ln>
+            <a:noFill/>
+          </a:ln>
+          <a:effectLst/>
+        </p:spPr>
+        <p:style>
+          <a:lnRef idx="1">
+            <a:schemeClr val="accent1"/>
+          </a:lnRef>
+          <a:fillRef idx="3">
+            <a:schemeClr val="accent1"/>
+          </a:fillRef>
+          <a:effectRef idx="2">
+            <a:schemeClr val="accent1"/>
+          </a:effectRef>
+          <a:fontRef idx="minor">
+            <a:schemeClr val="lt1"/>
+          </a:fontRef>
+        </p:style>
+        <p:txBody>
+          <a:bodyPr rtlCol="0" anchor="ctr"/>
+          <a:lstStyle/>
+          <a:p>
+            <a:pPr algn="ctr"/>
+          </a:p>
+        </p:txBody>
+      </p:sp>
+      <p:sp>
+        <p:nvSpPr>
+          <p:cNvPr id="3" name="TextBox 2"/>
+          <p:cNvSpPr txBox="1"/>
+          <p:nvPr/>
+        </p:nvSpPr>
+        <p:spPr>
+          <a:xfrm>
+            <a:off x="777240" y="640080"/>
+            <a:ext cx="10607040" cy="1188720"/>
+          </a:xfrm>
+          <a:prstGeom prst="rect">
+            <a:avLst/>
+          </a:prstGeom>
+          <a:noFill/>
+        </p:spPr>
+        <p:txBody>
+          <a:bodyPr wrap="square">
+            <a:spAutoFit/>
+          </a:bodyPr>
+          <a:lstStyle/>
+          <a:p>
+            <a:r>
+              <a:rPr sz="3200" b="1">
+                <a:solidFill>
+                  <a:srgbClr val="1C1C1A"/>
+                </a:solidFill>
+                <a:latin typeface="Calibri"/>
+              </a:rPr>
+              <a:t>Four sentences, one per segment</a:t>
+            </a:r>
+          </a:p>
+        </p:txBody>
+      </p:sp>
+      <p:sp>
+        <p:nvSpPr>
+          <p:cNvPr id="4" name="TextBox 3"/>
+          <p:cNvSpPr txBox="1"/>
+          <p:nvPr/>
+        </p:nvSpPr>
+        <p:spPr>
+          <a:xfrm>
+            <a:off x="777240" y="1965960"/>
+            <a:ext cx="10607040" cy="3390900"/>
+          </a:xfrm>
+          <a:prstGeom prst="rect">
+            <a:avLst/>
+          </a:prstGeom>
+          <a:noFill/>
+        </p:spPr>
+        <p:txBody>
+          <a:bodyPr wrap="square">
+            <a:spAutoFit/>
+          </a:bodyPr>
+          <a:lstStyle/>
+          <a:p>
+            <a:pPr>
+              <a:spcAft>
+                <a:spcPts val="400"/>
+              </a:spcAft>
+            </a:pPr>
+            <a:r>
+              <a:rPr sz="1700" b="0">
+                <a:solidFill>
+                  <a:srgbClr val="2B4A7D"/>
+                </a:solidFill>
+                <a:latin typeface="Consolas"/>
+              </a:rPr>
+              <a:t>Business:    returned on 1 of 9 orders, 11.1 percent. Lowest in the file and the</a:t>
+            </a:r>
+          </a:p>
+          <a:p>
+            <a:pPr>
+              <a:spcAft>
+                <a:spcPts val="400"/>
+              </a:spcAft>
+            </a:pPr>
+            <a:r>
+              <a:rPr sz="1700" b="0">
+                <a:solidFill>
+                  <a:srgbClr val="2B4A7D"/>
+                </a:solidFill>
+                <a:latin typeface="Consolas"/>
+              </a:rPr>
+              <a:t>             smallest segment in it. One more return takes it to 22.2 percent and</a:t>
+            </a:r>
+          </a:p>
+          <a:p>
+            <a:pPr>
+              <a:spcAft>
+                <a:spcPts val="400"/>
+              </a:spcAft>
+            </a:pPr>
+            <a:r>
+              <a:rPr sz="1700" b="0">
+                <a:solidFill>
+                  <a:srgbClr val="2B4A7D"/>
+                </a:solidFill>
+                <a:latin typeface="Consolas"/>
+              </a:rPr>
+              <a:t>             behind Student, so this is not yet a finding.</a:t>
+            </a:r>
+          </a:p>
+          <a:p>
+            <a:pPr>
+              <a:spcAft>
+                <a:spcPts val="400"/>
+              </a:spcAft>
+            </a:pPr>
+          </a:p>
+          <a:p>
+            <a:pPr>
+              <a:spcAft>
+                <a:spcPts val="400"/>
+              </a:spcAft>
+            </a:pPr>
+            <a:r>
+              <a:rPr sz="1700" b="0">
+                <a:solidFill>
+                  <a:srgbClr val="2B4A7D"/>
+                </a:solidFill>
+                <a:latin typeface="Consolas"/>
+              </a:rPr>
+              <a:t>Student:     returned on 2 of 10 orders, 20.0 percent. Ten orders, and the raw file</a:t>
+            </a:r>
+          </a:p>
+          <a:p>
+            <a:pPr>
+              <a:spcAft>
+                <a:spcPts val="400"/>
+              </a:spcAft>
+            </a:pPr>
+            <a:r>
+              <a:rPr sz="1700" b="0">
+                <a:solidFill>
+                  <a:srgbClr val="2B4A7D"/>
+                </a:solidFill>
+                <a:latin typeface="Consolas"/>
+              </a:rPr>
+              <a:t>             held twelve before two failed conversion. Treat as unmeasured.</a:t>
+            </a:r>
+          </a:p>
+          <a:p>
+            <a:pPr>
+              <a:spcAft>
+                <a:spcPts val="400"/>
+              </a:spcAft>
+            </a:pPr>
+          </a:p>
+          <a:p>
+            <a:pPr>
+              <a:spcAft>
+                <a:spcPts val="400"/>
+              </a:spcAft>
+            </a:pPr>
+            <a:r>
+              <a:rPr sz="1700" b="0">
+                <a:solidFill>
+                  <a:srgbClr val="2B4A7D"/>
+                </a:solidFill>
+                <a:latin typeface="Consolas"/>
+              </a:rPr>
+              <a:t>Retail-Core: returned on 5 of 14 orders, 35.7 percent. Largest segment and the</a:t>
+            </a:r>
+          </a:p>
+          <a:p>
+            <a:pPr>
+              <a:spcAft>
+                <a:spcPts val="400"/>
+              </a:spcAft>
+            </a:pPr>
+            <a:r>
+              <a:rPr sz="1700" b="0">
+                <a:solidFill>
+                  <a:srgbClr val="2B4A7D"/>
+                </a:solidFill>
+                <a:latin typeface="Consolas"/>
+              </a:rPr>
+              <a:t>             steadiest number here. Median order Rs 1,910; the mean of Rs 36,027.14</a:t>
+            </a:r>
+          </a:p>
+          <a:p>
+            <a:pPr>
+              <a:spcAft>
+                <a:spcPts val="400"/>
+              </a:spcAft>
+            </a:pPr>
+            <a:r>
+              <a:rPr sz="1700" b="0">
+                <a:solidFill>
+                  <a:srgbClr val="2B4A7D"/>
+                </a:solidFill>
+                <a:latin typeface="Consolas"/>
+              </a:rPr>
+              <a:t>             is the Rs 480,000 order and should not be quoted.</a:t>
+            </a:r>
+          </a:p>
+          <a:p>
+            <a:pPr>
+              <a:spcAft>
+                <a:spcPts val="400"/>
+              </a:spcAft>
+            </a:pPr>
+          </a:p>
+          <a:p>
+            <a:pPr>
+              <a:spcAft>
+                <a:spcPts val="400"/>
+              </a:spcAft>
+            </a:pPr>
+            <a:r>
+              <a:rPr sz="1700" b="0">
+                <a:solidFill>
+                  <a:srgbClr val="2B4A7D"/>
+                </a:solidFill>
+                <a:latin typeface="Consolas"/>
+              </a:rPr>
+              <a:t>Retail-Plus: returned on 4 of 11 orders, 36.4 percent. Highest in the file, within</a:t>
+            </a:r>
+          </a:p>
+          <a:p>
+            <a:pPr>
+              <a:spcAft>
+                <a:spcPts val="400"/>
+              </a:spcAft>
+            </a:pPr>
+            <a:r>
+              <a:rPr sz="1700" b="0">
+                <a:solidFill>
+                  <a:srgbClr val="2B4A7D"/>
+                </a:solidFill>
+                <a:latin typeface="Consolas"/>
+              </a:rPr>
+              <a:t>             one order of Retail-Core. The two are not separated by this data.</a:t>
+            </a:r>
+          </a:p>
+        </p:txBody>
+      </p:sp>
+      <p:sp>
+        <p:nvSpPr>
+          <p:cNvPr id="5" name="TextBox 4"/>
+          <p:cNvSpPr txBox="1"/>
+          <p:nvPr/>
+        </p:nvSpPr>
+        <p:spPr>
+          <a:xfrm>
+            <a:off x="777240" y="5494020"/>
+            <a:ext cx="10607040" cy="790575"/>
+          </a:xfrm>
+          <a:prstGeom prst="rect">
+            <a:avLst/>
+          </a:prstGeom>
+          <a:noFill/>
+        </p:spPr>
+        <p:txBody>
+          <a:bodyPr wrap="square">
+            <a:spAutoFit/>
+          </a:bodyPr>
+          <a:lstStyle/>
+          <a:p>
+            <a:pPr>
+              <a:spcAft>
+                <a:spcPts val="1000"/>
+              </a:spcAft>
+            </a:pPr>
+            <a:r>
+              <a:rPr sz="2100" b="0">
+                <a:solidFill>
+                  <a:srgbClr val="1C1C1A"/>
+                </a:solidFill>
+                <a:latin typeface="Calibri"/>
+              </a:rPr>
+              <a:t>Two decline to make a claim and a third says two segments cannot be told apart. That is the sentence doing its job.</a:t>
+            </a:r>
+          </a:p>
+        </p:txBody>
+      </p:sp>
+      <p:sp>
+        <p:nvSpPr>
+          <p:cNvPr id="6" name="TextBox 5"/>
+          <p:cNvSpPr txBox="1"/>
+          <p:nvPr/>
+        </p:nvSpPr>
+        <p:spPr>
+          <a:xfrm>
+            <a:off x="777240" y="6309360"/>
+            <a:ext cx="10607040" cy="365760"/>
+          </a:xfrm>
+          <a:prstGeom prst="rect">
+            <a:avLst/>
+          </a:prstGeom>
+          <a:noFill/>
+        </p:spPr>
+        <p:txBody>
+          <a:bodyPr wrap="none">
+            <a:spAutoFit/>
+          </a:bodyPr>
+          <a:lstStyle/>
+          <a:p>
+            <a:r>
+              <a:rPr sz="1000">
+                <a:solidFill>
+                  <a:srgbClr val="5F6360"/>
+                </a:solidFill>
+                <a:latin typeface="Calibri"/>
+              </a:rPr>
+              <a:t>Week 1 Day 4, half two: the segment summary, and the count it rests on</a:t>
+            </a:r>
+          </a:p>
+        </p:txBody>
+      </p:sp>
+    </p:spTree>
+  </p:cSld>
+  <p:clrMapOvr>
+    <a:masterClrMapping/>
+  </p:clrMapOvr>
+</p:sld>
+</file>
+
+<file path=ppt/slides/slide31.xml><?xml version="1.0" encoding="utf-8"?>
+<p:sld xmlns:a="http://schemas.openxmlformats.org/drawingml/2006/main" xmlns:p="http://schemas.openxmlformats.org/presentationml/2006/main" xmlns:r="http://schemas.openxmlformats.org/officeDocument/2006/relationships">
+  <p:cSld>
+    <p:spTree>
+      <p:nvGrpSpPr>
+        <p:cNvPr id="1" name=""/>
+        <p:cNvGrpSpPr/>
+        <p:nvPr/>
+      </p:nvGrpSpPr>
+      <p:grpSpPr/>
+      <p:sp>
+        <p:nvSpPr>
+          <p:cNvPr id="2" name="Rectangle 1"/>
+          <p:cNvSpPr/>
+          <p:nvPr/>
+        </p:nvSpPr>
+        <p:spPr>
+          <a:xfrm>
+            <a:off x="0" y="0"/>
+            <a:ext cx="12191695" cy="6858000"/>
+          </a:xfrm>
+          <a:prstGeom prst="rect">
+            <a:avLst/>
+          </a:prstGeom>
+          <a:solidFill>
+            <a:srgbClr val="F7F7F5"/>
+          </a:solidFill>
+          <a:ln>
+            <a:noFill/>
+          </a:ln>
+          <a:effectLst/>
+        </p:spPr>
+        <p:style>
+          <a:lnRef idx="1">
+            <a:schemeClr val="accent1"/>
+          </a:lnRef>
+          <a:fillRef idx="3">
+            <a:schemeClr val="accent1"/>
+          </a:fillRef>
+          <a:effectRef idx="2">
+            <a:schemeClr val="accent1"/>
+          </a:effectRef>
+          <a:fontRef idx="minor">
+            <a:schemeClr val="lt1"/>
+          </a:fontRef>
+        </p:style>
+        <p:txBody>
+          <a:bodyPr rtlCol="0" anchor="ctr"/>
+          <a:lstStyle/>
+          <a:p>
+            <a:pPr algn="ctr"/>
+          </a:p>
+        </p:txBody>
+      </p:sp>
+      <p:sp>
+        <p:nvSpPr>
+          <p:cNvPr id="3" name="TextBox 2"/>
+          <p:cNvSpPr txBox="1"/>
+          <p:nvPr/>
+        </p:nvSpPr>
+        <p:spPr>
+          <a:xfrm>
+            <a:off x="777240" y="640080"/>
+            <a:ext cx="10607040" cy="1188720"/>
+          </a:xfrm>
+          <a:prstGeom prst="rect">
+            <a:avLst/>
+          </a:prstGeom>
+          <a:noFill/>
+        </p:spPr>
+        <p:txBody>
+          <a:bodyPr wrap="square">
+            <a:spAutoFit/>
+          </a:bodyPr>
+          <a:lstStyle/>
+          <a:p>
+            <a:r>
+              <a:rPr sz="3200" b="1">
+                <a:solidFill>
+                  <a:srgbClr val="1C1C1A"/>
+                </a:solidFill>
+                <a:latin typeface="Calibri"/>
+              </a:rPr>
+              <a:t>The convention this follows</a:t>
+            </a:r>
+          </a:p>
+        </p:txBody>
+      </p:sp>
+      <p:sp>
+        <p:nvSpPr>
+          <p:cNvPr id="4" name="TextBox 3"/>
+          <p:cNvSpPr txBox="1"/>
+          <p:nvPr/>
+        </p:nvSpPr>
+        <p:spPr>
+          <a:xfrm>
+            <a:off x="777240" y="1965960"/>
+            <a:ext cx="10607040" cy="1657350"/>
+          </a:xfrm>
+          <a:prstGeom prst="rect">
+            <a:avLst/>
+          </a:prstGeom>
+          <a:noFill/>
+        </p:spPr>
+        <p:txBody>
+          <a:bodyPr wrap="square">
+            <a:spAutoFit/>
+          </a:bodyPr>
+          <a:lstStyle/>
+          <a:p>
+            <a:pPr>
+              <a:spcAft>
+                <a:spcPts val="1000"/>
+              </a:spcAft>
+            </a:pPr>
+            <a:r>
+              <a:rPr sz="2100" b="0">
+                <a:solidFill>
+                  <a:srgbClr val="1C1C1A"/>
+                </a:solidFill>
+                <a:latin typeface="Calibri"/>
+              </a:rPr>
+              <a:t>Retail-Core's mean order value is Rs 36,027.14. Its median is Rs 1,910. One order separates those.</a:t>
+            </a:r>
+          </a:p>
+          <a:p>
+            <a:pPr>
+              <a:spcAft>
+                <a:spcPts val="1000"/>
+              </a:spcAft>
+            </a:pPr>
+            <a:r>
+              <a:rPr sz="2100" b="0">
+                <a:solidFill>
+                  <a:srgbClr val="1C1C1A"/>
+                </a:solidFill>
+                <a:latin typeface="Calibri"/>
+              </a:rPr>
+              <a:t>Reporting the median for money is the standing convention wherever a few very large values sit in a long tail, which is why national statistics report median household income. You applied it in half one to a column. Here it applies to a cell in a table somebody will screenshot.</a:t>
+            </a:r>
+          </a:p>
+        </p:txBody>
+      </p:sp>
+      <p:sp>
+        <p:nvSpPr>
+          <p:cNvPr id="5" name="TextBox 4"/>
+          <p:cNvSpPr txBox="1"/>
+          <p:nvPr/>
+        </p:nvSpPr>
+        <p:spPr>
+          <a:xfrm>
+            <a:off x="777240" y="6309360"/>
+            <a:ext cx="10607040" cy="365760"/>
+          </a:xfrm>
+          <a:prstGeom prst="rect">
+            <a:avLst/>
+          </a:prstGeom>
+          <a:noFill/>
+        </p:spPr>
+        <p:txBody>
+          <a:bodyPr wrap="none">
+            <a:spAutoFit/>
+          </a:bodyPr>
+          <a:lstStyle/>
+          <a:p>
+            <a:r>
+              <a:rPr sz="1000">
+                <a:solidFill>
+                  <a:srgbClr val="5F6360"/>
+                </a:solidFill>
+                <a:latin typeface="Calibri"/>
+              </a:rPr>
+              <a:t>Week 1 Day 4, half two: the segment summary, and the count it rests on</a:t>
+            </a:r>
+          </a:p>
+        </p:txBody>
+      </p:sp>
+    </p:spTree>
+  </p:cSld>
+  <p:clrMapOvr>
+    <a:masterClrMapping/>
+  </p:clrMapOvr>
+</p:sld>
+</file>
+
+<file path=ppt/slides/slide32.xml><?xml version="1.0" encoding="utf-8"?>
+<p:sld xmlns:a="http://schemas.openxmlformats.org/drawingml/2006/main" xmlns:p="http://schemas.openxmlformats.org/presentationml/2006/main" xmlns:r="http://schemas.openxmlformats.org/officeDocument/2006/relationships">
+  <p:cSld>
+    <p:spTree>
+      <p:nvGrpSpPr>
+        <p:cNvPr id="1" name=""/>
+        <p:cNvGrpSpPr/>
+        <p:nvPr/>
+      </p:nvGrpSpPr>
+      <p:grpSpPr/>
+      <p:sp>
+        <p:nvSpPr>
+          <p:cNvPr id="2" name="Rectangle 1"/>
+          <p:cNvSpPr/>
+          <p:nvPr/>
+        </p:nvSpPr>
+        <p:spPr>
+          <a:xfrm>
+            <a:off x="0" y="0"/>
+            <a:ext cx="12191695" cy="6858000"/>
+          </a:xfrm>
+          <a:prstGeom prst="rect">
+            <a:avLst/>
+          </a:prstGeom>
+          <a:solidFill>
+            <a:srgbClr val="F7F7F5"/>
+          </a:solidFill>
+          <a:ln>
+            <a:noFill/>
+          </a:ln>
+          <a:effectLst/>
+        </p:spPr>
+        <p:style>
+          <a:lnRef idx="1">
+            <a:schemeClr val="accent1"/>
+          </a:lnRef>
+          <a:fillRef idx="3">
+            <a:schemeClr val="accent1"/>
+          </a:fillRef>
+          <a:effectRef idx="2">
+            <a:schemeClr val="accent1"/>
+          </a:effectRef>
+          <a:fontRef idx="minor">
+            <a:schemeClr val="lt1"/>
+          </a:fontRef>
+        </p:style>
+        <p:txBody>
+          <a:bodyPr rtlCol="0" anchor="ctr"/>
+          <a:lstStyle/>
+          <a:p>
+            <a:pPr algn="ctr"/>
+          </a:p>
+        </p:txBody>
+      </p:sp>
+      <p:sp>
+        <p:nvSpPr>
+          <p:cNvPr id="3" name="TextBox 2"/>
+          <p:cNvSpPr txBox="1"/>
+          <p:nvPr/>
+        </p:nvSpPr>
+        <p:spPr>
+          <a:xfrm>
+            <a:off x="777240" y="640080"/>
+            <a:ext cx="10607040" cy="1188720"/>
+          </a:xfrm>
+          <a:prstGeom prst="rect">
+            <a:avLst/>
+          </a:prstGeom>
+          <a:noFill/>
+        </p:spPr>
+        <p:txBody>
+          <a:bodyPr wrap="square">
+            <a:spAutoFit/>
+          </a:bodyPr>
+          <a:lstStyle/>
+          <a:p>
+            <a:r>
+              <a:rPr sz="3200" b="1">
+                <a:solidFill>
+                  <a:srgbClr val="1C1C1A"/>
+                </a:solidFill>
+                <a:latin typeface="Calibri"/>
+              </a:rPr>
+              <a:t>The question you are not answering today</a:t>
+            </a:r>
+          </a:p>
+        </p:txBody>
+      </p:sp>
+      <p:sp>
+        <p:nvSpPr>
+          <p:cNvPr id="4" name="TextBox 3"/>
+          <p:cNvSpPr txBox="1"/>
+          <p:nvPr/>
+        </p:nvSpPr>
+        <p:spPr>
+          <a:xfrm>
+            <a:off x="777240" y="1965960"/>
+            <a:ext cx="10607040" cy="1781175"/>
+          </a:xfrm>
+          <a:prstGeom prst="rect">
+            <a:avLst/>
+          </a:prstGeom>
+          <a:noFill/>
+        </p:spPr>
+        <p:txBody>
+          <a:bodyPr wrap="square">
+            <a:spAutoFit/>
+          </a:bodyPr>
+          <a:lstStyle/>
+          <a:p>
+            <a:pPr>
+              <a:spcAft>
+                <a:spcPts val="1000"/>
+              </a:spcAft>
+            </a:pPr>
+            <a:r>
+              <a:rPr sz="2100" b="0">
+                <a:solidFill>
+                  <a:srgbClr val="1C1C1A"/>
+                </a:solidFill>
+                <a:latin typeface="Calibri"/>
+              </a:rPr>
+              <a:t>Is Business genuinely better than Retail-Plus, or is 11.1 against 36.4 what four groups of these sizes do on their own?</a:t>
+            </a:r>
+          </a:p>
+          <a:p>
+            <a:pPr>
+              <a:spcAft>
+                <a:spcPts val="1000"/>
+              </a:spcAft>
+            </a:pPr>
+            <a:r>
+              <a:rPr sz="2100" b="0">
+                <a:solidFill>
+                  <a:srgbClr val="1C1C1A"/>
+                </a:solidFill>
+                <a:latin typeface="Calibri"/>
+              </a:rPr>
+              <a:t>That question has a real answer and a method behind it, and it is Monday's session.</a:t>
+            </a:r>
+          </a:p>
+          <a:p>
+            <a:pPr>
+              <a:spcAft>
+                <a:spcPts val="1000"/>
+              </a:spcAft>
+            </a:pPr>
+            <a:r>
+              <a:rPr sz="2100" b="0">
+                <a:solidFill>
+                  <a:srgbClr val="1C1C1A"/>
+                </a:solidFill>
+                <a:latin typeface="Calibri"/>
+              </a:rPr>
+              <a:t>Today you name the question, write it in the notebook, and stop. Saying "we do not know yet, and here is what would tell us" is a complete professional answer.</a:t>
+            </a:r>
+          </a:p>
+        </p:txBody>
+      </p:sp>
+      <p:sp>
+        <p:nvSpPr>
+          <p:cNvPr id="5" name="TextBox 4"/>
+          <p:cNvSpPr txBox="1"/>
+          <p:nvPr/>
+        </p:nvSpPr>
+        <p:spPr>
+          <a:xfrm>
+            <a:off x="777240" y="6309360"/>
+            <a:ext cx="10607040" cy="365760"/>
+          </a:xfrm>
+          <a:prstGeom prst="rect">
+            <a:avLst/>
+          </a:prstGeom>
+          <a:noFill/>
+        </p:spPr>
+        <p:txBody>
+          <a:bodyPr wrap="none">
+            <a:spAutoFit/>
+          </a:bodyPr>
+          <a:lstStyle/>
+          <a:p>
+            <a:r>
+              <a:rPr sz="1000">
+                <a:solidFill>
+                  <a:srgbClr val="5F6360"/>
+                </a:solidFill>
+                <a:latin typeface="Calibri"/>
+              </a:rPr>
+              <a:t>Week 1 Day 4, half two: the segment summary, and the count it rests on</a:t>
+            </a:r>
+          </a:p>
+        </p:txBody>
+      </p:sp>
+    </p:spTree>
+  </p:cSld>
+  <p:clrMapOvr>
+    <a:masterClrMapping/>
+  </p:clrMapOvr>
+</p:sld>
+</file>
+
+<file path=ppt/slides/slide33.xml><?xml version="1.0" encoding="utf-8"?>
+<p:sld xmlns:a="http://schemas.openxmlformats.org/drawingml/2006/main" xmlns:p="http://schemas.openxmlformats.org/presentationml/2006/main" xmlns:r="http://schemas.openxmlformats.org/officeDocument/2006/relationships">
+  <p:cSld>
+    <p:spTree>
+      <p:nvGrpSpPr>
+        <p:cNvPr id="1" name=""/>
+        <p:cNvGrpSpPr/>
+        <p:nvPr/>
+      </p:nvGrpSpPr>
+      <p:grpSpPr/>
+      <p:sp>
+        <p:nvSpPr>
+          <p:cNvPr id="2" name="Rectangle 1"/>
+          <p:cNvSpPr/>
+          <p:nvPr/>
+        </p:nvSpPr>
+        <p:spPr>
+          <a:xfrm>
+            <a:off x="0" y="0"/>
+            <a:ext cx="12191695" cy="6858000"/>
+          </a:xfrm>
+          <a:prstGeom prst="rect">
+            <a:avLst/>
+          </a:prstGeom>
+          <a:solidFill>
+            <a:srgbClr val="F7F7F5"/>
+          </a:solidFill>
+          <a:ln>
+            <a:noFill/>
+          </a:ln>
+          <a:effectLst/>
+        </p:spPr>
+        <p:style>
+          <a:lnRef idx="1">
+            <a:schemeClr val="accent1"/>
+          </a:lnRef>
+          <a:fillRef idx="3">
+            <a:schemeClr val="accent1"/>
+          </a:fillRef>
+          <a:effectRef idx="2">
+            <a:schemeClr val="accent1"/>
+          </a:effectRef>
+          <a:fontRef idx="minor">
+            <a:schemeClr val="lt1"/>
+          </a:fontRef>
+        </p:style>
+        <p:txBody>
+          <a:bodyPr rtlCol="0" anchor="ctr"/>
+          <a:lstStyle/>
+          <a:p>
+            <a:pPr algn="ctr"/>
+          </a:p>
+        </p:txBody>
+      </p:sp>
+      <p:sp>
+        <p:nvSpPr>
+          <p:cNvPr id="3" name="Rounded Rectangle 2"/>
+          <p:cNvSpPr/>
+          <p:nvPr/>
+        </p:nvSpPr>
+        <p:spPr>
+          <a:xfrm>
+            <a:off x="10195560" y="384048"/>
+            <a:ext cx="1188720" cy="310896"/>
+          </a:xfrm>
+          <a:prstGeom prst="roundRect">
+            <a:avLst/>
+          </a:prstGeom>
+          <a:solidFill>
+            <a:srgbClr val="2B4A7D"/>
+          </a:solidFill>
+          <a:ln>
+            <a:noFill/>
+          </a:ln>
+          <a:effectLst/>
+        </p:spPr>
+        <p:style>
+          <a:lnRef idx="1">
+            <a:schemeClr val="accent1"/>
+          </a:lnRef>
+          <a:fillRef idx="3">
+            <a:schemeClr val="accent1"/>
+          </a:fillRef>
+          <a:effectRef idx="2">
+            <a:schemeClr val="accent1"/>
+          </a:effectRef>
+          <a:fontRef idx="minor">
+            <a:schemeClr val="lt1"/>
+          </a:fontRef>
+        </p:style>
+        <p:txBody>
+          <a:bodyPr rtlCol="0" anchor="ctr"/>
+          <a:lstStyle/>
+          <a:p>
+            <a:pPr algn="ctr"/>
+            <a:r>
+              <a:rPr sz="1100" b="1">
+                <a:solidFill>
+                  <a:srgbClr val="FFFFFF"/>
+                </a:solidFill>
+                <a:latin typeface="Calibri"/>
+              </a:rPr>
+              <a:t>DEPTH</a:t>
+            </a:r>
+          </a:p>
+        </p:txBody>
+      </p:sp>
+      <p:sp>
+        <p:nvSpPr>
+          <p:cNvPr id="4" name="TextBox 3"/>
+          <p:cNvSpPr txBox="1"/>
+          <p:nvPr/>
+        </p:nvSpPr>
+        <p:spPr>
+          <a:xfrm>
+            <a:off x="777240" y="640080"/>
+            <a:ext cx="10607040" cy="1188720"/>
+          </a:xfrm>
+          <a:prstGeom prst="rect">
+            <a:avLst/>
+          </a:prstGeom>
+          <a:noFill/>
+        </p:spPr>
+        <p:txBody>
+          <a:bodyPr wrap="square">
+            <a:spAutoFit/>
+          </a:bodyPr>
+          <a:lstStyle/>
+          <a:p>
+            <a:r>
+              <a:rPr sz="3200" b="1">
+                <a:solidFill>
+                  <a:srgbClr val="1C1C1A"/>
+                </a:solidFill>
+                <a:latin typeface="Calibri"/>
+              </a:rPr>
+              <a:t>Where the number thirty comes from, and why you should not lean on it</a:t>
+            </a:r>
+          </a:p>
+        </p:txBody>
+      </p:sp>
+      <p:sp>
+        <p:nvSpPr>
+          <p:cNvPr id="5" name="TextBox 4"/>
+          <p:cNvSpPr txBox="1"/>
+          <p:nvPr/>
+        </p:nvSpPr>
+        <p:spPr>
+          <a:xfrm>
+            <a:off x="777240" y="1965960"/>
+            <a:ext cx="10607040" cy="3638550"/>
+          </a:xfrm>
+          <a:prstGeom prst="rect">
+            <a:avLst/>
+          </a:prstGeom>
+          <a:noFill/>
+        </p:spPr>
+        <p:txBody>
+          <a:bodyPr wrap="square">
+            <a:spAutoFit/>
+          </a:bodyPr>
+          <a:lstStyle/>
+          <a:p>
+            <a:pPr>
+              <a:spcAft>
+                <a:spcPts val="1000"/>
+              </a:spcAft>
+            </a:pPr>
+            <a:r>
+              <a:rPr sz="2100" b="0">
+                <a:solidFill>
+                  <a:srgbClr val="1C1C1A"/>
+                </a:solidFill>
+                <a:latin typeface="Calibri"/>
+              </a:rPr>
+              <a:t>You will hear that a group under about thirty is too small to trust. It is a useful habit and a bad rule, and knowing why is worth more than obeying it.</a:t>
+            </a:r>
+          </a:p>
+          <a:p>
+            <a:pPr>
+              <a:spcAft>
+                <a:spcPts val="1000"/>
+              </a:spcAft>
+            </a:pPr>
+            <a:r>
+              <a:rPr sz="2100" b="0">
+                <a:solidFill>
+                  <a:srgbClr val="1C1C1A"/>
+                </a:solidFill>
+                <a:latin typeface="Calibri"/>
+              </a:rPr>
+              <a:t>The thirty is a rule of thumb from a result about how averages of samples behave as samples get larger. It is a threshold about a particular kind of approximation becoming reasonable, not a line where a number becomes true.</a:t>
+            </a:r>
+          </a:p>
+          <a:p>
+            <a:pPr>
+              <a:spcAft>
+                <a:spcPts val="1000"/>
+              </a:spcAft>
+            </a:pPr>
+            <a:r>
+              <a:rPr sz="2100" b="0">
+                <a:solidFill>
+                  <a:srgbClr val="1C1C1A"/>
+                </a:solidFill>
+                <a:latin typeface="Calibri"/>
+              </a:rPr>
+              <a:t>Two things follow. A group of forty can still be far too small when the thing you are counting is rare, because what matters is how many events you saw rather than how many rows. And a group of twenty can be perfectly informative when you are describing it rather than generalising from it.</a:t>
+            </a:r>
+          </a:p>
+          <a:p>
+            <a:pPr>
+              <a:spcAft>
+                <a:spcPts val="1000"/>
+              </a:spcAft>
+            </a:pPr>
+            <a:r>
+              <a:rPr sz="2100" b="0">
+                <a:solidFill>
+                  <a:srgbClr val="1C1C1A"/>
+                </a:solidFill>
+                <a:latin typeface="Calibri"/>
+              </a:rPr>
+              <a:t>So the honest habit is not a threshold. It is to say the count out loud and let the reader judge, which is what the sentence on the previous slide does, and to name what would settle the question, which is Monday.</a:t>
+            </a:r>
+          </a:p>
+        </p:txBody>
+      </p:sp>
+      <p:sp>
+        <p:nvSpPr>
+          <p:cNvPr id="6" name="TextBox 5"/>
+          <p:cNvSpPr txBox="1"/>
+          <p:nvPr/>
+        </p:nvSpPr>
+        <p:spPr>
+          <a:xfrm>
+            <a:off x="777240" y="6309360"/>
+            <a:ext cx="10607040" cy="365760"/>
+          </a:xfrm>
+          <a:prstGeom prst="rect">
+            <a:avLst/>
+          </a:prstGeom>
+          <a:noFill/>
+        </p:spPr>
+        <p:txBody>
+          <a:bodyPr wrap="none">
+            <a:spAutoFit/>
+          </a:bodyPr>
+          <a:lstStyle/>
+          <a:p>
+            <a:r>
+              <a:rPr sz="1000">
+                <a:solidFill>
+                  <a:srgbClr val="5F6360"/>
+                </a:solidFill>
+                <a:latin typeface="Calibri"/>
+              </a:rPr>
+              <a:t>Week 1 Day 4, half two: the segment summary, and the count it rests on</a:t>
+            </a:r>
+          </a:p>
+        </p:txBody>
+      </p:sp>
+    </p:spTree>
+  </p:cSld>
+  <p:clrMapOvr>
+    <a:masterClrMapping/>
+  </p:clrMapOvr>
+</p:sld>
+</file>
+
+<file path=ppt/slides/slide34.xml><?xml version="1.0" encoding="utf-8"?>
+<p:sld xmlns:a="http://schemas.openxmlformats.org/drawingml/2006/main" xmlns:p="http://schemas.openxmlformats.org/presentationml/2006/main" xmlns:r="http://schemas.openxmlformats.org/officeDocument/2006/relationships">
+  <p:cSld>
+    <p:spTree>
+      <p:nvGrpSpPr>
+        <p:cNvPr id="1" name=""/>
+        <p:cNvGrpSpPr/>
+        <p:nvPr/>
+      </p:nvGrpSpPr>
+      <p:grpSpPr/>
+      <p:sp>
+        <p:nvSpPr>
+          <p:cNvPr id="2" name="Rectangle 1"/>
+          <p:cNvSpPr/>
+          <p:nvPr/>
+        </p:nvSpPr>
+        <p:spPr>
+          <a:xfrm>
+            <a:off x="0" y="0"/>
+            <a:ext cx="12191695" cy="6858000"/>
+          </a:xfrm>
+          <a:prstGeom prst="rect">
+            <a:avLst/>
+          </a:prstGeom>
+          <a:solidFill>
+            <a:srgbClr val="F7F7F5"/>
+          </a:solidFill>
+          <a:ln>
+            <a:noFill/>
+          </a:ln>
+          <a:effectLst/>
+        </p:spPr>
+        <p:style>
+          <a:lnRef idx="1">
+            <a:schemeClr val="accent1"/>
+          </a:lnRef>
+          <a:fillRef idx="3">
+            <a:schemeClr val="accent1"/>
+          </a:fillRef>
+          <a:effectRef idx="2">
+            <a:schemeClr val="accent1"/>
+          </a:effectRef>
+          <a:fontRef idx="minor">
+            <a:schemeClr val="lt1"/>
+          </a:fontRef>
+        </p:style>
+        <p:txBody>
+          <a:bodyPr rtlCol="0" anchor="ctr"/>
+          <a:lstStyle/>
+          <a:p>
+            <a:pPr algn="ctr"/>
+          </a:p>
+        </p:txBody>
+      </p:sp>
+      <p:sp>
+        <p:nvSpPr>
+          <p:cNvPr id="3" name="Rounded Rectangle 2"/>
+          <p:cNvSpPr/>
+          <p:nvPr/>
+        </p:nvSpPr>
+        <p:spPr>
+          <a:xfrm>
+            <a:off x="10195560" y="384048"/>
+            <a:ext cx="1188720" cy="310896"/>
+          </a:xfrm>
+          <a:prstGeom prst="roundRect">
+            <a:avLst/>
+          </a:prstGeom>
+          <a:solidFill>
+            <a:srgbClr val="2B4A7D"/>
+          </a:solidFill>
+          <a:ln>
+            <a:noFill/>
+          </a:ln>
+          <a:effectLst/>
+        </p:spPr>
+        <p:style>
+          <a:lnRef idx="1">
+            <a:schemeClr val="accent1"/>
+          </a:lnRef>
+          <a:fillRef idx="3">
+            <a:schemeClr val="accent1"/>
+          </a:fillRef>
+          <a:effectRef idx="2">
+            <a:schemeClr val="accent1"/>
+          </a:effectRef>
+          <a:fontRef idx="minor">
+            <a:schemeClr val="lt1"/>
+          </a:fontRef>
+        </p:style>
+        <p:txBody>
+          <a:bodyPr rtlCol="0" anchor="ctr"/>
+          <a:lstStyle/>
+          <a:p>
+            <a:pPr algn="ctr"/>
+            <a:r>
+              <a:rPr sz="1100" b="1">
+                <a:solidFill>
+                  <a:srgbClr val="FFFFFF"/>
+                </a:solidFill>
+                <a:latin typeface="Calibri"/>
+              </a:rPr>
+              <a:t>DEPTH</a:t>
+            </a:r>
+          </a:p>
+        </p:txBody>
+      </p:sp>
+      <p:sp>
+        <p:nvSpPr>
+          <p:cNvPr id="4" name="TextBox 3"/>
+          <p:cNvSpPr txBox="1"/>
+          <p:nvPr/>
+        </p:nvSpPr>
+        <p:spPr>
+          <a:xfrm>
+            <a:off x="777240" y="640080"/>
+            <a:ext cx="10607040" cy="1188720"/>
+          </a:xfrm>
+          <a:prstGeom prst="rect">
+            <a:avLst/>
+          </a:prstGeom>
+          <a:noFill/>
+        </p:spPr>
+        <p:txBody>
+          <a:bodyPr wrap="square">
+            <a:spAutoFit/>
+          </a:bodyPr>
+          <a:lstStyle/>
+          <a:p>
+            <a:r>
+              <a:rPr sz="3200" b="1">
+                <a:solidFill>
+                  <a:srgbClr val="1C1C1A"/>
+                </a:solidFill>
+                <a:latin typeface="Calibri"/>
+              </a:rPr>
+              <a:t>The convention behind reporting a median, and where it comes from</a:t>
+            </a:r>
+          </a:p>
+        </p:txBody>
+      </p:sp>
+      <p:sp>
+        <p:nvSpPr>
+          <p:cNvPr id="5" name="TextBox 4"/>
+          <p:cNvSpPr txBox="1"/>
+          <p:nvPr/>
+        </p:nvSpPr>
+        <p:spPr>
+          <a:xfrm>
+            <a:off x="777240" y="1965960"/>
+            <a:ext cx="10607040" cy="3019425"/>
+          </a:xfrm>
+          <a:prstGeom prst="rect">
+            <a:avLst/>
+          </a:prstGeom>
+          <a:noFill/>
+        </p:spPr>
+        <p:txBody>
+          <a:bodyPr wrap="square">
+            <a:spAutoFit/>
+          </a:bodyPr>
+          <a:lstStyle/>
+          <a:p>
+            <a:pPr>
+              <a:spcAft>
+                <a:spcPts val="1000"/>
+              </a:spcAft>
+            </a:pPr>
+            <a:r>
+              <a:rPr sz="2100" b="0">
+                <a:solidFill>
+                  <a:srgbClr val="1C1C1A"/>
+                </a:solidFill>
+                <a:latin typeface="Calibri"/>
+              </a:rPr>
+              <a:t>Reporting the median rather than the mean on money is not this programme's preference. It is what statistical agencies do with household income, because a small number of very large incomes drag the mean away from anything a household would recognise.</a:t>
+            </a:r>
+          </a:p>
+          <a:p>
+            <a:pPr>
+              <a:spcAft>
+                <a:spcPts val="1000"/>
+              </a:spcAft>
+            </a:pPr>
+            <a:r>
+              <a:rPr sz="2100" b="0">
+                <a:solidFill>
+                  <a:srgbClr val="1C1C1A"/>
+                </a:solidFill>
+                <a:latin typeface="Calibri"/>
+              </a:rPr>
+              <a:t>The same shape appears wherever money is measured: salaries, claim sizes, invoice amounts, basket totals and order values. All of them have a floor at zero and no ceiling, so all of them have a right tail.</a:t>
+            </a:r>
+          </a:p>
+          <a:p>
+            <a:pPr>
+              <a:spcAft>
+                <a:spcPts val="1000"/>
+              </a:spcAft>
+            </a:pPr>
+            <a:r>
+              <a:rPr sz="2100" b="0">
+                <a:solidFill>
+                  <a:srgbClr val="1C1C1A"/>
+                </a:solidFill>
+                <a:latin typeface="Calibri"/>
+              </a:rPr>
+              <a:t>Retail-Core in your own table is the case in miniature. Its mean order value is Rs 36,027.14 and its median is Rs 1,910, and one order out of fourteen separates them. If you put the mean in that cell, every reader who screenshots the table carries that one order into their next meeting without knowing it.</a:t>
+            </a:r>
+          </a:p>
+        </p:txBody>
+      </p:sp>
+      <p:sp>
+        <p:nvSpPr>
+          <p:cNvPr id="6" name="TextBox 5"/>
+          <p:cNvSpPr txBox="1"/>
+          <p:nvPr/>
+        </p:nvSpPr>
+        <p:spPr>
+          <a:xfrm>
+            <a:off x="777240" y="6309360"/>
+            <a:ext cx="10607040" cy="365760"/>
+          </a:xfrm>
+          <a:prstGeom prst="rect">
+            <a:avLst/>
+          </a:prstGeom>
+          <a:noFill/>
+        </p:spPr>
+        <p:txBody>
+          <a:bodyPr wrap="none">
+            <a:spAutoFit/>
+          </a:bodyPr>
+          <a:lstStyle/>
+          <a:p>
+            <a:r>
+              <a:rPr sz="1000">
+                <a:solidFill>
+                  <a:srgbClr val="5F6360"/>
+                </a:solidFill>
+                <a:latin typeface="Calibri"/>
+              </a:rPr>
+              <a:t>Week 1 Day 4, half two: the segment summary, and the count it rests on</a:t>
+            </a:r>
+          </a:p>
+        </p:txBody>
+      </p:sp>
+    </p:spTree>
+  </p:cSld>
+  <p:clrMapOvr>
+    <a:masterClrMapping/>
+  </p:clrMapOvr>
+</p:sld>
+</file>
+
+<file path=ppt/slides/slide35.xml><?xml version="1.0" encoding="utf-8"?>
+<p:sld xmlns:a="http://schemas.openxmlformats.org/drawingml/2006/main" xmlns:p="http://schemas.openxmlformats.org/presentationml/2006/main" xmlns:r="http://schemas.openxmlformats.org/officeDocument/2006/relationships">
+  <p:cSld>
+    <p:spTree>
+      <p:nvGrpSpPr>
+        <p:cNvPr id="1" name=""/>
+        <p:cNvGrpSpPr/>
+        <p:nvPr/>
+      </p:nvGrpSpPr>
+      <p:grpSpPr/>
+      <p:sp>
+        <p:nvSpPr>
+          <p:cNvPr id="2" name="Rectangle 1"/>
+          <p:cNvSpPr/>
+          <p:nvPr/>
+        </p:nvSpPr>
+        <p:spPr>
+          <a:xfrm>
+            <a:off x="0" y="0"/>
+            <a:ext cx="12191695" cy="6858000"/>
+          </a:xfrm>
+          <a:prstGeom prst="rect">
+            <a:avLst/>
+          </a:prstGeom>
+          <a:solidFill>
+            <a:srgbClr val="F7F7F5"/>
+          </a:solidFill>
+          <a:ln>
+            <a:noFill/>
+          </a:ln>
+          <a:effectLst/>
+        </p:spPr>
+        <p:style>
+          <a:lnRef idx="1">
+            <a:schemeClr val="accent1"/>
+          </a:lnRef>
+          <a:fillRef idx="3">
+            <a:schemeClr val="accent1"/>
+          </a:fillRef>
+          <a:effectRef idx="2">
+            <a:schemeClr val="accent1"/>
+          </a:effectRef>
+          <a:fontRef idx="minor">
+            <a:schemeClr val="lt1"/>
+          </a:fontRef>
+        </p:style>
+        <p:txBody>
+          <a:bodyPr rtlCol="0" anchor="ctr"/>
+          <a:lstStyle/>
+          <a:p>
+            <a:pPr algn="ctr"/>
+          </a:p>
+        </p:txBody>
+      </p:sp>
+      <p:sp>
+        <p:nvSpPr>
+          <p:cNvPr id="3" name="TextBox 2"/>
+          <p:cNvSpPr txBox="1"/>
+          <p:nvPr/>
+        </p:nvSpPr>
+        <p:spPr>
+          <a:xfrm>
+            <a:off x="777240" y="640080"/>
+            <a:ext cx="10607040" cy="1188720"/>
+          </a:xfrm>
+          <a:prstGeom prst="rect">
+            <a:avLst/>
+          </a:prstGeom>
+          <a:noFill/>
+        </p:spPr>
+        <p:txBody>
+          <a:bodyPr wrap="square">
+            <a:spAutoFit/>
+          </a:bodyPr>
+          <a:lstStyle/>
+          <a:p>
+            <a:r>
+              <a:rPr sz="3200" b="1">
+                <a:solidFill>
+                  <a:srgbClr val="1C1C1A"/>
+                </a:solidFill>
+                <a:latin typeface="Calibri"/>
+              </a:rPr>
+              <a:t>The decision card</a:t>
+            </a:r>
+          </a:p>
+        </p:txBody>
+      </p:sp>
+      <p:graphicFrame>
+        <p:nvGraphicFramePr>
+          <p:cNvPr id="4" name="Table 3"/>
+          <p:cNvGraphicFramePr>
+            <a:graphicFrameLocks noGrp="1"/>
+          </p:cNvGraphicFramePr>
+          <p:nvPr/>
+        </p:nvGraphicFramePr>
+        <p:xfrm>
+          <a:off x="777240" y="1965960"/>
+          <a:ext cx="10607040" cy="2304288"/>
+        </p:xfrm>
+        <a:graphic>
+          <a:graphicData uri="http://schemas.openxmlformats.org/drawingml/2006/table">
+            <a:tbl>
+              <a:tblPr firstRow="1" bandRow="1">
+                <a:tableStyleId>{5C22544A-7EE6-4342-B048-85BDC9FD1C3A}</a:tableStyleId>
+              </a:tblPr>
+              <a:tblGrid>
+                <a:gridCol w="5303520"/>
+                <a:gridCol w="5303520"/>
+              </a:tblGrid>
+              <a:tr h="384048">
+                <a:tc>
+                  <a:txBody>
+                    <a:bodyPr/>
+                    <a:lstStyle/>
+                    <a:p>
+                      <a:r>
+                        <a:rPr sz="1300" b="1">
+                          <a:solidFill>
+                            <a:srgbClr val="2B4A7D"/>
+                          </a:solidFill>
+                          <a:latin typeface="Calibri"/>
+                        </a:rPr>
+                        <a:t>Before you send a rate</a:t>
+                      </a:r>
+                    </a:p>
+                  </a:txBody>
+                  <a:tcPr marT="25400" marB="25400"/>
+                </a:tc>
+                <a:tc>
+                  <a:txBody>
+                    <a:bodyPr/>
+                    <a:lstStyle/>
+                    <a:p>
+                      <a:r>
+                        <a:rPr sz="1300" b="1">
+                          <a:solidFill>
+                            <a:srgbClr val="2B4A7D"/>
+                          </a:solidFill>
+                          <a:latin typeface="Calibri"/>
+                        </a:rPr>
+                        <a:t>Check</a:t>
+                      </a:r>
+                    </a:p>
+                  </a:txBody>
+                  <a:tcPr marT="25400" marB="25400"/>
+                </a:tc>
+              </a:tr>
+              <a:tr h="384048">
+                <a:tc>
+                  <a:txBody>
+                    <a:bodyPr/>
+                    <a:lstStyle/>
+                    <a:p>
+                      <a:r>
+                        <a:rPr sz="1400" b="0">
+                          <a:solidFill>
+                            <a:srgbClr val="1C1C1A"/>
+                          </a:solidFill>
+                          <a:latin typeface="Calibri"/>
+                        </a:rPr>
+                        <a:t>Is the denominator on the same line as the number</a:t>
+                      </a:r>
+                    </a:p>
+                  </a:txBody>
+                  <a:tcPr marT="25400" marB="25400"/>
+                </a:tc>
+                <a:tc>
+                  <a:txBody>
+                    <a:bodyPr/>
+                    <a:lstStyle/>
+                    <a:p>
+                      <a:r>
+                        <a:rPr sz="1400" b="0">
+                          <a:solidFill>
+                            <a:srgbClr val="1C1C1A"/>
+                          </a:solidFill>
+                          <a:latin typeface="Calibri"/>
+                        </a:rPr>
+                        <a:t>If not, it is not ready</a:t>
+                      </a:r>
+                    </a:p>
+                  </a:txBody>
+                  <a:tcPr marT="25400" marB="25400"/>
+                </a:tc>
+              </a:tr>
+              <a:tr h="384048">
+                <a:tc>
+                  <a:txBody>
+                    <a:bodyPr/>
+                    <a:lstStyle/>
+                    <a:p>
+                      <a:r>
+                        <a:rPr sz="1400" b="0">
+                          <a:solidFill>
+                            <a:srgbClr val="1C1C1A"/>
+                          </a:solidFill>
+                          <a:latin typeface="Calibri"/>
+                        </a:rPr>
+                        <a:t>Is any group under about 30 orders</a:t>
+                      </a:r>
+                    </a:p>
+                  </a:txBody>
+                  <a:tcPr marT="25400" marB="25400"/>
+                </a:tc>
+                <a:tc>
+                  <a:txBody>
+                    <a:bodyPr/>
+                    <a:lstStyle/>
+                    <a:p>
+                      <a:r>
+                        <a:rPr sz="1400" b="0">
+                          <a:solidFill>
+                            <a:srgbClr val="1C1C1A"/>
+                          </a:solidFill>
+                          <a:latin typeface="Calibri"/>
+                        </a:rPr>
+                        <a:t>Say so in the sentence, in words</a:t>
+                      </a:r>
+                    </a:p>
+                  </a:txBody>
+                  <a:tcPr marT="25400" marB="25400"/>
+                </a:tc>
+              </a:tr>
+              <a:tr h="384048">
+                <a:tc>
+                  <a:txBody>
+                    <a:bodyPr/>
+                    <a:lstStyle/>
+                    <a:p>
+                      <a:r>
+                        <a:rPr sz="1400" b="0">
+                          <a:solidFill>
+                            <a:srgbClr val="1C1C1A"/>
+                          </a:solidFill>
+                          <a:latin typeface="Calibri"/>
+                        </a:rPr>
+                        <a:t>Did you rank groups of very different sizes</a:t>
+                      </a:r>
+                    </a:p>
+                  </a:txBody>
+                  <a:tcPr marT="25400" marB="25400"/>
+                </a:tc>
+                <a:tc>
+                  <a:txBody>
+                    <a:bodyPr/>
+                    <a:lstStyle/>
+                    <a:p>
+                      <a:r>
+                        <a:rPr sz="1400" b="0">
+                          <a:solidFill>
+                            <a:srgbClr val="1C1C1A"/>
+                          </a:solidFill>
+                          <a:latin typeface="Calibri"/>
+                        </a:rPr>
+                        <a:t>Say what the ranking is partly measuring</a:t>
+                      </a:r>
+                    </a:p>
+                  </a:txBody>
+                  <a:tcPr marT="25400" marB="25400"/>
+                </a:tc>
+              </a:tr>
+              <a:tr h="384048">
+                <a:tc>
+                  <a:txBody>
+                    <a:bodyPr/>
+                    <a:lstStyle/>
+                    <a:p>
+                      <a:r>
+                        <a:rPr sz="1400" b="0">
+                          <a:solidFill>
+                            <a:srgbClr val="1C1C1A"/>
+                          </a:solidFill>
+                          <a:latin typeface="Calibri"/>
+                        </a:rPr>
+                        <a:t>Is a mean quoted on a money column</a:t>
+                      </a:r>
+                    </a:p>
+                  </a:txBody>
+                  <a:tcPr marT="25400" marB="25400"/>
+                </a:tc>
+                <a:tc>
+                  <a:txBody>
+                    <a:bodyPr/>
+                    <a:lstStyle/>
+                    <a:p>
+                      <a:r>
+                        <a:rPr sz="1400" b="0">
+                          <a:solidFill>
+                            <a:srgbClr val="1C1C1A"/>
+                          </a:solidFill>
+                          <a:latin typeface="Calibri"/>
+                        </a:rPr>
+                        <a:t>Replace it with the median</a:t>
+                      </a:r>
+                    </a:p>
+                  </a:txBody>
+                  <a:tcPr marT="25400" marB="25400"/>
+                </a:tc>
+              </a:tr>
+              <a:tr h="384048">
+                <a:tc>
+                  <a:txBody>
+                    <a:bodyPr/>
+                    <a:lstStyle/>
+                    <a:p>
+                      <a:r>
+                        <a:rPr sz="1400" b="0">
+                          <a:solidFill>
+                            <a:srgbClr val="1C1C1A"/>
+                          </a:solidFill>
+                          <a:latin typeface="Calibri"/>
+                        </a:rPr>
+                        <a:t>Is a difference being called real</a:t>
+                      </a:r>
+                    </a:p>
+                  </a:txBody>
+                  <a:tcPr marT="25400" marB="25400"/>
+                </a:tc>
+                <a:tc>
+                  <a:txBody>
+                    <a:bodyPr/>
+                    <a:lstStyle/>
+                    <a:p>
+                      <a:r>
+                        <a:rPr sz="1400" b="0">
+                          <a:solidFill>
+                            <a:srgbClr val="1C1C1A"/>
+                          </a:solidFill>
+                          <a:latin typeface="Calibri"/>
+                        </a:rPr>
+                        <a:t>Park it and name what would settle it</a:t>
+                      </a:r>
+                    </a:p>
+                  </a:txBody>
+                  <a:tcPr marT="25400" marB="25400"/>
+                </a:tc>
+              </a:tr>
+            </a:tbl>
+          </a:graphicData>
+        </a:graphic>
+      </p:graphicFrame>
+      <p:sp>
+        <p:nvSpPr>
+          <p:cNvPr id="5" name="TextBox 4"/>
+          <p:cNvSpPr txBox="1"/>
+          <p:nvPr/>
+        </p:nvSpPr>
+        <p:spPr>
+          <a:xfrm>
+            <a:off x="777240" y="6309360"/>
+            <a:ext cx="10607040" cy="365760"/>
+          </a:xfrm>
+          <a:prstGeom prst="rect">
+            <a:avLst/>
+          </a:prstGeom>
+          <a:noFill/>
+        </p:spPr>
+        <p:txBody>
+          <a:bodyPr wrap="none">
+            <a:spAutoFit/>
+          </a:bodyPr>
+          <a:lstStyle/>
+          <a:p>
+            <a:r>
+              <a:rPr sz="1000">
+                <a:solidFill>
+                  <a:srgbClr val="5F6360"/>
+                </a:solidFill>
+                <a:latin typeface="Calibri"/>
+              </a:rPr>
+              <a:t>Week 1 Day 4, half two: the segment summary, and the count it rests on</a:t>
+            </a:r>
+          </a:p>
+        </p:txBody>
+      </p:sp>
+    </p:spTree>
+  </p:cSld>
+  <p:clrMapOvr>
+    <a:masterClrMapping/>
+  </p:clrMapOvr>
+</p:sld>
+</file>
+
+<file path=ppt/slides/slide36.xml><?xml version="1.0" encoding="utf-8"?>
+<p:sld xmlns:a="http://schemas.openxmlformats.org/drawingml/2006/main" xmlns:p="http://schemas.openxmlformats.org/presentationml/2006/main" xmlns:r="http://schemas.openxmlformats.org/officeDocument/2006/relationships">
+  <p:cSld>
+    <p:spTree>
+      <p:nvGrpSpPr>
+        <p:cNvPr id="1" name=""/>
+        <p:cNvGrpSpPr/>
+        <p:nvPr/>
+      </p:nvGrpSpPr>
+      <p:grpSpPr/>
+      <p:sp>
+        <p:nvSpPr>
+          <p:cNvPr id="2" name="Rectangle 1"/>
+          <p:cNvSpPr/>
+          <p:nvPr/>
+        </p:nvSpPr>
+        <p:spPr>
+          <a:xfrm>
+            <a:off x="0" y="0"/>
+            <a:ext cx="12191695" cy="6858000"/>
+          </a:xfrm>
+          <a:prstGeom prst="rect">
+            <a:avLst/>
+          </a:prstGeom>
+          <a:solidFill>
+            <a:srgbClr val="2B4A7D"/>
+          </a:solidFill>
+          <a:ln>
+            <a:noFill/>
+          </a:ln>
+          <a:effectLst/>
+        </p:spPr>
+        <p:style>
+          <a:lnRef idx="1">
+            <a:schemeClr val="accent1"/>
+          </a:lnRef>
+          <a:fillRef idx="3">
+            <a:schemeClr val="accent1"/>
+          </a:fillRef>
+          <a:effectRef idx="2">
+            <a:schemeClr val="accent1"/>
+          </a:effectRef>
+          <a:fontRef idx="minor">
+            <a:schemeClr val="lt1"/>
+          </a:fontRef>
+        </p:style>
+        <p:txBody>
+          <a:bodyPr rtlCol="0" anchor="ctr"/>
+          <a:lstStyle/>
+          <a:p>
+            <a:pPr algn="ctr"/>
+          </a:p>
+        </p:txBody>
+      </p:sp>
+      <p:sp>
+        <p:nvSpPr>
+          <p:cNvPr id="3" name="TextBox 2"/>
+          <p:cNvSpPr txBox="1"/>
+          <p:nvPr/>
+        </p:nvSpPr>
+        <p:spPr>
+          <a:xfrm>
+            <a:off x="777240" y="640080"/>
+            <a:ext cx="10607040" cy="1188720"/>
+          </a:xfrm>
+          <a:prstGeom prst="rect">
+            <a:avLst/>
+          </a:prstGeom>
+          <a:noFill/>
+        </p:spPr>
+        <p:txBody>
+          <a:bodyPr wrap="square">
+            <a:spAutoFit/>
+          </a:bodyPr>
+          <a:lstStyle/>
+          <a:p>
+            <a:pPr algn="ctr"/>
+            <a:r>
               <a:rPr sz="3600" b="1">
                 <a:solidFill>
+                  <a:srgbClr val="FFFFFF"/>
+                </a:solidFill>
+                <a:latin typeface="Calibri"/>
+              </a:rPr>
+              <a:t>SECTION 5: THE INTERVIEW BLOCK</a:t>
+            </a:r>
+          </a:p>
+        </p:txBody>
+      </p:sp>
+      <p:sp>
+        <p:nvSpPr>
+          <p:cNvPr id="4" name="TextBox 3"/>
+          <p:cNvSpPr txBox="1"/>
+          <p:nvPr/>
+        </p:nvSpPr>
+        <p:spPr>
+          <a:xfrm>
+            <a:off x="777240" y="1965960"/>
+            <a:ext cx="10607040" cy="790575"/>
+          </a:xfrm>
+          <a:prstGeom prst="rect">
+            <a:avLst/>
+          </a:prstGeom>
+          <a:noFill/>
+        </p:spPr>
+        <p:txBody>
+          <a:bodyPr wrap="square">
+            <a:spAutoFit/>
+          </a:bodyPr>
+          <a:lstStyle/>
+          <a:p>
+            <a:pPr algn="ctr">
+              <a:spcAft>
+                <a:spcPts val="1000"/>
+              </a:spcAft>
+            </a:pPr>
+            <a:r>
+              <a:rPr sz="2100" b="0">
+                <a:solidFill>
+                  <a:srgbClr val="FFFFFF"/>
+                </a:solidFill>
+                <a:latin typeface="Calibri"/>
+              </a:rPr>
+              <a:t>[one column] &gt; [what is typical] &gt; [what one order does] &gt; [what the shape says] &gt; </a:t>
+            </a:r>
+            <a:r>
+              <a:rPr sz="2100" b="1">
+                <a:solidFill>
+                  <a:srgbClr val="FFFFFF"/>
+                </a:solidFill>
+                <a:latin typeface="Calibri"/>
+              </a:rPr>
+              <a:t>[per segment, with denominators]</a:t>
+            </a:r>
+          </a:p>
+        </p:txBody>
+      </p:sp>
+      <p:sp>
+        <p:nvSpPr>
+          <p:cNvPr id="5" name="TextBox 4"/>
+          <p:cNvSpPr txBox="1"/>
+          <p:nvPr/>
+        </p:nvSpPr>
+        <p:spPr>
+          <a:xfrm>
+            <a:off x="777240" y="6309360"/>
+            <a:ext cx="10607040" cy="365760"/>
+          </a:xfrm>
+          <a:prstGeom prst="rect">
+            <a:avLst/>
+          </a:prstGeom>
+          <a:noFill/>
+        </p:spPr>
+        <p:txBody>
+          <a:bodyPr wrap="none">
+            <a:spAutoFit/>
+          </a:bodyPr>
+          <a:lstStyle/>
+          <a:p>
+            <a:r>
+              <a:rPr sz="1000">
+                <a:solidFill>
+                  <a:srgbClr val="5F6360"/>
+                </a:solidFill>
+                <a:latin typeface="Calibri"/>
+              </a:rPr>
+              <a:t>Week 1 Day 4, half two: the segment summary, and the count it rests on</a:t>
+            </a:r>
+          </a:p>
+        </p:txBody>
+      </p:sp>
+    </p:spTree>
+  </p:cSld>
+  <p:clrMapOvr>
+    <a:masterClrMapping/>
+  </p:clrMapOvr>
+</p:sld>
+</file>
+
+<file path=ppt/slides/slide37.xml><?xml version="1.0" encoding="utf-8"?>
+<p:sld xmlns:a="http://schemas.openxmlformats.org/drawingml/2006/main" xmlns:p="http://schemas.openxmlformats.org/presentationml/2006/main" xmlns:r="http://schemas.openxmlformats.org/officeDocument/2006/relationships">
+  <p:cSld>
+    <p:spTree>
+      <p:nvGrpSpPr>
+        <p:cNvPr id="1" name=""/>
+        <p:cNvGrpSpPr/>
+        <p:nvPr/>
+      </p:nvGrpSpPr>
+      <p:grpSpPr/>
+      <p:sp>
+        <p:nvSpPr>
+          <p:cNvPr id="2" name="Rectangle 1"/>
+          <p:cNvSpPr/>
+          <p:nvPr/>
+        </p:nvSpPr>
+        <p:spPr>
+          <a:xfrm>
+            <a:off x="0" y="0"/>
+            <a:ext cx="12191695" cy="6858000"/>
+          </a:xfrm>
+          <a:prstGeom prst="rect">
+            <a:avLst/>
+          </a:prstGeom>
+          <a:solidFill>
+            <a:srgbClr val="F7F7F5"/>
+          </a:solidFill>
+          <a:ln>
+            <a:noFill/>
+          </a:ln>
+          <a:effectLst/>
+        </p:spPr>
+        <p:style>
+          <a:lnRef idx="1">
+            <a:schemeClr val="accent1"/>
+          </a:lnRef>
+          <a:fillRef idx="3">
+            <a:schemeClr val="accent1"/>
+          </a:fillRef>
+          <a:effectRef idx="2">
+            <a:schemeClr val="accent1"/>
+          </a:effectRef>
+          <a:fontRef idx="minor">
+            <a:schemeClr val="lt1"/>
+          </a:fontRef>
+        </p:style>
+        <p:txBody>
+          <a:bodyPr rtlCol="0" anchor="ctr"/>
+          <a:lstStyle/>
+          <a:p>
+            <a:pPr algn="ctr"/>
+          </a:p>
+        </p:txBody>
+      </p:sp>
+      <p:sp>
+        <p:nvSpPr>
+          <p:cNvPr id="3" name="TextBox 2"/>
+          <p:cNvSpPr txBox="1"/>
+          <p:nvPr/>
+        </p:nvSpPr>
+        <p:spPr>
+          <a:xfrm>
+            <a:off x="777240" y="640080"/>
+            <a:ext cx="10607040" cy="1188720"/>
+          </a:xfrm>
+          <a:prstGeom prst="rect">
+            <a:avLst/>
+          </a:prstGeom>
+          <a:noFill/>
+        </p:spPr>
+        <p:txBody>
+          <a:bodyPr wrap="square">
+            <a:spAutoFit/>
+          </a:bodyPr>
+          <a:lstStyle/>
+          <a:p>
+            <a:r>
+              <a:rPr sz="3200" b="1">
+                <a:solidFill>
                   <a:srgbClr val="1C1C1A"/>
                 </a:solidFill>
                 <a:latin typeface="Calibri"/>
               </a:rPr>
-              <a:t>Where we are</a:t>
+              <a:t>Question 1: why does every rate need its denominator</a:t>
             </a:r>
           </a:p>
         </p:txBody>
@@ -7691,7 +11610,7 @@
         <p:spPr>
           <a:xfrm>
             <a:off x="777240" y="1965960"/>
-            <a:ext cx="10607040" cy="4206240"/>
+            <a:ext cx="10607040" cy="3019425"/>
           </a:xfrm>
           <a:prstGeom prst="rect">
             <a:avLst/>
@@ -7704,25 +11623,78 @@
           </a:bodyPr>
           <a:lstStyle/>
           <a:p>
-            <a:r>
-              <a:rPr sz="2100">
+            <a:pPr>
+              <a:spcAft>
+                <a:spcPts val="1000"/>
+              </a:spcAft>
+            </a:pPr>
+            <a:r>
+              <a:rPr sz="2100" b="1">
                 <a:solidFill>
                   <a:srgbClr val="1C1C1A"/>
                 </a:solidFill>
                 <a:latin typeface="Calibri"/>
               </a:rPr>
-              <a:t>[one column] &gt; [what is typical] &gt; [what one order does] &gt; [what the shape says] &gt; [per segment, with denominators]</a:t>
-            </a:r>
-          </a:p>
-          <a:p>
-            <a:r>
-              <a:rPr sz="2100">
+              <a:t>What it is really testing.</a:t>
+            </a:r>
+            <a:r>
+              <a:rPr sz="2100" b="0">
                 <a:solidFill>
                   <a:srgbClr val="1C1C1A"/>
                 </a:solidFill>
                 <a:latin typeface="Calibri"/>
               </a:rPr>
-              <a:t>You can now pick an honest statistic for a column. Half two splits the file by segment, computes that statistic per group, and attaches the one thing that decides whether the answer means anything.</a:t>
+              <a:t> Whether you have ever been burned by a percentage, or only computed them.</a:t>
+            </a:r>
+          </a:p>
+          <a:p>
+            <a:pPr>
+              <a:spcAft>
+                <a:spcPts val="1000"/>
+              </a:spcAft>
+            </a:pPr>
+            <a:r>
+              <a:rPr sz="2100" b="1">
+                <a:solidFill>
+                  <a:srgbClr val="1C1C1A"/>
+                </a:solidFill>
+                <a:latin typeface="Calibri"/>
+              </a:rPr>
+              <a:t>The answer, in three beats.</a:t>
+            </a:r>
+            <a:r>
+              <a:rPr sz="2100" b="0">
+                <a:solidFill>
+                  <a:srgbClr val="1C1C1A"/>
+                </a:solidFill>
+                <a:latin typeface="Calibri"/>
+              </a:rPr>
+              <a:t> A rate is two numbers and the convention prints one of them, so the reader cannot tell 1 of 9 from 100 of 900 and those are different claims. The denominator decides how much the number can move: one record changes a rate over nine by 11.1 points and a rate over 1,200 by 0.08. In today's table the best segment returns on 1 of 9 orders, and one more return takes it from best to fourth, so the ranking is one order deep.</a:t>
+            </a:r>
+          </a:p>
+          <a:p>
+            <a:pPr>
+              <a:spcAft>
+                <a:spcPts val="1000"/>
+              </a:spcAft>
+            </a:pPr>
+            <a:r>
+              <a:rPr sz="2100" b="1">
+                <a:solidFill>
+                  <a:srgbClr val="1C1C1A"/>
+                </a:solidFill>
+                <a:latin typeface="Calibri"/>
+              </a:rPr>
+              <a:t>The follow-up.</a:t>
+            </a:r>
+            <a:r>
+              <a:rPr sz="2100" b="0">
+                <a:solidFill>
+                  <a:srgbClr val="1C1C1A"/>
+                </a:solidFill>
+                <a:latin typeface="Calibri"/>
+              </a:rPr>
+              <a:t> "How do you present it then?" The count on the same line as the number, and a sentence saying what the number does not yet support. A caveat that lives in my head gets lost between my notebook and somebody else's slide.</a:t>
             </a:r>
           </a:p>
         </p:txBody>
@@ -7735,7 +11707,7 @@
         </p:nvSpPr>
         <p:spPr>
           <a:xfrm>
-            <a:off x="777240" y="6263640"/>
+            <a:off x="777240" y="6309360"/>
             <a:ext cx="10607040" cy="365760"/>
           </a:xfrm>
           <a:prstGeom prst="rect">
@@ -7756,7 +11728,429 @@
                 </a:solidFill>
                 <a:latin typeface="Calibri"/>
               </a:rPr>
-              <a:t>Week 1 Day 4, half two: the segment summary and its denominators</a:t>
+              <a:t>Week 1 Day 4, half two: the segment summary, and the count it rests on</a:t>
+            </a:r>
+          </a:p>
+        </p:txBody>
+      </p:sp>
+    </p:spTree>
+  </p:cSld>
+  <p:clrMapOvr>
+    <a:masterClrMapping/>
+  </p:clrMapOvr>
+</p:sld>
+</file>
+
+<file path=ppt/slides/slide38.xml><?xml version="1.0" encoding="utf-8"?>
+<p:sld xmlns:a="http://schemas.openxmlformats.org/drawingml/2006/main" xmlns:p="http://schemas.openxmlformats.org/presentationml/2006/main" xmlns:r="http://schemas.openxmlformats.org/officeDocument/2006/relationships">
+  <p:cSld>
+    <p:spTree>
+      <p:nvGrpSpPr>
+        <p:cNvPr id="1" name=""/>
+        <p:cNvGrpSpPr/>
+        <p:nvPr/>
+      </p:nvGrpSpPr>
+      <p:grpSpPr/>
+      <p:sp>
+        <p:nvSpPr>
+          <p:cNvPr id="2" name="Rectangle 1"/>
+          <p:cNvSpPr/>
+          <p:nvPr/>
+        </p:nvSpPr>
+        <p:spPr>
+          <a:xfrm>
+            <a:off x="0" y="0"/>
+            <a:ext cx="12191695" cy="6858000"/>
+          </a:xfrm>
+          <a:prstGeom prst="rect">
+            <a:avLst/>
+          </a:prstGeom>
+          <a:solidFill>
+            <a:srgbClr val="F7F7F5"/>
+          </a:solidFill>
+          <a:ln>
+            <a:noFill/>
+          </a:ln>
+          <a:effectLst/>
+        </p:spPr>
+        <p:style>
+          <a:lnRef idx="1">
+            <a:schemeClr val="accent1"/>
+          </a:lnRef>
+          <a:fillRef idx="3">
+            <a:schemeClr val="accent1"/>
+          </a:fillRef>
+          <a:effectRef idx="2">
+            <a:schemeClr val="accent1"/>
+          </a:effectRef>
+          <a:fontRef idx="minor">
+            <a:schemeClr val="lt1"/>
+          </a:fontRef>
+        </p:style>
+        <p:txBody>
+          <a:bodyPr rtlCol="0" anchor="ctr"/>
+          <a:lstStyle/>
+          <a:p>
+            <a:pPr algn="ctr"/>
+          </a:p>
+        </p:txBody>
+      </p:sp>
+      <p:sp>
+        <p:nvSpPr>
+          <p:cNvPr id="3" name="TextBox 2"/>
+          <p:cNvSpPr txBox="1"/>
+          <p:nvPr/>
+        </p:nvSpPr>
+        <p:spPr>
+          <a:xfrm>
+            <a:off x="777240" y="640080"/>
+            <a:ext cx="10607040" cy="1188720"/>
+          </a:xfrm>
+          <a:prstGeom prst="rect">
+            <a:avLst/>
+          </a:prstGeom>
+          <a:noFill/>
+        </p:spPr>
+        <p:txBody>
+          <a:bodyPr wrap="square">
+            <a:spAutoFit/>
+          </a:bodyPr>
+          <a:lstStyle/>
+          <a:p>
+            <a:r>
+              <a:rPr sz="3200" b="1">
+                <a:solidFill>
+                  <a:srgbClr val="1C1C1A"/>
+                </a:solidFill>
+                <a:latin typeface="Calibri"/>
+              </a:rPr>
+              <a:t>Question 2: your smallest segment has the best conversion rate, what do you say</a:t>
+            </a:r>
+          </a:p>
+        </p:txBody>
+      </p:sp>
+      <p:sp>
+        <p:nvSpPr>
+          <p:cNvPr id="4" name="TextBox 3"/>
+          <p:cNvSpPr txBox="1"/>
+          <p:nvPr/>
+        </p:nvSpPr>
+        <p:spPr>
+          <a:xfrm>
+            <a:off x="777240" y="1965960"/>
+            <a:ext cx="10607040" cy="2771775"/>
+          </a:xfrm>
+          <a:prstGeom prst="rect">
+            <a:avLst/>
+          </a:prstGeom>
+          <a:noFill/>
+        </p:spPr>
+        <p:txBody>
+          <a:bodyPr wrap="square">
+            <a:spAutoFit/>
+          </a:bodyPr>
+          <a:lstStyle/>
+          <a:p>
+            <a:pPr>
+              <a:spcAft>
+                <a:spcPts val="1000"/>
+              </a:spcAft>
+            </a:pPr>
+            <a:r>
+              <a:rPr sz="2100" b="0">
+                <a:solidFill>
+                  <a:srgbClr val="1C1C1A"/>
+                </a:solidFill>
+                <a:latin typeface="Calibri"/>
+              </a:rPr>
+              <a:t>This programme's own calibration, and it is close to a real first task.</a:t>
+            </a:r>
+          </a:p>
+          <a:p>
+            <a:pPr>
+              <a:spcAft>
+                <a:spcPts val="1000"/>
+              </a:spcAft>
+            </a:pPr>
+            <a:r>
+              <a:rPr sz="2100" b="1">
+                <a:solidFill>
+                  <a:srgbClr val="1C1C1A"/>
+                </a:solidFill>
+                <a:latin typeface="Calibri"/>
+              </a:rPr>
+              <a:t>The answer.</a:t>
+            </a:r>
+            <a:r>
+              <a:rPr sz="2100" b="0">
+                <a:solidFill>
+                  <a:srgbClr val="1C1C1A"/>
+                </a:solidFill>
+                <a:latin typeface="Calibri"/>
+              </a:rPr>
+              <a:t> I say it is the smallest segment and the best rate, in that order, and that I cannot yet separate those two facts. Small groups produce extreme rates in both directions with nothing causing it, so a ranking of groups of very different sizes is partly a ranking by size. I would give the count beside every rate, say how many events the leader rests on, and name what would settle it rather than pretending the data already has.</a:t>
+            </a:r>
+          </a:p>
+          <a:p>
+            <a:pPr>
+              <a:spcAft>
+                <a:spcPts val="1000"/>
+              </a:spcAft>
+            </a:pPr>
+            <a:r>
+              <a:rPr sz="2100" b="1">
+                <a:solidFill>
+                  <a:srgbClr val="1C1C1A"/>
+                </a:solidFill>
+                <a:latin typeface="Calibri"/>
+              </a:rPr>
+              <a:t>The follow-up.</a:t>
+            </a:r>
+            <a:r>
+              <a:rPr sz="2100" b="0">
+                <a:solidFill>
+                  <a:srgbClr val="1C1C1A"/>
+                </a:solidFill>
+                <a:latin typeface="Calibri"/>
+              </a:rPr>
+              <a:t> "What would settle it?" A formal comparison of the two proportions, which is the method arriving on Monday, or more data on the small group, which is usually cheaper than it sounds.</a:t>
+            </a:r>
+          </a:p>
+        </p:txBody>
+      </p:sp>
+      <p:sp>
+        <p:nvSpPr>
+          <p:cNvPr id="5" name="TextBox 4"/>
+          <p:cNvSpPr txBox="1"/>
+          <p:nvPr/>
+        </p:nvSpPr>
+        <p:spPr>
+          <a:xfrm>
+            <a:off x="777240" y="6309360"/>
+            <a:ext cx="10607040" cy="365760"/>
+          </a:xfrm>
+          <a:prstGeom prst="rect">
+            <a:avLst/>
+          </a:prstGeom>
+          <a:noFill/>
+        </p:spPr>
+        <p:txBody>
+          <a:bodyPr wrap="none">
+            <a:spAutoFit/>
+          </a:bodyPr>
+          <a:lstStyle/>
+          <a:p>
+            <a:r>
+              <a:rPr sz="1000">
+                <a:solidFill>
+                  <a:srgbClr val="5F6360"/>
+                </a:solidFill>
+                <a:latin typeface="Calibri"/>
+              </a:rPr>
+              <a:t>Week 1 Day 4, half two: the segment summary, and the count it rests on</a:t>
+            </a:r>
+          </a:p>
+        </p:txBody>
+      </p:sp>
+    </p:spTree>
+  </p:cSld>
+  <p:clrMapOvr>
+    <a:masterClrMapping/>
+  </p:clrMapOvr>
+</p:sld>
+</file>
+
+<file path=ppt/slides/slide39.xml><?xml version="1.0" encoding="utf-8"?>
+<p:sld xmlns:a="http://schemas.openxmlformats.org/drawingml/2006/main" xmlns:p="http://schemas.openxmlformats.org/presentationml/2006/main" xmlns:r="http://schemas.openxmlformats.org/officeDocument/2006/relationships">
+  <p:cSld>
+    <p:spTree>
+      <p:nvGrpSpPr>
+        <p:cNvPr id="1" name=""/>
+        <p:cNvGrpSpPr/>
+        <p:nvPr/>
+      </p:nvGrpSpPr>
+      <p:grpSpPr/>
+      <p:sp>
+        <p:nvSpPr>
+          <p:cNvPr id="2" name="Rectangle 1"/>
+          <p:cNvSpPr/>
+          <p:nvPr/>
+        </p:nvSpPr>
+        <p:spPr>
+          <a:xfrm>
+            <a:off x="0" y="0"/>
+            <a:ext cx="12191695" cy="6858000"/>
+          </a:xfrm>
+          <a:prstGeom prst="rect">
+            <a:avLst/>
+          </a:prstGeom>
+          <a:solidFill>
+            <a:srgbClr val="F7F7F5"/>
+          </a:solidFill>
+          <a:ln>
+            <a:noFill/>
+          </a:ln>
+          <a:effectLst/>
+        </p:spPr>
+        <p:style>
+          <a:lnRef idx="1">
+            <a:schemeClr val="accent1"/>
+          </a:lnRef>
+          <a:fillRef idx="3">
+            <a:schemeClr val="accent1"/>
+          </a:fillRef>
+          <a:effectRef idx="2">
+            <a:schemeClr val="accent1"/>
+          </a:effectRef>
+          <a:fontRef idx="minor">
+            <a:schemeClr val="lt1"/>
+          </a:fontRef>
+        </p:style>
+        <p:txBody>
+          <a:bodyPr rtlCol="0" anchor="ctr"/>
+          <a:lstStyle/>
+          <a:p>
+            <a:pPr algn="ctr"/>
+          </a:p>
+        </p:txBody>
+      </p:sp>
+      <p:sp>
+        <p:nvSpPr>
+          <p:cNvPr id="3" name="TextBox 2"/>
+          <p:cNvSpPr txBox="1"/>
+          <p:nvPr/>
+        </p:nvSpPr>
+        <p:spPr>
+          <a:xfrm>
+            <a:off x="777240" y="640080"/>
+            <a:ext cx="10607040" cy="1188720"/>
+          </a:xfrm>
+          <a:prstGeom prst="rect">
+            <a:avLst/>
+          </a:prstGeom>
+          <a:noFill/>
+        </p:spPr>
+        <p:txBody>
+          <a:bodyPr wrap="square">
+            <a:spAutoFit/>
+          </a:bodyPr>
+          <a:lstStyle/>
+          <a:p>
+            <a:r>
+              <a:rPr sz="3200" b="1">
+                <a:solidFill>
+                  <a:srgbClr val="1C1C1A"/>
+                </a:solidFill>
+                <a:latin typeface="Calibri"/>
+              </a:rPr>
+              <a:t>Question 3: what is the difference between a count and a rate</a:t>
+            </a:r>
+          </a:p>
+        </p:txBody>
+      </p:sp>
+      <p:sp>
+        <p:nvSpPr>
+          <p:cNvPr id="4" name="TextBox 3"/>
+          <p:cNvSpPr txBox="1"/>
+          <p:nvPr/>
+        </p:nvSpPr>
+        <p:spPr>
+          <a:xfrm>
+            <a:off x="777240" y="1965960"/>
+            <a:ext cx="10607040" cy="1905000"/>
+          </a:xfrm>
+          <a:prstGeom prst="rect">
+            <a:avLst/>
+          </a:prstGeom>
+          <a:noFill/>
+        </p:spPr>
+        <p:txBody>
+          <a:bodyPr wrap="square">
+            <a:spAutoFit/>
+          </a:bodyPr>
+          <a:lstStyle/>
+          <a:p>
+            <a:pPr>
+              <a:spcAft>
+                <a:spcPts val="1000"/>
+              </a:spcAft>
+            </a:pPr>
+            <a:r>
+              <a:rPr sz="2100" b="1">
+                <a:solidFill>
+                  <a:srgbClr val="1C1C1A"/>
+                </a:solidFill>
+                <a:latin typeface="Calibri"/>
+              </a:rPr>
+              <a:t>The answer.</a:t>
+            </a:r>
+            <a:r>
+              <a:rPr sz="2100" b="0">
+                <a:solidFill>
+                  <a:srgbClr val="1C1C1A"/>
+                </a:solidFill>
+                <a:latin typeface="Calibri"/>
+              </a:rPr>
+              <a:t> A count answers how many and a rate answers how often, and they fail in opposite ways. A count is unarguable and useless for comparing groups of different sizes. A rate compares cleanly and hides how much evidence it rests on. So they travel together, which is why the table has an orders column beside the rate column.</a:t>
+            </a:r>
+          </a:p>
+          <a:p>
+            <a:pPr>
+              <a:spcAft>
+                <a:spcPts val="1000"/>
+              </a:spcAft>
+            </a:pPr>
+            <a:r>
+              <a:rPr sz="2100" b="1">
+                <a:solidFill>
+                  <a:srgbClr val="1C1C1A"/>
+                </a:solidFill>
+                <a:latin typeface="Calibri"/>
+              </a:rPr>
+              <a:t>The follow-up.</a:t>
+            </a:r>
+            <a:r>
+              <a:rPr sz="2100" b="0">
+                <a:solidFill>
+                  <a:srgbClr val="1C1C1A"/>
+                </a:solidFill>
+                <a:latin typeface="Calibri"/>
+              </a:rPr>
+              <a:t> "Which do you lead with?" The rate, because it is the comparable one, with the count immediately beside it so nobody has to ask.</a:t>
+            </a:r>
+          </a:p>
+        </p:txBody>
+      </p:sp>
+      <p:sp>
+        <p:nvSpPr>
+          <p:cNvPr id="5" name="TextBox 4"/>
+          <p:cNvSpPr txBox="1"/>
+          <p:nvPr/>
+        </p:nvSpPr>
+        <p:spPr>
+          <a:xfrm>
+            <a:off x="777240" y="6309360"/>
+            <a:ext cx="10607040" cy="365760"/>
+          </a:xfrm>
+          <a:prstGeom prst="rect">
+            <a:avLst/>
+          </a:prstGeom>
+          <a:noFill/>
+        </p:spPr>
+        <p:txBody>
+          <a:bodyPr wrap="none">
+            <a:spAutoFit/>
+          </a:bodyPr>
+          <a:lstStyle/>
+          <a:p>
+            <a:r>
+              <a:rPr sz="1000">
+                <a:solidFill>
+                  <a:srgbClr val="5F6360"/>
+                </a:solidFill>
+                <a:latin typeface="Calibri"/>
+              </a:rPr>
+              <a:t>Week 1 Day 4, half two: the segment summary, and the count it rests on</a:t>
             </a:r>
           </a:p>
         </p:txBody>
@@ -7846,13 +12240,13 @@
           <a:lstStyle/>
           <a:p>
             <a:r>
-              <a:rPr sz="3600" b="1">
+              <a:rPr sz="3200" b="1">
                 <a:solidFill>
                   <a:srgbClr val="1C1C1A"/>
                 </a:solidFill>
                 <a:latin typeface="Calibri"/>
               </a:rPr>
-              <a:t>The metric, named before it is computed</a:t>
+              <a:t>Where this is going</a:t>
             </a:r>
           </a:p>
         </p:txBody>
@@ -7866,7 +12260,7 @@
         <p:spPr>
           <a:xfrm>
             <a:off x="777240" y="1965960"/>
-            <a:ext cx="10607040" cy="4206240"/>
+            <a:ext cx="10607040" cy="1409700"/>
           </a:xfrm>
           <a:prstGeom prst="rect">
             <a:avLst/>
@@ -7879,36 +12273,341 @@
           </a:bodyPr>
           <a:lstStyle/>
           <a:p>
-            <a:r>
-              <a:rPr sz="2100">
+            <a:pPr>
+              <a:spcAft>
+                <a:spcPts val="400"/>
+              </a:spcAft>
+            </a:pPr>
+            <a:r>
+              <a:rPr sz="1700" b="0">
+                <a:solidFill>
+                  <a:srgbClr val="2B4A7D"/>
+                </a:solidFill>
+                <a:latin typeface="Consolas"/>
+              </a:rPr>
+              <a:t>segment        orders   median amount   return rate</a:t>
+            </a:r>
+          </a:p>
+          <a:p>
+            <a:pPr>
+              <a:spcAft>
+                <a:spcPts val="400"/>
+              </a:spcAft>
+            </a:pPr>
+            <a:r>
+              <a:rPr sz="1700" b="0">
+                <a:solidFill>
+                  <a:srgbClr val="2B4A7D"/>
+                </a:solidFill>
+                <a:latin typeface="Consolas"/>
+              </a:rPr>
+              <a:t>Business            9        Rs 2,050          11.1%</a:t>
+            </a:r>
+          </a:p>
+          <a:p>
+            <a:pPr>
+              <a:spcAft>
+                <a:spcPts val="400"/>
+              </a:spcAft>
+            </a:pPr>
+            <a:r>
+              <a:rPr sz="1700" b="0">
+                <a:solidFill>
+                  <a:srgbClr val="2B4A7D"/>
+                </a:solidFill>
+                <a:latin typeface="Consolas"/>
+              </a:rPr>
+              <a:t>Student            10        Rs 1,430          20.0%</a:t>
+            </a:r>
+          </a:p>
+          <a:p>
+            <a:pPr>
+              <a:spcAft>
+                <a:spcPts val="400"/>
+              </a:spcAft>
+            </a:pPr>
+            <a:r>
+              <a:rPr sz="1700" b="0">
+                <a:solidFill>
+                  <a:srgbClr val="2B4A7D"/>
+                </a:solidFill>
+                <a:latin typeface="Consolas"/>
+              </a:rPr>
+              <a:t>Retail-Core        14        Rs 1,910          35.7%</a:t>
+            </a:r>
+          </a:p>
+          <a:p>
+            <a:pPr>
+              <a:spcAft>
+                <a:spcPts val="400"/>
+              </a:spcAft>
+            </a:pPr>
+            <a:r>
+              <a:rPr sz="1700" b="0">
+                <a:solidFill>
+                  <a:srgbClr val="2B4A7D"/>
+                </a:solidFill>
+                <a:latin typeface="Consolas"/>
+              </a:rPr>
+              <a:t>Retail-Plus        11        Rs 1,435          36.4%</a:t>
+            </a:r>
+          </a:p>
+        </p:txBody>
+      </p:sp>
+      <p:sp>
+        <p:nvSpPr>
+          <p:cNvPr id="5" name="TextBox 4"/>
+          <p:cNvSpPr txBox="1"/>
+          <p:nvPr/>
+        </p:nvSpPr>
+        <p:spPr>
+          <a:xfrm>
+            <a:off x="777240" y="3512820"/>
+            <a:ext cx="10607040" cy="790575"/>
+          </a:xfrm>
+          <a:prstGeom prst="rect">
+            <a:avLst/>
+          </a:prstGeom>
+          <a:noFill/>
+        </p:spPr>
+        <p:txBody>
+          <a:bodyPr wrap="square">
+            <a:spAutoFit/>
+          </a:bodyPr>
+          <a:lstStyle/>
+          <a:p>
+            <a:pPr>
+              <a:spcAft>
+                <a:spcPts val="1000"/>
+              </a:spcAft>
+            </a:pPr>
+            <a:r>
+              <a:rPr sz="2100" b="0">
                 <a:solidFill>
                   <a:srgbClr val="1C1C1A"/>
                 </a:solidFill>
                 <a:latin typeface="Calibri"/>
               </a:rPr>
-              <a:t>Kalpa Retail cares about returns. A returned order costs the delivery, the reverse logistics and usually the margin.</a:t>
-            </a:r>
-          </a:p>
-          <a:p>
-            <a:r>
-              <a:rPr sz="1700">
-                <a:solidFill>
-                  <a:srgbClr val="2B4A7D"/>
-                </a:solidFill>
-                <a:latin typeface="Consolas"/>
-              </a:rPr>
-              <a:t>return rate  =  orders with status "returned"  /  all orders in the group</a:t>
-            </a:r>
-          </a:p>
-          <a:p>
-            <a:r>
-              <a:rPr sz="2100">
+              <a:t>You will have built this inside the hour. Then you will spend the rest of the session refusing to send it as it stands.</a:t>
+            </a:r>
+          </a:p>
+        </p:txBody>
+      </p:sp>
+      <p:sp>
+        <p:nvSpPr>
+          <p:cNvPr id="6" name="TextBox 5"/>
+          <p:cNvSpPr txBox="1"/>
+          <p:nvPr/>
+        </p:nvSpPr>
+        <p:spPr>
+          <a:xfrm>
+            <a:off x="777240" y="6309360"/>
+            <a:ext cx="10607040" cy="365760"/>
+          </a:xfrm>
+          <a:prstGeom prst="rect">
+            <a:avLst/>
+          </a:prstGeom>
+          <a:noFill/>
+        </p:spPr>
+        <p:txBody>
+          <a:bodyPr wrap="none">
+            <a:spAutoFit/>
+          </a:bodyPr>
+          <a:lstStyle/>
+          <a:p>
+            <a:r>
+              <a:rPr sz="1000">
+                <a:solidFill>
+                  <a:srgbClr val="5F6360"/>
+                </a:solidFill>
+                <a:latin typeface="Calibri"/>
+              </a:rPr>
+              <a:t>Week 1 Day 4, half two: the segment summary, and the count it rests on</a:t>
+            </a:r>
+          </a:p>
+        </p:txBody>
+      </p:sp>
+    </p:spTree>
+  </p:cSld>
+  <p:clrMapOvr>
+    <a:masterClrMapping/>
+  </p:clrMapOvr>
+</p:sld>
+</file>
+
+<file path=ppt/slides/slide40.xml><?xml version="1.0" encoding="utf-8"?>
+<p:sld xmlns:a="http://schemas.openxmlformats.org/drawingml/2006/main" xmlns:p="http://schemas.openxmlformats.org/presentationml/2006/main" xmlns:r="http://schemas.openxmlformats.org/officeDocument/2006/relationships">
+  <p:cSld>
+    <p:spTree>
+      <p:nvGrpSpPr>
+        <p:cNvPr id="1" name=""/>
+        <p:cNvGrpSpPr/>
+        <p:nvPr/>
+      </p:nvGrpSpPr>
+      <p:grpSpPr/>
+      <p:sp>
+        <p:nvSpPr>
+          <p:cNvPr id="2" name="Rectangle 1"/>
+          <p:cNvSpPr/>
+          <p:nvPr/>
+        </p:nvSpPr>
+        <p:spPr>
+          <a:xfrm>
+            <a:off x="0" y="0"/>
+            <a:ext cx="12191695" cy="6858000"/>
+          </a:xfrm>
+          <a:prstGeom prst="rect">
+            <a:avLst/>
+          </a:prstGeom>
+          <a:solidFill>
+            <a:srgbClr val="F7F7F5"/>
+          </a:solidFill>
+          <a:ln>
+            <a:noFill/>
+          </a:ln>
+          <a:effectLst/>
+        </p:spPr>
+        <p:style>
+          <a:lnRef idx="1">
+            <a:schemeClr val="accent1"/>
+          </a:lnRef>
+          <a:fillRef idx="3">
+            <a:schemeClr val="accent1"/>
+          </a:fillRef>
+          <a:effectRef idx="2">
+            <a:schemeClr val="accent1"/>
+          </a:effectRef>
+          <a:fontRef idx="minor">
+            <a:schemeClr val="lt1"/>
+          </a:fontRef>
+        </p:style>
+        <p:txBody>
+          <a:bodyPr rtlCol="0" anchor="ctr"/>
+          <a:lstStyle/>
+          <a:p>
+            <a:pPr algn="ctr"/>
+          </a:p>
+        </p:txBody>
+      </p:sp>
+      <p:sp>
+        <p:nvSpPr>
+          <p:cNvPr id="3" name="TextBox 2"/>
+          <p:cNvSpPr txBox="1"/>
+          <p:nvPr/>
+        </p:nvSpPr>
+        <p:spPr>
+          <a:xfrm>
+            <a:off x="777240" y="640080"/>
+            <a:ext cx="10607040" cy="1188720"/>
+          </a:xfrm>
+          <a:prstGeom prst="rect">
+            <a:avLst/>
+          </a:prstGeom>
+          <a:noFill/>
+        </p:spPr>
+        <p:txBody>
+          <a:bodyPr wrap="square">
+            <a:spAutoFit/>
+          </a:bodyPr>
+          <a:lstStyle/>
+          <a:p>
+            <a:r>
+              <a:rPr sz="3200" b="1">
                 <a:solidFill>
                   <a:srgbClr val="1C1C1A"/>
                 </a:solidFill>
                 <a:latin typeface="Calibri"/>
               </a:rPr>
-              <a:t>This is the first metric in the programme where lower is better. A ranking of return rates puts the best performer at the top with the smallest number beside it. Keep that straight or the next four slides will read backwards.</a:t>
+              <a:t>Question 4: you are asked for the average order value and one order is enormous</a:t>
+            </a:r>
+          </a:p>
+        </p:txBody>
+      </p:sp>
+      <p:sp>
+        <p:nvSpPr>
+          <p:cNvPr id="4" name="TextBox 3"/>
+          <p:cNvSpPr txBox="1"/>
+          <p:nvPr/>
+        </p:nvSpPr>
+        <p:spPr>
+          <a:xfrm>
+            <a:off x="777240" y="1965960"/>
+            <a:ext cx="10607040" cy="2524125"/>
+          </a:xfrm>
+          <a:prstGeom prst="rect">
+            <a:avLst/>
+          </a:prstGeom>
+          <a:noFill/>
+        </p:spPr>
+        <p:txBody>
+          <a:bodyPr wrap="square">
+            <a:spAutoFit/>
+          </a:bodyPr>
+          <a:lstStyle/>
+          <a:p>
+            <a:pPr>
+              <a:spcAft>
+                <a:spcPts val="1000"/>
+              </a:spcAft>
+            </a:pPr>
+            <a:r>
+              <a:rPr sz="2100" b="0">
+                <a:solidFill>
+                  <a:srgbClr val="1C1C1A"/>
+                </a:solidFill>
+                <a:latin typeface="Calibri"/>
+              </a:rPr>
+              <a:t>This is half one's question arriving in the shape it actually arrives in.</a:t>
+            </a:r>
+          </a:p>
+          <a:p>
+            <a:pPr>
+              <a:spcAft>
+                <a:spcPts val="1000"/>
+              </a:spcAft>
+            </a:pPr>
+            <a:r>
+              <a:rPr sz="2100" b="1">
+                <a:solidFill>
+                  <a:srgbClr val="1C1C1A"/>
+                </a:solidFill>
+                <a:latin typeface="Calibri"/>
+              </a:rPr>
+              <a:t>The answer.</a:t>
+            </a:r>
+            <a:r>
+              <a:rPr sz="2100" b="0">
+                <a:solidFill>
+                  <a:srgbClr val="1C1C1A"/>
+                </a:solidFill>
+                <a:latin typeface="Calibri"/>
+              </a:rPr>
+              <a:t> I would send the median and say that is what I sent, and I would give the count it rests on. On this file the mean is Rs 12,753.30 and one order out of forty four sits at or above it, while the median is Rs 1,910. I would also name the large order separately rather than hiding it, because it is real and it is interesting on its own.</a:t>
+            </a:r>
+          </a:p>
+          <a:p>
+            <a:pPr>
+              <a:spcAft>
+                <a:spcPts val="1000"/>
+              </a:spcAft>
+            </a:pPr>
+            <a:r>
+              <a:rPr sz="2100" b="1">
+                <a:solidFill>
+                  <a:srgbClr val="1C1C1A"/>
+                </a:solidFill>
+                <a:latin typeface="Calibri"/>
+              </a:rPr>
+              <a:t>The follow-up.</a:t>
+            </a:r>
+            <a:r>
+              <a:rPr sz="2100" b="0">
+                <a:solidFill>
+                  <a:srgbClr val="1C1C1A"/>
+                </a:solidFill>
+                <a:latin typeface="Calibri"/>
+              </a:rPr>
+              <a:t> "What if they insist on the mean?" Then I give both with the counts, and I say which question each one answers. Usually the disagreement is about the question rather than the statistic.</a:t>
             </a:r>
           </a:p>
         </p:txBody>
@@ -7921,7 +12620,7 @@
         </p:nvSpPr>
         <p:spPr>
           <a:xfrm>
-            <a:off x="777240" y="6263640"/>
+            <a:off x="777240" y="6309360"/>
             <a:ext cx="10607040" cy="365760"/>
           </a:xfrm>
           <a:prstGeom prst="rect">
@@ -7942,7 +12641,208 @@
                 </a:solidFill>
                 <a:latin typeface="Calibri"/>
               </a:rPr>
-              <a:t>Week 1 Day 4, half two: the segment summary and its denominators</a:t>
+              <a:t>Week 1 Day 4, half two: the segment summary, and the count it rests on</a:t>
+            </a:r>
+          </a:p>
+        </p:txBody>
+      </p:sp>
+    </p:spTree>
+  </p:cSld>
+  <p:clrMapOvr>
+    <a:masterClrMapping/>
+  </p:clrMapOvr>
+</p:sld>
+</file>
+
+<file path=ppt/slides/slide41.xml><?xml version="1.0" encoding="utf-8"?>
+<p:sld xmlns:a="http://schemas.openxmlformats.org/drawingml/2006/main" xmlns:p="http://schemas.openxmlformats.org/presentationml/2006/main" xmlns:r="http://schemas.openxmlformats.org/officeDocument/2006/relationships">
+  <p:cSld>
+    <p:spTree>
+      <p:nvGrpSpPr>
+        <p:cNvPr id="1" name=""/>
+        <p:cNvGrpSpPr/>
+        <p:nvPr/>
+      </p:nvGrpSpPr>
+      <p:grpSpPr/>
+      <p:sp>
+        <p:nvSpPr>
+          <p:cNvPr id="2" name="Rectangle 1"/>
+          <p:cNvSpPr/>
+          <p:nvPr/>
+        </p:nvSpPr>
+        <p:spPr>
+          <a:xfrm>
+            <a:off x="0" y="0"/>
+            <a:ext cx="12191695" cy="6858000"/>
+          </a:xfrm>
+          <a:prstGeom prst="rect">
+            <a:avLst/>
+          </a:prstGeom>
+          <a:solidFill>
+            <a:srgbClr val="F7F7F5"/>
+          </a:solidFill>
+          <a:ln>
+            <a:noFill/>
+          </a:ln>
+          <a:effectLst/>
+        </p:spPr>
+        <p:style>
+          <a:lnRef idx="1">
+            <a:schemeClr val="accent1"/>
+          </a:lnRef>
+          <a:fillRef idx="3">
+            <a:schemeClr val="accent1"/>
+          </a:fillRef>
+          <a:effectRef idx="2">
+            <a:schemeClr val="accent1"/>
+          </a:effectRef>
+          <a:fontRef idx="minor">
+            <a:schemeClr val="lt1"/>
+          </a:fontRef>
+        </p:style>
+        <p:txBody>
+          <a:bodyPr rtlCol="0" anchor="ctr"/>
+          <a:lstStyle/>
+          <a:p>
+            <a:pPr algn="ctr"/>
+          </a:p>
+        </p:txBody>
+      </p:sp>
+      <p:sp>
+        <p:nvSpPr>
+          <p:cNvPr id="3" name="TextBox 2"/>
+          <p:cNvSpPr txBox="1"/>
+          <p:nvPr/>
+        </p:nvSpPr>
+        <p:spPr>
+          <a:xfrm>
+            <a:off x="777240" y="640080"/>
+            <a:ext cx="10607040" cy="1188720"/>
+          </a:xfrm>
+          <a:prstGeom prst="rect">
+            <a:avLst/>
+          </a:prstGeom>
+          <a:noFill/>
+        </p:spPr>
+        <p:txBody>
+          <a:bodyPr wrap="square">
+            <a:spAutoFit/>
+          </a:bodyPr>
+          <a:lstStyle/>
+          <a:p>
+            <a:r>
+              <a:rPr sz="3200" b="1">
+                <a:solidFill>
+                  <a:srgbClr val="1C1C1A"/>
+                </a:solidFill>
+                <a:latin typeface="Calibri"/>
+              </a:rPr>
+              <a:t>Crux</a:t>
+            </a:r>
+          </a:p>
+        </p:txBody>
+      </p:sp>
+      <p:sp>
+        <p:nvSpPr>
+          <p:cNvPr id="4" name="TextBox 3"/>
+          <p:cNvSpPr txBox="1"/>
+          <p:nvPr/>
+        </p:nvSpPr>
+        <p:spPr>
+          <a:xfrm>
+            <a:off x="777240" y="1965960"/>
+            <a:ext cx="10607040" cy="2028825"/>
+          </a:xfrm>
+          <a:prstGeom prst="rect">
+            <a:avLst/>
+          </a:prstGeom>
+          <a:noFill/>
+        </p:spPr>
+        <p:txBody>
+          <a:bodyPr wrap="square">
+            <a:spAutoFit/>
+          </a:bodyPr>
+          <a:lstStyle/>
+          <a:p>
+            <a:pPr>
+              <a:spcAft>
+                <a:spcPts val="1000"/>
+              </a:spcAft>
+            </a:pPr>
+            <a:r>
+              <a:rPr sz="2100" b="0">
+                <a:solidFill>
+                  <a:srgbClr val="1C1C1A"/>
+                </a:solidFill>
+                <a:latin typeface="Calibri"/>
+              </a:rPr>
+              <a:t>&gt; Every rate carries its denominator, or it lies for you while you are not in the room.</a:t>
+            </a:r>
+          </a:p>
+          <a:p>
+            <a:pPr>
+              <a:spcAft>
+                <a:spcPts val="1000"/>
+              </a:spcAft>
+            </a:pPr>
+            <a:r>
+              <a:rPr sz="2100" b="0">
+                <a:solidFill>
+                  <a:srgbClr val="1C1C1A"/>
+                </a:solidFill>
+                <a:latin typeface="Calibri"/>
+              </a:rPr>
+              <a:t>&gt; The best-performing segment in this file is also the smallest, and one order takes the lead away.</a:t>
+            </a:r>
+          </a:p>
+          <a:p>
+            <a:pPr>
+              <a:spcAft>
+                <a:spcPts val="1000"/>
+              </a:spcAft>
+            </a:pPr>
+            <a:r>
+              <a:rPr sz="2100" b="0">
+                <a:solidFill>
+                  <a:srgbClr val="1C1C1A"/>
+                </a:solidFill>
+                <a:latin typeface="Calibri"/>
+              </a:rPr>
+              <a:t>Tomorrow is Gandhi Jayanti and the institute is closed. These same orders, cleaned by you, come back as SQL tables and pandas frames in Week 2, and the summary you built by hand today becomes one line of code you will already know the answer to.</a:t>
+            </a:r>
+          </a:p>
+        </p:txBody>
+      </p:sp>
+      <p:sp>
+        <p:nvSpPr>
+          <p:cNvPr id="5" name="TextBox 4"/>
+          <p:cNvSpPr txBox="1"/>
+          <p:nvPr/>
+        </p:nvSpPr>
+        <p:spPr>
+          <a:xfrm>
+            <a:off x="777240" y="6309360"/>
+            <a:ext cx="10607040" cy="365760"/>
+          </a:xfrm>
+          <a:prstGeom prst="rect">
+            <a:avLst/>
+          </a:prstGeom>
+          <a:noFill/>
+        </p:spPr>
+        <p:txBody>
+          <a:bodyPr wrap="none">
+            <a:spAutoFit/>
+          </a:bodyPr>
+          <a:lstStyle/>
+          <a:p>
+            <a:r>
+              <a:rPr sz="1000">
+                <a:solidFill>
+                  <a:srgbClr val="5F6360"/>
+                </a:solidFill>
+                <a:latin typeface="Calibri"/>
+              </a:rPr>
+              <a:t>Week 1 Day 4, half two: the segment summary, and the count it rests on</a:t>
             </a:r>
           </a:p>
         </p:txBody>
@@ -8032,106 +12932,41 @@
           <a:lstStyle/>
           <a:p>
             <a:r>
-              <a:rPr sz="3600" b="1">
+              <a:rPr sz="3200" b="1">
                 <a:solidFill>
                   <a:srgbClr val="1C1C1A"/>
                 </a:solidFill>
                 <a:latin typeface="Calibri"/>
               </a:rPr>
-              <a:t>Where this is going</a:t>
-            </a:r>
-          </a:p>
-        </p:txBody>
-      </p:sp>
-      <p:sp>
-        <p:nvSpPr>
-          <p:cNvPr id="4" name="TextBox 3"/>
-          <p:cNvSpPr txBox="1"/>
-          <p:nvPr/>
-        </p:nvSpPr>
+              <a:t>Half two in one picture</a:t>
+            </a:r>
+          </a:p>
+        </p:txBody>
+      </p:sp>
+      <p:pic>
+        <p:nvPicPr>
+          <p:cNvPr id="4" name="Picture 3" descr="86583b010eb28668.png"/>
+          <p:cNvPicPr>
+            <a:picLocks noChangeAspect="1"/>
+          </p:cNvPicPr>
+          <p:nvPr/>
+        </p:nvPicPr>
+        <p:blipFill>
+          <a:blip r:embed="rId2"/>
+          <a:stretch>
+            <a:fillRect/>
+          </a:stretch>
+        </p:blipFill>
         <p:spPr>
           <a:xfrm>
             <a:off x="777240" y="1965960"/>
-            <a:ext cx="10607040" cy="4206240"/>
-          </a:xfrm>
-          <a:prstGeom prst="rect">
-            <a:avLst/>
-          </a:prstGeom>
-          <a:noFill/>
-        </p:spPr>
-        <p:txBody>
-          <a:bodyPr wrap="square">
-            <a:spAutoFit/>
-          </a:bodyPr>
-          <a:lstStyle/>
-          <a:p>
-            <a:r>
-              <a:rPr sz="1700">
-                <a:solidFill>
-                  <a:srgbClr val="2B4A7D"/>
-                </a:solidFill>
-                <a:latin typeface="Consolas"/>
-              </a:rPr>
-              <a:t>segment        orders   median amount   return rate</a:t>
-            </a:r>
-          </a:p>
-          <a:p>
-            <a:r>
-              <a:rPr sz="1700">
-                <a:solidFill>
-                  <a:srgbClr val="2B4A7D"/>
-                </a:solidFill>
-                <a:latin typeface="Consolas"/>
-              </a:rPr>
-              <a:t>Business            9        Rs 2,050          11.1%</a:t>
-            </a:r>
-          </a:p>
-          <a:p>
-            <a:r>
-              <a:rPr sz="1700">
-                <a:solidFill>
-                  <a:srgbClr val="2B4A7D"/>
-                </a:solidFill>
-                <a:latin typeface="Consolas"/>
-              </a:rPr>
-              <a:t>Student            10        Rs 1,430          20.0%</a:t>
-            </a:r>
-          </a:p>
-          <a:p>
-            <a:r>
-              <a:rPr sz="1700">
-                <a:solidFill>
-                  <a:srgbClr val="2B4A7D"/>
-                </a:solidFill>
-                <a:latin typeface="Consolas"/>
-              </a:rPr>
-              <a:t>Retail-Core        14        Rs 1,910          35.7%</a:t>
-            </a:r>
-          </a:p>
-          <a:p>
-            <a:r>
-              <a:rPr sz="1700">
-                <a:solidFill>
-                  <a:srgbClr val="2B4A7D"/>
-                </a:solidFill>
-                <a:latin typeface="Consolas"/>
-              </a:rPr>
-              <a:t>Retail-Plus        11        Rs 1,435          36.4%</a:t>
-            </a:r>
-          </a:p>
-          <a:p>
-            <a:r>
-              <a:rPr sz="2100">
-                <a:solidFill>
-                  <a:srgbClr val="1C1C1A"/>
-                </a:solidFill>
-                <a:latin typeface="Calibri"/>
-              </a:rPr>
-              <a:t>You will have built this inside the hour. Then you will spend the rest of the session refusing to send it as it stands.</a:t>
-            </a:r>
-          </a:p>
-        </p:txBody>
-      </p:sp>
+            <a:ext cx="10607040" cy="786200"/>
+          </a:xfrm>
+          <a:prstGeom prst="rect">
+            <a:avLst/>
+          </a:prstGeom>
+        </p:spPr>
+      </p:pic>
       <p:sp>
         <p:nvSpPr>
           <p:cNvPr id="5" name="TextBox 4"/>
@@ -8140,7 +12975,7 @@
         </p:nvSpPr>
         <p:spPr>
           <a:xfrm>
-            <a:off x="777240" y="6263640"/>
+            <a:off x="777240" y="6309360"/>
             <a:ext cx="10607040" cy="365760"/>
           </a:xfrm>
           <a:prstGeom prst="rect">
@@ -8161,7 +12996,7 @@
                 </a:solidFill>
                 <a:latin typeface="Calibri"/>
               </a:rPr>
-              <a:t>Week 1 Day 4, half two: the segment summary and its denominators</a:t>
+              <a:t>Week 1 Day 4, half two: the segment summary, and the count it rests on</a:t>
             </a:r>
           </a:p>
         </p:txBody>
@@ -8250,6 +13085,7 @@
           </a:bodyPr>
           <a:lstStyle/>
           <a:p>
+            <a:pPr algn="ctr"/>
             <a:r>
               <a:rPr sz="3600" b="1">
                 <a:solidFill>
@@ -8271,7 +13107,7 @@
         <p:spPr>
           <a:xfrm>
             <a:off x="777240" y="1965960"/>
-            <a:ext cx="10607040" cy="4206240"/>
+            <a:ext cx="10607040" cy="790575"/>
           </a:xfrm>
           <a:prstGeom prst="rect">
             <a:avLst/>
@@ -8284,14 +13120,28 @@
           </a:bodyPr>
           <a:lstStyle/>
           <a:p>
-            <a:r>
-              <a:rPr sz="2100">
+            <a:pPr algn="ctr">
+              <a:spcAft>
+                <a:spcPts val="1000"/>
+              </a:spcAft>
+            </a:pPr>
+            <a:r>
+              <a:rPr sz="2100" b="0">
                 <a:solidFill>
                   <a:srgbClr val="FFFFFF"/>
                 </a:solidFill>
                 <a:latin typeface="Calibri"/>
               </a:rPr>
-              <a:t>[one column] &gt; [what is typical] &gt; [what one order does] &gt; [what the shape says] &gt; [per segment, with denominators]</a:t>
+              <a:t>[one column] &gt; [what is typical] &gt; [what one order does] &gt; [what the shape says] &gt; </a:t>
+            </a:r>
+            <a:r>
+              <a:rPr sz="2100" b="1">
+                <a:solidFill>
+                  <a:srgbClr val="FFFFFF"/>
+                </a:solidFill>
+                <a:latin typeface="Calibri"/>
+              </a:rPr>
+              <a:t>[per segment, with denominators]</a:t>
             </a:r>
           </a:p>
         </p:txBody>
@@ -8304,7 +13154,7 @@
         </p:nvSpPr>
         <p:spPr>
           <a:xfrm>
-            <a:off x="777240" y="6263640"/>
+            <a:off x="777240" y="6309360"/>
             <a:ext cx="10607040" cy="365760"/>
           </a:xfrm>
           <a:prstGeom prst="rect">
@@ -8325,7 +13175,7 @@
                 </a:solidFill>
                 <a:latin typeface="Calibri"/>
               </a:rPr>
-              <a:t>Week 1 Day 4, half two: the segment summary and its denominators</a:t>
+              <a:t>Week 1 Day 4, half two: the segment summary, and the count it rests on</a:t>
             </a:r>
           </a:p>
         </p:txBody>
@@ -8415,7 +13265,7 @@
           <a:lstStyle/>
           <a:p>
             <a:r>
-              <a:rPr sz="3600" b="1">
+              <a:rPr sz="3200" b="1">
                 <a:solidFill>
                   <a:srgbClr val="1C1C1A"/>
                 </a:solidFill>
@@ -8435,7 +13285,7 @@
         <p:spPr>
           <a:xfrm>
             <a:off x="777240" y="1965960"/>
-            <a:ext cx="10607040" cy="4206240"/>
+            <a:ext cx="10607040" cy="542925"/>
           </a:xfrm>
           <a:prstGeom prst="rect">
             <a:avLst/>
@@ -8448,8 +13298,13 @@
           </a:bodyPr>
           <a:lstStyle/>
           <a:p>
-            <a:r>
-              <a:rPr sz="2100">
+            <a:pPr>
+              <a:spcAft>
+                <a:spcPts val="1000"/>
+              </a:spcAft>
+            </a:pPr>
+            <a:r>
+              <a:rPr sz="2100" b="0">
                 <a:solidFill>
                   <a:srgbClr val="1C1C1A"/>
                 </a:solidFill>
@@ -8458,9 +13313,37 @@
               <a:t>Two segments in two different companies, same reported number:</a:t>
             </a:r>
           </a:p>
-          <a:p>
-            <a:r>
-              <a:rPr sz="1700">
+        </p:txBody>
+      </p:sp>
+      <p:sp>
+        <p:nvSpPr>
+          <p:cNvPr id="5" name="TextBox 4"/>
+          <p:cNvSpPr txBox="1"/>
+          <p:nvPr/>
+        </p:nvSpPr>
+        <p:spPr>
+          <a:xfrm>
+            <a:off x="777240" y="2646045"/>
+            <a:ext cx="10607040" cy="666750"/>
+          </a:xfrm>
+          <a:prstGeom prst="rect">
+            <a:avLst/>
+          </a:prstGeom>
+          <a:noFill/>
+        </p:spPr>
+        <p:txBody>
+          <a:bodyPr wrap="square">
+            <a:spAutoFit/>
+          </a:bodyPr>
+          <a:lstStyle/>
+          <a:p>
+            <a:pPr>
+              <a:spcAft>
+                <a:spcPts val="400"/>
+              </a:spcAft>
+            </a:pPr>
+            <a:r>
+              <a:rPr sz="1700" b="0">
                 <a:solidFill>
                   <a:srgbClr val="2B4A7D"/>
                 </a:solidFill>
@@ -8470,8 +13353,13 @@
             </a:r>
           </a:p>
           <a:p>
-            <a:r>
-              <a:rPr sz="1700">
+            <a:pPr>
+              <a:spcAft>
+                <a:spcPts val="400"/>
+              </a:spcAft>
+            </a:pPr>
+            <a:r>
+              <a:rPr sz="1700" b="0">
                 <a:solidFill>
                   <a:srgbClr val="2B4A7D"/>
                 </a:solidFill>
@@ -8480,9 +13368,37 @@
               <a:t>segment Y:   returned 500 of 1200      41.7%</a:t>
             </a:r>
           </a:p>
-          <a:p>
-            <a:r>
-              <a:rPr sz="2100">
+        </p:txBody>
+      </p:sp>
+      <p:sp>
+        <p:nvSpPr>
+          <p:cNvPr id="6" name="TextBox 5"/>
+          <p:cNvSpPr txBox="1"/>
+          <p:nvPr/>
+        </p:nvSpPr>
+        <p:spPr>
+          <a:xfrm>
+            <a:off x="777240" y="3449954"/>
+            <a:ext cx="10607040" cy="542925"/>
+          </a:xfrm>
+          <a:prstGeom prst="rect">
+            <a:avLst/>
+          </a:prstGeom>
+          <a:noFill/>
+        </p:spPr>
+        <p:txBody>
+          <a:bodyPr wrap="square">
+            <a:spAutoFit/>
+          </a:bodyPr>
+          <a:lstStyle/>
+          <a:p>
+            <a:pPr>
+              <a:spcAft>
+                <a:spcPts val="1000"/>
+              </a:spcAft>
+            </a:pPr>
+            <a:r>
+              <a:rPr sz="2100" b="0">
                 <a:solidFill>
                   <a:srgbClr val="1C1C1A"/>
                 </a:solidFill>
@@ -8495,13 +13411,13 @@
       </p:sp>
       <p:sp>
         <p:nvSpPr>
-          <p:cNvPr id="5" name="TextBox 4"/>
-          <p:cNvSpPr txBox="1"/>
-          <p:nvPr/>
-        </p:nvSpPr>
-        <p:spPr>
-          <a:xfrm>
-            <a:off x="777240" y="6263640"/>
+          <p:cNvPr id="7" name="TextBox 6"/>
+          <p:cNvSpPr txBox="1"/>
+          <p:nvPr/>
+        </p:nvSpPr>
+        <p:spPr>
+          <a:xfrm>
+            <a:off x="777240" y="6309360"/>
             <a:ext cx="10607040" cy="365760"/>
           </a:xfrm>
           <a:prstGeom prst="rect">
@@ -8522,7 +13438,7 @@
                 </a:solidFill>
                 <a:latin typeface="Calibri"/>
               </a:rPr>
-              <a:t>Week 1 Day 4, half two: the segment summary and its denominators</a:t>
+              <a:t>Week 1 Day 4, half two: the segment summary, and the count it rests on</a:t>
             </a:r>
           </a:p>
         </p:txBody>
@@ -8612,7 +13528,7 @@
           <a:lstStyle/>
           <a:p>
             <a:r>
-              <a:rPr sz="3600" b="1">
+              <a:rPr sz="3200" b="1">
                 <a:solidFill>
                   <a:srgbClr val="1C1C1A"/>
                 </a:solidFill>
@@ -8632,7 +13548,7 @@
         <p:spPr>
           <a:xfrm>
             <a:off x="777240" y="1965960"/>
-            <a:ext cx="10607040" cy="4206240"/>
+            <a:ext cx="10607040" cy="1533525"/>
           </a:xfrm>
           <a:prstGeom prst="rect">
             <a:avLst/>
@@ -8645,8 +13561,13 @@
           </a:bodyPr>
           <a:lstStyle/>
           <a:p>
-            <a:r>
-              <a:rPr sz="2100">
+            <a:pPr>
+              <a:spcAft>
+                <a:spcPts val="1000"/>
+              </a:spcAft>
+            </a:pPr>
+            <a:r>
+              <a:rPr sz="2100" b="0">
                 <a:solidFill>
                   <a:srgbClr val="1C1C1A"/>
                 </a:solidFill>
@@ -8656,8 +13577,13 @@
             </a:r>
           </a:p>
           <a:p>
-            <a:r>
-              <a:rPr sz="2100">
+            <a:pPr>
+              <a:spcAft>
+                <a:spcPts val="1000"/>
+              </a:spcAft>
+            </a:pPr>
+            <a:r>
+              <a:rPr sz="2100" b="0">
                 <a:solidFill>
                   <a:srgbClr val="1C1C1A"/>
                 </a:solidFill>
@@ -8667,8 +13593,13 @@
             </a:r>
           </a:p>
           <a:p>
-            <a:r>
-              <a:rPr sz="2100">
+            <a:pPr>
+              <a:spcAft>
+                <a:spcPts val="1000"/>
+              </a:spcAft>
+            </a:pPr>
+            <a:r>
+              <a:rPr sz="2100" b="0">
                 <a:solidFill>
                   <a:srgbClr val="1C1C1A"/>
                 </a:solidFill>
@@ -8687,7 +13618,7 @@
         </p:nvSpPr>
         <p:spPr>
           <a:xfrm>
-            <a:off x="777240" y="6263640"/>
+            <a:off x="777240" y="6309360"/>
             <a:ext cx="10607040" cy="365760"/>
           </a:xfrm>
           <a:prstGeom prst="rect">
@@ -8708,7 +13639,7 @@
                 </a:solidFill>
                 <a:latin typeface="Calibri"/>
               </a:rPr>
-              <a:t>Week 1 Day 4, half two: the segment summary and its denominators</a:t>
+              <a:t>Week 1 Day 4, half two: the segment summary, and the count it rests on</a:t>
             </a:r>
           </a:p>
         </p:txBody>
@@ -8798,7 +13729,7 @@
           <a:lstStyle/>
           <a:p>
             <a:r>
-              <a:rPr sz="3600" b="1">
+              <a:rPr sz="3200" b="1">
                 <a:solidFill>
                   <a:srgbClr val="1C1C1A"/>
                 </a:solidFill>
@@ -8818,7 +13749,7 @@
         <p:spPr>
           <a:xfrm>
             <a:off x="777240" y="1965960"/>
-            <a:ext cx="10607040" cy="4206240"/>
+            <a:ext cx="10607040" cy="502920"/>
           </a:xfrm>
           <a:prstGeom prst="rect">
             <a:avLst/>
@@ -8831,8 +13762,13 @@
           </a:bodyPr>
           <a:lstStyle/>
           <a:p>
-            <a:r>
-              <a:rPr sz="1700">
+            <a:pPr>
+              <a:spcAft>
+                <a:spcPts val="400"/>
+              </a:spcAft>
+            </a:pPr>
+            <a:r>
+              <a:rPr sz="1700" b="0">
                 <a:solidFill>
                   <a:srgbClr val="2B4A7D"/>
                 </a:solidFill>
@@ -8841,9 +13777,37 @@
               <a:t>rate = how many did the thing  /  how many could have</a:t>
             </a:r>
           </a:p>
-          <a:p>
-            <a:r>
-              <a:rPr sz="2100">
+        </p:txBody>
+      </p:sp>
+      <p:sp>
+        <p:nvSpPr>
+          <p:cNvPr id="5" name="TextBox 4"/>
+          <p:cNvSpPr txBox="1"/>
+          <p:nvPr/>
+        </p:nvSpPr>
+        <p:spPr>
+          <a:xfrm>
+            <a:off x="777240" y="2606040"/>
+            <a:ext cx="10607040" cy="914400"/>
+          </a:xfrm>
+          <a:prstGeom prst="rect">
+            <a:avLst/>
+          </a:prstGeom>
+          <a:noFill/>
+        </p:spPr>
+        <p:txBody>
+          <a:bodyPr wrap="square">
+            <a:spAutoFit/>
+          </a:bodyPr>
+          <a:lstStyle/>
+          <a:p>
+            <a:pPr>
+              <a:spcAft>
+                <a:spcPts val="1000"/>
+              </a:spcAft>
+            </a:pPr>
+            <a:r>
+              <a:rPr sz="2100" b="0">
                 <a:solidFill>
                   <a:srgbClr val="1C1C1A"/>
                 </a:solidFill>
@@ -8853,8 +13817,13 @@
             </a:r>
           </a:p>
           <a:p>
-            <a:r>
-              <a:rPr sz="2100">
+            <a:pPr>
+              <a:spcAft>
+                <a:spcPts val="1000"/>
+              </a:spcAft>
+            </a:pPr>
+            <a:r>
+              <a:rPr sz="2100" b="0">
                 <a:solidFill>
                   <a:srgbClr val="1C1C1A"/>
                 </a:solidFill>
@@ -8867,13 +13836,13 @@
       </p:sp>
       <p:sp>
         <p:nvSpPr>
-          <p:cNvPr id="5" name="TextBox 4"/>
-          <p:cNvSpPr txBox="1"/>
-          <p:nvPr/>
-        </p:nvSpPr>
-        <p:spPr>
-          <a:xfrm>
-            <a:off x="777240" y="6263640"/>
+          <p:cNvPr id="6" name="TextBox 5"/>
+          <p:cNvSpPr txBox="1"/>
+          <p:nvPr/>
+        </p:nvSpPr>
+        <p:spPr>
+          <a:xfrm>
+            <a:off x="777240" y="6309360"/>
             <a:ext cx="10607040" cy="365760"/>
           </a:xfrm>
           <a:prstGeom prst="rect">
@@ -8894,7 +13863,7 @@
                 </a:solidFill>
                 <a:latin typeface="Calibri"/>
               </a:rPr>
-              <a:t>Week 1 Day 4, half two: the segment summary and its denominators</a:t>
+              <a:t>Week 1 Day 4, half two: the segment summary, and the count it rests on</a:t>
             </a:r>
           </a:p>
         </p:txBody>
